--- a/docs/pptx/whole/jx-linsubhr-sens-aki2.pptx
+++ b/docs/pptx/whole/jx-linsubhr-sens-aki2.pptx
@@ -5339,7 +5339,7 @@
           <p:spPr>
             <a:xfrm>
               <a:off x="817517" y="1896563"/>
-              <a:ext cx="6169365" cy="82021"/>
+              <a:ext cx="6833128" cy="82021"/>
             </a:xfrm>
             <a:prstGeom prst="rect">
               <a:avLst/>
@@ -5371,7 +5371,7 @@
                   <a:latin typeface="Helvetica"/>
                   <a:cs typeface="Helvetica"/>
                 </a:rPr>
-                <a:t>subHR per 0.1 ratio decline: 1.24 (1.09-1.41), p = 0.001  |  per IQR decline (Δ = 0.27): 1.80 (1.26-2.58)  |  IQR: [0.71, 0.98]</a:t>
+                <a:t>subHR per 0.1 ratio decline: 1.24 (1.09-1.41), p_Bonf = 0.008 (n = 6)  |  per IQR decline (Δ = 0.27): 1.80 (1.26-2.58)  |  IQR: [0.71, 0.98]</a:t>
               </a:r>
             </a:p>
           </p:txBody>

--- a/docs/pptx/whole/jx-linsubhr-sens-aki2.pptx
+++ b/docs/pptx/whole/jx-linsubhr-sens-aki2.pptx
@@ -5062,8 +5062,8 @@
           </p:nvSpPr>
           <p:spPr>
             <a:xfrm>
-              <a:off x="1980137" y="5785772"/>
-              <a:ext cx="155356" cy="80101"/>
+              <a:off x="1977028" y="5785772"/>
+              <a:ext cx="161574" cy="80101"/>
             </a:xfrm>
             <a:prstGeom prst="rect">
               <a:avLst/>
@@ -5095,7 +5095,7 @@
                   <a:latin typeface="Helvetica"/>
                   <a:cs typeface="Helvetica"/>
                 </a:rPr>
-                <a:t>0.6</a:t>
+                <a:t>-40</a:t>
               </a:r>
             </a:p>
           </p:txBody>
@@ -5108,8 +5108,8 @@
           </p:nvSpPr>
           <p:spPr>
             <a:xfrm>
-              <a:off x="3731922" y="5785772"/>
-              <a:ext cx="155356" cy="80101"/>
+              <a:off x="3728813" y="5785772"/>
+              <a:ext cx="161574" cy="80101"/>
             </a:xfrm>
             <a:prstGeom prst="rect">
               <a:avLst/>
@@ -5141,7 +5141,7 @@
                   <a:latin typeface="Helvetica"/>
                   <a:cs typeface="Helvetica"/>
                 </a:rPr>
-                <a:t>0.8</a:t>
+                <a:t>-20</a:t>
               </a:r>
             </a:p>
           </p:txBody>
@@ -5154,8 +5154,8 @@
           </p:nvSpPr>
           <p:spPr>
             <a:xfrm>
-              <a:off x="5483707" y="5785772"/>
-              <a:ext cx="155356" cy="80101"/>
+              <a:off x="5530296" y="5785772"/>
+              <a:ext cx="62179" cy="80101"/>
             </a:xfrm>
             <a:prstGeom prst="rect">
               <a:avLst/>
@@ -5187,7 +5187,7 @@
                   <a:latin typeface="Helvetica"/>
                   <a:cs typeface="Helvetica"/>
                 </a:rPr>
-                <a:t>1.0</a:t>
+                <a:t>0</a:t>
               </a:r>
             </a:p>
           </p:txBody>
@@ -5200,8 +5200,8 @@
           </p:nvSpPr>
           <p:spPr>
             <a:xfrm>
-              <a:off x="7235493" y="5785772"/>
-              <a:ext cx="155356" cy="80101"/>
+              <a:off x="7250992" y="5785772"/>
+              <a:ext cx="124358" cy="80101"/>
             </a:xfrm>
             <a:prstGeom prst="rect">
               <a:avLst/>
@@ -5233,7 +5233,7 @@
                   <a:latin typeface="Helvetica"/>
                   <a:cs typeface="Helvetica"/>
                 </a:rPr>
-                <a:t>1.2</a:t>
+                <a:t>20</a:t>
               </a:r>
             </a:p>
           </p:txBody>
@@ -5246,8 +5246,8 @@
           </p:nvSpPr>
           <p:spPr>
             <a:xfrm>
-              <a:off x="2691419" y="5925448"/>
-              <a:ext cx="4051889" cy="100218"/>
+              <a:off x="1561815" y="5925448"/>
+              <a:ext cx="6311097" cy="100218"/>
             </a:xfrm>
             <a:prstGeom prst="rect">
               <a:avLst/>
@@ -5279,7 +5279,7 @@
                   <a:latin typeface="Helvetica"/>
                   <a:cs typeface="Helvetica"/>
                 </a:rPr>
-                <a:t>Sensitivity eGFR Ratio (CKD-EPI 2012 CysC / CKD-EPI 2021 Cr)</a:t>
+                <a:t>Sensitivity eGFR Difference (%): 100 × (CKD-EPI 2012 CysC − CKD-EPI 2021 Cr) / CKD-EPI 2021 Cr</a:t>
               </a:r>
             </a:p>
           </p:txBody>
@@ -5339,7 +5339,7 @@
           <p:spPr>
             <a:xfrm>
               <a:off x="817517" y="1896563"/>
-              <a:ext cx="6833128" cy="82021"/>
+              <a:ext cx="6959864" cy="82021"/>
             </a:xfrm>
             <a:prstGeom prst="rect">
               <a:avLst/>
@@ -5371,7 +5371,7 @@
                   <a:latin typeface="Helvetica"/>
                   <a:cs typeface="Helvetica"/>
                 </a:rPr>
-                <a:t>subHR per 0.1 ratio decline: 1.24 (1.09-1.41), p_Bonf = 0.008 (n = 6)  |  per IQR decline (Δ = 0.27): 1.80 (1.26-2.58)  |  IQR: [0.71, 0.98]</a:t>
+                <a:t>subHR per 10 % decline: 1.24 (1.09-1.41), p_Bonf = 0.008 (n = 6)  |  per IQR decline (Δ = 27.5 %): 1.80 (1.26-2.58)  |  IQR: [-29.1, -1.6] %</a:t>
               </a:r>
             </a:p>
           </p:txBody>

--- a/docs/pptx/whole/jx-linsubhr-sens-aki2.pptx
+++ b/docs/pptx/whole/jx-linsubhr-sens-aki2.pptx
@@ -2265,34 +2265,26 @@
         </p:sp>
         <p:sp>
           <p:nvSpPr>
-            <p:cNvPr id="4" name="pl4"/>
+            <p:cNvPr id="4" name="rc4"/>
             <p:cNvSpPr/>
             <p:nvPr/>
           </p:nvSpPr>
           <p:spPr>
             <a:xfrm>
-              <a:off x="817517" y="5142518"/>
-              <a:ext cx="7799693" cy="0"/>
+              <a:off x="457200" y="1600200"/>
+              <a:ext cx="8229600" cy="4525962"/>
             </a:xfrm>
-            <a:custGeom>
+            <a:prstGeom prst="rect">
               <a:avLst/>
-              <a:pathLst>
-                <a:path w="7799693" h="0">
-                  <a:moveTo>
-                    <a:pt x="0" y="0"/>
-                  </a:moveTo>
-                  <a:lnTo>
-                    <a:pt x="7799693" y="0"/>
-                  </a:lnTo>
-                  <a:lnTo>
-                    <a:pt x="7799693" y="0"/>
-                  </a:lnTo>
-                </a:path>
-              </a:pathLst>
-            </a:custGeom>
-            <a:ln w="6775" cap="flat">
+            </a:prstGeom>
+            <a:solidFill>
+              <a:srgbClr val="FFFFFF">
+                <a:alpha val="100000"/>
+              </a:srgbClr>
+            </a:solidFill>
+            <a:ln w="13550" cap="rnd">
               <a:solidFill>
-                <a:srgbClr val="EBEBEB">
+                <a:srgbClr val="FFFFFF">
                   <a:alpha val="100000"/>
                 </a:srgbClr>
               </a:solidFill>
@@ -2314,21 +2306,21 @@
           </p:nvSpPr>
           <p:spPr>
             <a:xfrm>
-              <a:off x="817517" y="4313054"/>
-              <a:ext cx="7799693" cy="0"/>
+              <a:off x="887106" y="3250627"/>
+              <a:ext cx="7660515" cy="0"/>
             </a:xfrm>
             <a:custGeom>
               <a:avLst/>
               <a:pathLst>
-                <a:path w="7799693" h="0">
+                <a:path w="7660515" h="0">
                   <a:moveTo>
                     <a:pt x="0" y="0"/>
                   </a:moveTo>
                   <a:lnTo>
-                    <a:pt x="7799693" y="0"/>
-                  </a:lnTo>
-                  <a:lnTo>
-                    <a:pt x="7799693" y="0"/>
+                    <a:pt x="7660515" y="0"/>
+                  </a:lnTo>
+                  <a:lnTo>
+                    <a:pt x="7660515" y="0"/>
                   </a:lnTo>
                 </a:path>
               </a:pathLst>
@@ -2357,21 +2349,21 @@
           </p:nvSpPr>
           <p:spPr>
             <a:xfrm>
-              <a:off x="817517" y="3483591"/>
-              <a:ext cx="7799693" cy="0"/>
+              <a:off x="887106" y="2951293"/>
+              <a:ext cx="7660515" cy="0"/>
             </a:xfrm>
             <a:custGeom>
               <a:avLst/>
               <a:pathLst>
-                <a:path w="7799693" h="0">
+                <a:path w="7660515" h="0">
                   <a:moveTo>
                     <a:pt x="0" y="0"/>
                   </a:moveTo>
                   <a:lnTo>
-                    <a:pt x="7799693" y="0"/>
-                  </a:lnTo>
-                  <a:lnTo>
-                    <a:pt x="7799693" y="0"/>
+                    <a:pt x="7660515" y="0"/>
+                  </a:lnTo>
+                  <a:lnTo>
+                    <a:pt x="7660515" y="0"/>
                   </a:lnTo>
                 </a:path>
               </a:pathLst>
@@ -2400,21 +2392,21 @@
           </p:nvSpPr>
           <p:spPr>
             <a:xfrm>
-              <a:off x="817517" y="2654127"/>
-              <a:ext cx="7799693" cy="0"/>
+              <a:off x="887106" y="2651959"/>
+              <a:ext cx="7660515" cy="0"/>
             </a:xfrm>
             <a:custGeom>
               <a:avLst/>
               <a:pathLst>
-                <a:path w="7799693" h="0">
+                <a:path w="7660515" h="0">
                   <a:moveTo>
                     <a:pt x="0" y="0"/>
                   </a:moveTo>
                   <a:lnTo>
-                    <a:pt x="7799693" y="0"/>
-                  </a:lnTo>
-                  <a:lnTo>
-                    <a:pt x="7799693" y="0"/>
+                    <a:pt x="7660515" y="0"/>
+                  </a:lnTo>
+                  <a:lnTo>
+                    <a:pt x="7660515" y="0"/>
                   </a:lnTo>
                 </a:path>
               </a:pathLst>
@@ -2443,21 +2435,21 @@
           </p:nvSpPr>
           <p:spPr>
             <a:xfrm>
-              <a:off x="1181923" y="2073503"/>
-              <a:ext cx="0" cy="3649639"/>
+              <a:off x="887106" y="2352625"/>
+              <a:ext cx="7660515" cy="0"/>
             </a:xfrm>
             <a:custGeom>
               <a:avLst/>
               <a:pathLst>
-                <a:path w="0" h="3649639">
+                <a:path w="7660515" h="0">
                   <a:moveTo>
-                    <a:pt x="0" y="3649639"/>
+                    <a:pt x="0" y="0"/>
                   </a:moveTo>
                   <a:lnTo>
-                    <a:pt x="0" y="0"/>
-                  </a:lnTo>
-                  <a:lnTo>
-                    <a:pt x="0" y="0"/>
+                    <a:pt x="7660515" y="0"/>
+                  </a:lnTo>
+                  <a:lnTo>
+                    <a:pt x="7660515" y="0"/>
                   </a:lnTo>
                 </a:path>
               </a:pathLst>
@@ -2486,15 +2478,15 @@
           </p:nvSpPr>
           <p:spPr>
             <a:xfrm>
-              <a:off x="2933708" y="2073503"/>
-              <a:ext cx="0" cy="3649639"/>
+              <a:off x="1245010" y="2143092"/>
+              <a:ext cx="0" cy="1317069"/>
             </a:xfrm>
             <a:custGeom>
               <a:avLst/>
               <a:pathLst>
-                <a:path w="0" h="3649639">
+                <a:path w="0" h="1317069">
                   <a:moveTo>
-                    <a:pt x="0" y="3649639"/>
+                    <a:pt x="0" y="1317069"/>
                   </a:moveTo>
                   <a:lnTo>
                     <a:pt x="0" y="0"/>
@@ -2529,15 +2521,15 @@
           </p:nvSpPr>
           <p:spPr>
             <a:xfrm>
-              <a:off x="4685493" y="2073503"/>
-              <a:ext cx="0" cy="3649639"/>
+              <a:off x="2965536" y="2143092"/>
+              <a:ext cx="0" cy="1317069"/>
             </a:xfrm>
             <a:custGeom>
               <a:avLst/>
               <a:pathLst>
-                <a:path w="0" h="3649639">
+                <a:path w="0" h="1317069">
                   <a:moveTo>
-                    <a:pt x="0" y="3649639"/>
+                    <a:pt x="0" y="1317069"/>
                   </a:moveTo>
                   <a:lnTo>
                     <a:pt x="0" y="0"/>
@@ -2572,15 +2564,15 @@
           </p:nvSpPr>
           <p:spPr>
             <a:xfrm>
-              <a:off x="6437278" y="2073503"/>
-              <a:ext cx="0" cy="3649639"/>
+              <a:off x="4686062" y="2143092"/>
+              <a:ext cx="0" cy="1317069"/>
             </a:xfrm>
             <a:custGeom>
               <a:avLst/>
               <a:pathLst>
-                <a:path w="0" h="3649639">
+                <a:path w="0" h="1317069">
                   <a:moveTo>
-                    <a:pt x="0" y="3649639"/>
+                    <a:pt x="0" y="1317069"/>
                   </a:moveTo>
                   <a:lnTo>
                     <a:pt x="0" y="0"/>
@@ -2615,15 +2607,15 @@
           </p:nvSpPr>
           <p:spPr>
             <a:xfrm>
-              <a:off x="8189063" y="2073503"/>
-              <a:ext cx="0" cy="3649639"/>
+              <a:off x="6406588" y="2143092"/>
+              <a:ext cx="0" cy="1317069"/>
             </a:xfrm>
             <a:custGeom>
               <a:avLst/>
               <a:pathLst>
-                <a:path w="0" h="3649639">
+                <a:path w="0" h="1317069">
                   <a:moveTo>
-                    <a:pt x="0" y="3649639"/>
+                    <a:pt x="0" y="1317069"/>
                   </a:moveTo>
                   <a:lnTo>
                     <a:pt x="0" y="0"/>
@@ -2658,26 +2650,26 @@
           </p:nvSpPr>
           <p:spPr>
             <a:xfrm>
-              <a:off x="817517" y="5557249"/>
-              <a:ext cx="7799693" cy="0"/>
+              <a:off x="8127114" y="2143092"/>
+              <a:ext cx="0" cy="1317069"/>
             </a:xfrm>
             <a:custGeom>
               <a:avLst/>
               <a:pathLst>
-                <a:path w="7799693" h="0">
+                <a:path w="0" h="1317069">
                   <a:moveTo>
+                    <a:pt x="0" y="1317069"/>
+                  </a:moveTo>
+                  <a:lnTo>
                     <a:pt x="0" y="0"/>
-                  </a:moveTo>
-                  <a:lnTo>
-                    <a:pt x="7799693" y="0"/>
-                  </a:lnTo>
-                  <a:lnTo>
-                    <a:pt x="7799693" y="0"/>
+                  </a:lnTo>
+                  <a:lnTo>
+                    <a:pt x="0" y="0"/>
                   </a:lnTo>
                 </a:path>
               </a:pathLst>
             </a:custGeom>
-            <a:ln w="13550" cap="flat">
+            <a:ln w="6775" cap="flat">
               <a:solidFill>
                 <a:srgbClr val="EBEBEB">
                   <a:alpha val="100000"/>
@@ -2701,21 +2693,21 @@
           </p:nvSpPr>
           <p:spPr>
             <a:xfrm>
-              <a:off x="817517" y="4727786"/>
-              <a:ext cx="7799693" cy="0"/>
+              <a:off x="887106" y="3400294"/>
+              <a:ext cx="7660515" cy="0"/>
             </a:xfrm>
             <a:custGeom>
               <a:avLst/>
               <a:pathLst>
-                <a:path w="7799693" h="0">
+                <a:path w="7660515" h="0">
                   <a:moveTo>
                     <a:pt x="0" y="0"/>
                   </a:moveTo>
                   <a:lnTo>
-                    <a:pt x="7799693" y="0"/>
-                  </a:lnTo>
-                  <a:lnTo>
-                    <a:pt x="7799693" y="0"/>
+                    <a:pt x="7660515" y="0"/>
+                  </a:lnTo>
+                  <a:lnTo>
+                    <a:pt x="7660515" y="0"/>
                   </a:lnTo>
                 </a:path>
               </a:pathLst>
@@ -2744,21 +2736,21 @@
           </p:nvSpPr>
           <p:spPr>
             <a:xfrm>
-              <a:off x="817517" y="3898322"/>
-              <a:ext cx="7799693" cy="0"/>
+              <a:off x="887106" y="3100960"/>
+              <a:ext cx="7660515" cy="0"/>
             </a:xfrm>
             <a:custGeom>
               <a:avLst/>
               <a:pathLst>
-                <a:path w="7799693" h="0">
+                <a:path w="7660515" h="0">
                   <a:moveTo>
                     <a:pt x="0" y="0"/>
                   </a:moveTo>
                   <a:lnTo>
-                    <a:pt x="7799693" y="0"/>
-                  </a:lnTo>
-                  <a:lnTo>
-                    <a:pt x="7799693" y="0"/>
+                    <a:pt x="7660515" y="0"/>
+                  </a:lnTo>
+                  <a:lnTo>
+                    <a:pt x="7660515" y="0"/>
                   </a:lnTo>
                 </a:path>
               </a:pathLst>
@@ -2787,21 +2779,21 @@
           </p:nvSpPr>
           <p:spPr>
             <a:xfrm>
-              <a:off x="817517" y="3068859"/>
-              <a:ext cx="7799693" cy="0"/>
+              <a:off x="887106" y="2801626"/>
+              <a:ext cx="7660515" cy="0"/>
             </a:xfrm>
             <a:custGeom>
               <a:avLst/>
               <a:pathLst>
-                <a:path w="7799693" h="0">
+                <a:path w="7660515" h="0">
                   <a:moveTo>
                     <a:pt x="0" y="0"/>
                   </a:moveTo>
                   <a:lnTo>
-                    <a:pt x="7799693" y="0"/>
-                  </a:lnTo>
-                  <a:lnTo>
-                    <a:pt x="7799693" y="0"/>
+                    <a:pt x="7660515" y="0"/>
+                  </a:lnTo>
+                  <a:lnTo>
+                    <a:pt x="7660515" y="0"/>
                   </a:lnTo>
                 </a:path>
               </a:pathLst>
@@ -2830,21 +2822,21 @@
           </p:nvSpPr>
           <p:spPr>
             <a:xfrm>
-              <a:off x="817517" y="2239395"/>
-              <a:ext cx="7799693" cy="0"/>
+              <a:off x="887106" y="2502292"/>
+              <a:ext cx="7660515" cy="0"/>
             </a:xfrm>
             <a:custGeom>
               <a:avLst/>
               <a:pathLst>
-                <a:path w="7799693" h="0">
+                <a:path w="7660515" h="0">
                   <a:moveTo>
                     <a:pt x="0" y="0"/>
                   </a:moveTo>
                   <a:lnTo>
-                    <a:pt x="7799693" y="0"/>
-                  </a:lnTo>
-                  <a:lnTo>
-                    <a:pt x="7799693" y="0"/>
+                    <a:pt x="7660515" y="0"/>
+                  </a:lnTo>
+                  <a:lnTo>
+                    <a:pt x="7660515" y="0"/>
                   </a:lnTo>
                 </a:path>
               </a:pathLst>
@@ -2873,21 +2865,21 @@
           </p:nvSpPr>
           <p:spPr>
             <a:xfrm>
-              <a:off x="2057816" y="2073503"/>
-              <a:ext cx="0" cy="3649639"/>
+              <a:off x="887106" y="2202958"/>
+              <a:ext cx="7660515" cy="0"/>
             </a:xfrm>
             <a:custGeom>
               <a:avLst/>
               <a:pathLst>
-                <a:path w="0" h="3649639">
+                <a:path w="7660515" h="0">
                   <a:moveTo>
-                    <a:pt x="0" y="3649639"/>
+                    <a:pt x="0" y="0"/>
                   </a:moveTo>
                   <a:lnTo>
-                    <a:pt x="0" y="0"/>
-                  </a:lnTo>
-                  <a:lnTo>
-                    <a:pt x="0" y="0"/>
+                    <a:pt x="7660515" y="0"/>
+                  </a:lnTo>
+                  <a:lnTo>
+                    <a:pt x="7660515" y="0"/>
                   </a:lnTo>
                 </a:path>
               </a:pathLst>
@@ -2916,15 +2908,15 @@
           </p:nvSpPr>
           <p:spPr>
             <a:xfrm>
-              <a:off x="3809601" y="2073503"/>
-              <a:ext cx="0" cy="3649639"/>
+              <a:off x="2105273" y="2143092"/>
+              <a:ext cx="0" cy="1317069"/>
             </a:xfrm>
             <a:custGeom>
               <a:avLst/>
               <a:pathLst>
-                <a:path w="0" h="3649639">
+                <a:path w="0" h="1317069">
                   <a:moveTo>
-                    <a:pt x="0" y="3649639"/>
+                    <a:pt x="0" y="1317069"/>
                   </a:moveTo>
                   <a:lnTo>
                     <a:pt x="0" y="0"/>
@@ -2959,15 +2951,15 @@
           </p:nvSpPr>
           <p:spPr>
             <a:xfrm>
-              <a:off x="5561386" y="2073503"/>
-              <a:ext cx="0" cy="3649639"/>
+              <a:off x="3825799" y="2143092"/>
+              <a:ext cx="0" cy="1317069"/>
             </a:xfrm>
             <a:custGeom>
               <a:avLst/>
               <a:pathLst>
-                <a:path w="0" h="3649639">
+                <a:path w="0" h="1317069">
                   <a:moveTo>
-                    <a:pt x="0" y="3649639"/>
+                    <a:pt x="0" y="1317069"/>
                   </a:moveTo>
                   <a:lnTo>
                     <a:pt x="0" y="0"/>
@@ -3002,15 +2994,15 @@
           </p:nvSpPr>
           <p:spPr>
             <a:xfrm>
-              <a:off x="7313171" y="2073503"/>
-              <a:ext cx="0" cy="3649639"/>
+              <a:off x="5546325" y="2143092"/>
+              <a:ext cx="0" cy="1317069"/>
             </a:xfrm>
             <a:custGeom>
               <a:avLst/>
               <a:pathLst>
-                <a:path w="0" h="3649639">
+                <a:path w="0" h="1317069">
                   <a:moveTo>
-                    <a:pt x="0" y="3649639"/>
+                    <a:pt x="0" y="1317069"/>
                   </a:moveTo>
                   <a:lnTo>
                     <a:pt x="0" y="0"/>
@@ -3039,618 +3031,661 @@
         </p:sp>
         <p:sp>
           <p:nvSpPr>
-            <p:cNvPr id="22" name="pg22"/>
+            <p:cNvPr id="22" name="pl22"/>
             <p:cNvSpPr/>
             <p:nvPr/>
           </p:nvSpPr>
           <p:spPr>
             <a:xfrm>
-              <a:off x="1172049" y="2816889"/>
-              <a:ext cx="7090630" cy="2572549"/>
+              <a:off x="7266851" y="2143092"/>
+              <a:ext cx="0" cy="1317069"/>
             </a:xfrm>
             <a:custGeom>
               <a:avLst/>
               <a:pathLst>
-                <a:path w="7090630" h="2572549">
+                <a:path w="0" h="1317069">
+                  <a:moveTo>
+                    <a:pt x="0" y="1317069"/>
+                  </a:moveTo>
+                  <a:lnTo>
+                    <a:pt x="0" y="0"/>
+                  </a:lnTo>
+                  <a:lnTo>
+                    <a:pt x="0" y="0"/>
+                  </a:lnTo>
+                </a:path>
+              </a:pathLst>
+            </a:custGeom>
+            <a:ln w="13550" cap="flat">
+              <a:solidFill>
+                <a:srgbClr val="EBEBEB">
+                  <a:alpha val="100000"/>
+                </a:srgbClr>
+              </a:solidFill>
+              <a:prstDash val="solid"/>
+              <a:round/>
+            </a:ln>
+          </p:spPr>
+          <p:txBody>
+            <a:bodyPr/>
+            <a:lstStyle/>
+            <a:p/>
+          </p:txBody>
+        </p:sp>
+        <p:sp>
+          <p:nvSpPr>
+            <p:cNvPr id="23" name="pg23"/>
+            <p:cNvSpPr/>
+            <p:nvPr/>
+          </p:nvSpPr>
+          <p:spPr>
+            <a:xfrm>
+              <a:off x="1235312" y="2411362"/>
+              <a:ext cx="6964104" cy="928372"/>
+            </a:xfrm>
+            <a:custGeom>
+              <a:avLst/>
+              <a:pathLst>
+                <a:path w="6964104" h="928372">
                   <a:moveTo>
                     <a:pt x="0" y="0"/>
                   </a:moveTo>
                   <a:lnTo>
-                    <a:pt x="71622" y="76231"/>
-                  </a:lnTo>
-                  <a:lnTo>
-                    <a:pt x="143245" y="150341"/>
-                  </a:lnTo>
-                  <a:lnTo>
-                    <a:pt x="214867" y="222390"/>
-                  </a:lnTo>
-                  <a:lnTo>
-                    <a:pt x="286490" y="292435"/>
-                  </a:lnTo>
-                  <a:lnTo>
-                    <a:pt x="358112" y="360531"/>
-                  </a:lnTo>
-                  <a:lnTo>
-                    <a:pt x="429735" y="426733"/>
-                  </a:lnTo>
-                  <a:lnTo>
-                    <a:pt x="501357" y="491093"/>
-                  </a:lnTo>
-                  <a:lnTo>
-                    <a:pt x="572980" y="553663"/>
-                  </a:lnTo>
-                  <a:lnTo>
-                    <a:pt x="644602" y="614493"/>
-                  </a:lnTo>
-                  <a:lnTo>
-                    <a:pt x="716225" y="673630"/>
-                  </a:lnTo>
-                  <a:lnTo>
-                    <a:pt x="787847" y="731122"/>
-                  </a:lnTo>
-                  <a:lnTo>
-                    <a:pt x="859470" y="787015"/>
-                  </a:lnTo>
-                  <a:lnTo>
-                    <a:pt x="931092" y="841353"/>
-                  </a:lnTo>
-                  <a:lnTo>
-                    <a:pt x="1002715" y="894179"/>
-                  </a:lnTo>
-                  <a:lnTo>
-                    <a:pt x="1074337" y="945536"/>
-                  </a:lnTo>
-                  <a:lnTo>
-                    <a:pt x="1145960" y="995464"/>
-                  </a:lnTo>
-                  <a:lnTo>
-                    <a:pt x="1217582" y="1044004"/>
-                  </a:lnTo>
-                  <a:lnTo>
-                    <a:pt x="1289205" y="1091193"/>
-                  </a:lnTo>
-                  <a:lnTo>
-                    <a:pt x="1360827" y="1137069"/>
-                  </a:lnTo>
-                  <a:lnTo>
-                    <a:pt x="1432450" y="1181669"/>
-                  </a:lnTo>
-                  <a:lnTo>
-                    <a:pt x="1504073" y="1225029"/>
-                  </a:lnTo>
-                  <a:lnTo>
-                    <a:pt x="1575695" y="1267182"/>
-                  </a:lnTo>
-                  <a:lnTo>
-                    <a:pt x="1647318" y="1308163"/>
-                  </a:lnTo>
-                  <a:lnTo>
-                    <a:pt x="1718940" y="1348004"/>
-                  </a:lnTo>
-                  <a:lnTo>
-                    <a:pt x="1790563" y="1386736"/>
-                  </a:lnTo>
-                  <a:lnTo>
-                    <a:pt x="1862185" y="1424391"/>
-                  </a:lnTo>
-                  <a:lnTo>
-                    <a:pt x="1933808" y="1460999"/>
-                  </a:lnTo>
-                  <a:lnTo>
-                    <a:pt x="2005430" y="1496588"/>
-                  </a:lnTo>
-                  <a:lnTo>
-                    <a:pt x="2077053" y="1531187"/>
-                  </a:lnTo>
-                  <a:lnTo>
-                    <a:pt x="2148675" y="1564824"/>
-                  </a:lnTo>
-                  <a:lnTo>
-                    <a:pt x="2220298" y="1597525"/>
-                  </a:lnTo>
-                  <a:lnTo>
-                    <a:pt x="2291920" y="1629316"/>
-                  </a:lnTo>
-                  <a:lnTo>
-                    <a:pt x="2363543" y="1660223"/>
-                  </a:lnTo>
-                  <a:lnTo>
-                    <a:pt x="2435165" y="1690270"/>
-                  </a:lnTo>
-                  <a:lnTo>
-                    <a:pt x="2506788" y="1719482"/>
-                  </a:lnTo>
-                  <a:lnTo>
-                    <a:pt x="2578410" y="1747880"/>
-                  </a:lnTo>
-                  <a:lnTo>
-                    <a:pt x="2650033" y="1775489"/>
-                  </a:lnTo>
-                  <a:lnTo>
-                    <a:pt x="2721655" y="1802330"/>
-                  </a:lnTo>
-                  <a:lnTo>
-                    <a:pt x="2793278" y="1828424"/>
-                  </a:lnTo>
-                  <a:lnTo>
-                    <a:pt x="2864901" y="1853792"/>
-                  </a:lnTo>
-                  <a:lnTo>
-                    <a:pt x="2936523" y="1878454"/>
-                  </a:lnTo>
-                  <a:lnTo>
-                    <a:pt x="3008146" y="1902431"/>
-                  </a:lnTo>
-                  <a:lnTo>
-                    <a:pt x="3079768" y="1914490"/>
-                  </a:lnTo>
-                  <a:lnTo>
-                    <a:pt x="3151391" y="1920074"/>
-                  </a:lnTo>
-                  <a:lnTo>
-                    <a:pt x="3223013" y="1925620"/>
-                  </a:lnTo>
-                  <a:lnTo>
-                    <a:pt x="3294636" y="1931128"/>
-                  </a:lnTo>
-                  <a:lnTo>
-                    <a:pt x="3366258" y="1936599"/>
-                  </a:lnTo>
-                  <a:lnTo>
-                    <a:pt x="3437881" y="1942033"/>
-                  </a:lnTo>
-                  <a:lnTo>
-                    <a:pt x="3509503" y="1947431"/>
-                  </a:lnTo>
-                  <a:lnTo>
-                    <a:pt x="3581126" y="1952792"/>
-                  </a:lnTo>
-                  <a:lnTo>
-                    <a:pt x="3652748" y="1958116"/>
-                  </a:lnTo>
-                  <a:lnTo>
-                    <a:pt x="3724371" y="1963405"/>
-                  </a:lnTo>
-                  <a:lnTo>
-                    <a:pt x="3795993" y="1968658"/>
-                  </a:lnTo>
-                  <a:lnTo>
-                    <a:pt x="3867616" y="1973875"/>
-                  </a:lnTo>
-                  <a:lnTo>
-                    <a:pt x="3939238" y="1979057"/>
-                  </a:lnTo>
-                  <a:lnTo>
-                    <a:pt x="4010861" y="1984204"/>
-                  </a:lnTo>
-                  <a:lnTo>
-                    <a:pt x="4082483" y="1989316"/>
-                  </a:lnTo>
-                  <a:lnTo>
-                    <a:pt x="4154106" y="1994394"/>
-                  </a:lnTo>
-                  <a:lnTo>
-                    <a:pt x="4225729" y="1999437"/>
-                  </a:lnTo>
-                  <a:lnTo>
-                    <a:pt x="4297351" y="2004447"/>
-                  </a:lnTo>
-                  <a:lnTo>
-                    <a:pt x="4368974" y="2009422"/>
-                  </a:lnTo>
-                  <a:lnTo>
-                    <a:pt x="4440596" y="2014364"/>
-                  </a:lnTo>
-                  <a:lnTo>
-                    <a:pt x="4512219" y="2019272"/>
-                  </a:lnTo>
-                  <a:lnTo>
-                    <a:pt x="4583841" y="2024147"/>
-                  </a:lnTo>
-                  <a:lnTo>
-                    <a:pt x="4655464" y="2028990"/>
-                  </a:lnTo>
-                  <a:lnTo>
-                    <a:pt x="4727086" y="2033799"/>
-                  </a:lnTo>
-                  <a:lnTo>
-                    <a:pt x="4798709" y="2038576"/>
-                  </a:lnTo>
-                  <a:lnTo>
-                    <a:pt x="4870331" y="2043321"/>
-                  </a:lnTo>
-                  <a:lnTo>
-                    <a:pt x="4941954" y="2048033"/>
-                  </a:lnTo>
-                  <a:lnTo>
-                    <a:pt x="5013576" y="2052714"/>
-                  </a:lnTo>
-                  <a:lnTo>
-                    <a:pt x="5085199" y="2057363"/>
-                  </a:lnTo>
-                  <a:lnTo>
-                    <a:pt x="5156821" y="2061981"/>
-                  </a:lnTo>
-                  <a:lnTo>
-                    <a:pt x="5228444" y="2066567"/>
-                  </a:lnTo>
-                  <a:lnTo>
-                    <a:pt x="5300066" y="2071122"/>
-                  </a:lnTo>
-                  <a:lnTo>
-                    <a:pt x="5371689" y="2075647"/>
-                  </a:lnTo>
-                  <a:lnTo>
-                    <a:pt x="5443311" y="2080141"/>
-                  </a:lnTo>
-                  <a:lnTo>
-                    <a:pt x="5514934" y="2084605"/>
-                  </a:lnTo>
-                  <a:lnTo>
-                    <a:pt x="5586557" y="2089038"/>
-                  </a:lnTo>
-                  <a:lnTo>
-                    <a:pt x="5658179" y="2093442"/>
-                  </a:lnTo>
-                  <a:lnTo>
-                    <a:pt x="5729802" y="2097815"/>
-                  </a:lnTo>
-                  <a:lnTo>
-                    <a:pt x="5801424" y="2102159"/>
-                  </a:lnTo>
-                  <a:lnTo>
-                    <a:pt x="5873047" y="2106474"/>
-                  </a:lnTo>
-                  <a:lnTo>
-                    <a:pt x="5944669" y="2110760"/>
-                  </a:lnTo>
-                  <a:lnTo>
-                    <a:pt x="6016292" y="2115016"/>
-                  </a:lnTo>
-                  <a:lnTo>
-                    <a:pt x="6087914" y="2119244"/>
-                  </a:lnTo>
-                  <a:lnTo>
-                    <a:pt x="6159537" y="2123443"/>
-                  </a:lnTo>
-                  <a:lnTo>
-                    <a:pt x="6231159" y="2127614"/>
-                  </a:lnTo>
-                  <a:lnTo>
-                    <a:pt x="6302782" y="2131757"/>
-                  </a:lnTo>
-                  <a:lnTo>
-                    <a:pt x="6374404" y="2135872"/>
-                  </a:lnTo>
-                  <a:lnTo>
-                    <a:pt x="6446027" y="2139959"/>
-                  </a:lnTo>
-                  <a:lnTo>
-                    <a:pt x="6517649" y="2144018"/>
-                  </a:lnTo>
-                  <a:lnTo>
-                    <a:pt x="6589272" y="2148050"/>
-                  </a:lnTo>
-                  <a:lnTo>
-                    <a:pt x="6660894" y="2152054"/>
-                  </a:lnTo>
-                  <a:lnTo>
-                    <a:pt x="6732517" y="2156031"/>
-                  </a:lnTo>
-                  <a:lnTo>
-                    <a:pt x="6804139" y="2159982"/>
-                  </a:lnTo>
-                  <a:lnTo>
-                    <a:pt x="6875762" y="2163906"/>
-                  </a:lnTo>
-                  <a:lnTo>
-                    <a:pt x="6947385" y="2167803"/>
-                  </a:lnTo>
-                  <a:lnTo>
-                    <a:pt x="7019007" y="2171674"/>
-                  </a:lnTo>
-                  <a:lnTo>
-                    <a:pt x="7090630" y="2175519"/>
-                  </a:lnTo>
-                  <a:lnTo>
-                    <a:pt x="7090630" y="2572549"/>
-                  </a:lnTo>
-                  <a:lnTo>
-                    <a:pt x="7019007" y="2567747"/>
-                  </a:lnTo>
-                  <a:lnTo>
-                    <a:pt x="6947385" y="2562808"/>
-                  </a:lnTo>
-                  <a:lnTo>
-                    <a:pt x="6875762" y="2557728"/>
-                  </a:lnTo>
-                  <a:lnTo>
-                    <a:pt x="6804139" y="2552502"/>
-                  </a:lnTo>
-                  <a:lnTo>
-                    <a:pt x="6732517" y="2547126"/>
-                  </a:lnTo>
-                  <a:lnTo>
-                    <a:pt x="6660894" y="2541597"/>
-                  </a:lnTo>
-                  <a:lnTo>
-                    <a:pt x="6589272" y="2535910"/>
-                  </a:lnTo>
-                  <a:lnTo>
-                    <a:pt x="6517649" y="2530060"/>
-                  </a:lnTo>
-                  <a:lnTo>
-                    <a:pt x="6446027" y="2524042"/>
-                  </a:lnTo>
-                  <a:lnTo>
-                    <a:pt x="6374404" y="2517853"/>
-                  </a:lnTo>
-                  <a:lnTo>
-                    <a:pt x="6302782" y="2511486"/>
-                  </a:lnTo>
-                  <a:lnTo>
-                    <a:pt x="6231159" y="2504937"/>
-                  </a:lnTo>
-                  <a:lnTo>
-                    <a:pt x="6159537" y="2498200"/>
-                  </a:lnTo>
-                  <a:lnTo>
-                    <a:pt x="6087914" y="2491271"/>
-                  </a:lnTo>
-                  <a:lnTo>
-                    <a:pt x="6016292" y="2484144"/>
-                  </a:lnTo>
-                  <a:lnTo>
-                    <a:pt x="5944669" y="2476812"/>
-                  </a:lnTo>
-                  <a:lnTo>
-                    <a:pt x="5873047" y="2469271"/>
-                  </a:lnTo>
-                  <a:lnTo>
-                    <a:pt x="5801424" y="2461514"/>
-                  </a:lnTo>
-                  <a:lnTo>
-                    <a:pt x="5729802" y="2453535"/>
-                  </a:lnTo>
-                  <a:lnTo>
-                    <a:pt x="5658179" y="2445328"/>
-                  </a:lnTo>
-                  <a:lnTo>
-                    <a:pt x="5586557" y="2436886"/>
-                  </a:lnTo>
-                  <a:lnTo>
-                    <a:pt x="5514934" y="2428203"/>
-                  </a:lnTo>
-                  <a:lnTo>
-                    <a:pt x="5443311" y="2419271"/>
-                  </a:lnTo>
-                  <a:lnTo>
-                    <a:pt x="5371689" y="2410083"/>
-                  </a:lnTo>
-                  <a:lnTo>
-                    <a:pt x="5300066" y="2400633"/>
-                  </a:lnTo>
-                  <a:lnTo>
-                    <a:pt x="5228444" y="2390912"/>
-                  </a:lnTo>
-                  <a:lnTo>
-                    <a:pt x="5156821" y="2380913"/>
-                  </a:lnTo>
-                  <a:lnTo>
-                    <a:pt x="5085199" y="2370627"/>
-                  </a:lnTo>
-                  <a:lnTo>
-                    <a:pt x="5013576" y="2360048"/>
-                  </a:lnTo>
-                  <a:lnTo>
-                    <a:pt x="4941954" y="2349166"/>
-                  </a:lnTo>
-                  <a:lnTo>
-                    <a:pt x="4870331" y="2337972"/>
-                  </a:lnTo>
-                  <a:lnTo>
-                    <a:pt x="4798709" y="2326458"/>
-                  </a:lnTo>
-                  <a:lnTo>
-                    <a:pt x="4727086" y="2314615"/>
-                  </a:lnTo>
-                  <a:lnTo>
-                    <a:pt x="4655464" y="2302432"/>
-                  </a:lnTo>
-                  <a:lnTo>
-                    <a:pt x="4583841" y="2289902"/>
-                  </a:lnTo>
-                  <a:lnTo>
-                    <a:pt x="4512219" y="2277012"/>
-                  </a:lnTo>
-                  <a:lnTo>
-                    <a:pt x="4440596" y="2263754"/>
-                  </a:lnTo>
-                  <a:lnTo>
-                    <a:pt x="4368974" y="2250117"/>
-                  </a:lnTo>
-                  <a:lnTo>
-                    <a:pt x="4297351" y="2236089"/>
-                  </a:lnTo>
-                  <a:lnTo>
-                    <a:pt x="4225729" y="2221660"/>
-                  </a:lnTo>
-                  <a:lnTo>
-                    <a:pt x="4154106" y="2206818"/>
-                  </a:lnTo>
-                  <a:lnTo>
-                    <a:pt x="4082483" y="2191551"/>
-                  </a:lnTo>
-                  <a:lnTo>
-                    <a:pt x="4010861" y="2175847"/>
-                  </a:lnTo>
-                  <a:lnTo>
-                    <a:pt x="3939238" y="2159694"/>
-                  </a:lnTo>
-                  <a:lnTo>
-                    <a:pt x="3867616" y="2143079"/>
-                  </a:lnTo>
-                  <a:lnTo>
-                    <a:pt x="3795993" y="2125989"/>
-                  </a:lnTo>
-                  <a:lnTo>
-                    <a:pt x="3724371" y="2108409"/>
-                  </a:lnTo>
-                  <a:lnTo>
-                    <a:pt x="3652748" y="2090326"/>
-                  </a:lnTo>
-                  <a:lnTo>
-                    <a:pt x="3581126" y="2071726"/>
-                  </a:lnTo>
-                  <a:lnTo>
-                    <a:pt x="3509503" y="2052594"/>
-                  </a:lnTo>
-                  <a:lnTo>
-                    <a:pt x="3437881" y="2032915"/>
-                  </a:lnTo>
-                  <a:lnTo>
-                    <a:pt x="3366258" y="2012672"/>
-                  </a:lnTo>
-                  <a:lnTo>
-                    <a:pt x="3294636" y="1991850"/>
-                  </a:lnTo>
-                  <a:lnTo>
-                    <a:pt x="3223013" y="1970432"/>
-                  </a:lnTo>
-                  <a:lnTo>
-                    <a:pt x="3151391" y="1948401"/>
-                  </a:lnTo>
-                  <a:lnTo>
-                    <a:pt x="3079768" y="1925740"/>
-                  </a:lnTo>
-                  <a:lnTo>
-                    <a:pt x="3008146" y="1908869"/>
-                  </a:lnTo>
-                  <a:lnTo>
-                    <a:pt x="2936523" y="1903209"/>
-                  </a:lnTo>
-                  <a:lnTo>
-                    <a:pt x="2864901" y="1897511"/>
-                  </a:lnTo>
-                  <a:lnTo>
-                    <a:pt x="2793278" y="1891774"/>
-                  </a:lnTo>
-                  <a:lnTo>
-                    <a:pt x="2721655" y="1885997"/>
-                  </a:lnTo>
-                  <a:lnTo>
-                    <a:pt x="2650033" y="1880182"/>
-                  </a:lnTo>
-                  <a:lnTo>
-                    <a:pt x="2578410" y="1874327"/>
-                  </a:lnTo>
-                  <a:lnTo>
-                    <a:pt x="2506788" y="1868432"/>
-                  </a:lnTo>
-                  <a:lnTo>
-                    <a:pt x="2435165" y="1862497"/>
-                  </a:lnTo>
-                  <a:lnTo>
-                    <a:pt x="2363543" y="1856521"/>
-                  </a:lnTo>
-                  <a:lnTo>
-                    <a:pt x="2291920" y="1850505"/>
-                  </a:lnTo>
-                  <a:lnTo>
-                    <a:pt x="2220298" y="1844448"/>
-                  </a:lnTo>
-                  <a:lnTo>
-                    <a:pt x="2148675" y="1838350"/>
-                  </a:lnTo>
-                  <a:lnTo>
-                    <a:pt x="2077053" y="1832210"/>
-                  </a:lnTo>
-                  <a:lnTo>
-                    <a:pt x="2005430" y="1826028"/>
-                  </a:lnTo>
-                  <a:lnTo>
-                    <a:pt x="1933808" y="1819804"/>
-                  </a:lnTo>
-                  <a:lnTo>
-                    <a:pt x="1862185" y="1813538"/>
-                  </a:lnTo>
-                  <a:lnTo>
-                    <a:pt x="1790563" y="1807230"/>
-                  </a:lnTo>
-                  <a:lnTo>
-                    <a:pt x="1718940" y="1800878"/>
-                  </a:lnTo>
-                  <a:lnTo>
-                    <a:pt x="1647318" y="1794483"/>
-                  </a:lnTo>
-                  <a:lnTo>
-                    <a:pt x="1575695" y="1788044"/>
-                  </a:lnTo>
-                  <a:lnTo>
-                    <a:pt x="1504073" y="1781562"/>
-                  </a:lnTo>
-                  <a:lnTo>
-                    <a:pt x="1432450" y="1775036"/>
-                  </a:lnTo>
-                  <a:lnTo>
-                    <a:pt x="1360827" y="1768465"/>
-                  </a:lnTo>
-                  <a:lnTo>
-                    <a:pt x="1289205" y="1761849"/>
-                  </a:lnTo>
-                  <a:lnTo>
-                    <a:pt x="1217582" y="1755189"/>
-                  </a:lnTo>
-                  <a:lnTo>
-                    <a:pt x="1145960" y="1748483"/>
-                  </a:lnTo>
-                  <a:lnTo>
-                    <a:pt x="1074337" y="1741731"/>
-                  </a:lnTo>
-                  <a:lnTo>
-                    <a:pt x="1002715" y="1734934"/>
-                  </a:lnTo>
-                  <a:lnTo>
-                    <a:pt x="931092" y="1728090"/>
-                  </a:lnTo>
-                  <a:lnTo>
-                    <a:pt x="859470" y="1721200"/>
-                  </a:lnTo>
-                  <a:lnTo>
-                    <a:pt x="787847" y="1714262"/>
-                  </a:lnTo>
-                  <a:lnTo>
-                    <a:pt x="716225" y="1707278"/>
-                  </a:lnTo>
-                  <a:lnTo>
-                    <a:pt x="644602" y="1700246"/>
-                  </a:lnTo>
-                  <a:lnTo>
-                    <a:pt x="572980" y="1693166"/>
-                  </a:lnTo>
-                  <a:lnTo>
-                    <a:pt x="501357" y="1686038"/>
-                  </a:lnTo>
-                  <a:lnTo>
-                    <a:pt x="429735" y="1678861"/>
-                  </a:lnTo>
-                  <a:lnTo>
-                    <a:pt x="358112" y="1671636"/>
-                  </a:lnTo>
-                  <a:lnTo>
-                    <a:pt x="286490" y="1664361"/>
-                  </a:lnTo>
-                  <a:lnTo>
-                    <a:pt x="214867" y="1657037"/>
-                  </a:lnTo>
-                  <a:lnTo>
-                    <a:pt x="143245" y="1649663"/>
-                  </a:lnTo>
-                  <a:lnTo>
-                    <a:pt x="71622" y="1642239"/>
-                  </a:lnTo>
-                  <a:lnTo>
-                    <a:pt x="0" y="1634764"/>
+                    <a:pt x="70344" y="27510"/>
+                  </a:lnTo>
+                  <a:lnTo>
+                    <a:pt x="140688" y="54254"/>
+                  </a:lnTo>
+                  <a:lnTo>
+                    <a:pt x="211033" y="80255"/>
+                  </a:lnTo>
+                  <a:lnTo>
+                    <a:pt x="281377" y="105533"/>
+                  </a:lnTo>
+                  <a:lnTo>
+                    <a:pt x="351722" y="130107"/>
+                  </a:lnTo>
+                  <a:lnTo>
+                    <a:pt x="422066" y="153998"/>
+                  </a:lnTo>
+                  <a:lnTo>
+                    <a:pt x="492411" y="177224"/>
+                  </a:lnTo>
+                  <a:lnTo>
+                    <a:pt x="562755" y="199804"/>
+                  </a:lnTo>
+                  <a:lnTo>
+                    <a:pt x="633100" y="221756"/>
+                  </a:lnTo>
+                  <a:lnTo>
+                    <a:pt x="703444" y="243097"/>
+                  </a:lnTo>
+                  <a:lnTo>
+                    <a:pt x="773789" y="263844"/>
+                  </a:lnTo>
+                  <a:lnTo>
+                    <a:pt x="844133" y="284015"/>
+                  </a:lnTo>
+                  <a:lnTo>
+                    <a:pt x="914478" y="303624"/>
+                  </a:lnTo>
+                  <a:lnTo>
+                    <a:pt x="984822" y="322688"/>
+                  </a:lnTo>
+                  <a:lnTo>
+                    <a:pt x="1055167" y="341221"/>
+                  </a:lnTo>
+                  <a:lnTo>
+                    <a:pt x="1125511" y="359239"/>
+                  </a:lnTo>
+                  <a:lnTo>
+                    <a:pt x="1195856" y="376756"/>
+                  </a:lnTo>
+                  <a:lnTo>
+                    <a:pt x="1266200" y="393786"/>
+                  </a:lnTo>
+                  <a:lnTo>
+                    <a:pt x="1336545" y="410341"/>
+                  </a:lnTo>
+                  <a:lnTo>
+                    <a:pt x="1406889" y="426436"/>
+                  </a:lnTo>
+                  <a:lnTo>
+                    <a:pt x="1477234" y="442084"/>
+                  </a:lnTo>
+                  <a:lnTo>
+                    <a:pt x="1547578" y="457296"/>
+                  </a:lnTo>
+                  <a:lnTo>
+                    <a:pt x="1617923" y="472085"/>
+                  </a:lnTo>
+                  <a:lnTo>
+                    <a:pt x="1688267" y="486463"/>
+                  </a:lnTo>
+                  <a:lnTo>
+                    <a:pt x="1758612" y="500440"/>
+                  </a:lnTo>
+                  <a:lnTo>
+                    <a:pt x="1828956" y="514029"/>
+                  </a:lnTo>
+                  <a:lnTo>
+                    <a:pt x="1899301" y="527240"/>
+                  </a:lnTo>
+                  <a:lnTo>
+                    <a:pt x="1969645" y="540083"/>
+                  </a:lnTo>
+                  <a:lnTo>
+                    <a:pt x="2039990" y="552569"/>
+                  </a:lnTo>
+                  <a:lnTo>
+                    <a:pt x="2110334" y="564708"/>
+                  </a:lnTo>
+                  <a:lnTo>
+                    <a:pt x="2180679" y="576509"/>
+                  </a:lnTo>
+                  <a:lnTo>
+                    <a:pt x="2251023" y="587982"/>
+                  </a:lnTo>
+                  <a:lnTo>
+                    <a:pt x="2321368" y="599135"/>
+                  </a:lnTo>
+                  <a:lnTo>
+                    <a:pt x="2391712" y="609978"/>
+                  </a:lnTo>
+                  <a:lnTo>
+                    <a:pt x="2462057" y="620520"/>
+                  </a:lnTo>
+                  <a:lnTo>
+                    <a:pt x="2532401" y="630769"/>
+                  </a:lnTo>
+                  <a:lnTo>
+                    <a:pt x="2602746" y="640732"/>
+                  </a:lnTo>
+                  <a:lnTo>
+                    <a:pt x="2673090" y="650418"/>
+                  </a:lnTo>
+                  <a:lnTo>
+                    <a:pt x="2743435" y="659835"/>
+                  </a:lnTo>
+                  <a:lnTo>
+                    <a:pt x="2813779" y="668990"/>
+                  </a:lnTo>
+                  <a:lnTo>
+                    <a:pt x="2884124" y="677890"/>
+                  </a:lnTo>
+                  <a:lnTo>
+                    <a:pt x="2954468" y="686542"/>
+                  </a:lnTo>
+                  <a:lnTo>
+                    <a:pt x="3024813" y="690894"/>
+                  </a:lnTo>
+                  <a:lnTo>
+                    <a:pt x="3095157" y="692909"/>
+                  </a:lnTo>
+                  <a:lnTo>
+                    <a:pt x="3165502" y="694911"/>
+                  </a:lnTo>
+                  <a:lnTo>
+                    <a:pt x="3235846" y="696898"/>
+                  </a:lnTo>
+                  <a:lnTo>
+                    <a:pt x="3306191" y="698873"/>
+                  </a:lnTo>
+                  <a:lnTo>
+                    <a:pt x="3376535" y="700834"/>
+                  </a:lnTo>
+                  <a:lnTo>
+                    <a:pt x="3446880" y="702782"/>
+                  </a:lnTo>
+                  <a:lnTo>
+                    <a:pt x="3517224" y="704716"/>
+                  </a:lnTo>
+                  <a:lnTo>
+                    <a:pt x="3587569" y="706638"/>
+                  </a:lnTo>
+                  <a:lnTo>
+                    <a:pt x="3657913" y="708546"/>
+                  </a:lnTo>
+                  <a:lnTo>
+                    <a:pt x="3728257" y="710442"/>
+                  </a:lnTo>
+                  <a:lnTo>
+                    <a:pt x="3798602" y="712325"/>
+                  </a:lnTo>
+                  <a:lnTo>
+                    <a:pt x="3868946" y="714195"/>
+                  </a:lnTo>
+                  <a:lnTo>
+                    <a:pt x="3939291" y="716052"/>
+                  </a:lnTo>
+                  <a:lnTo>
+                    <a:pt x="4009635" y="717897"/>
+                  </a:lnTo>
+                  <a:lnTo>
+                    <a:pt x="4079980" y="719730"/>
+                  </a:lnTo>
+                  <a:lnTo>
+                    <a:pt x="4150324" y="721550"/>
+                  </a:lnTo>
+                  <a:lnTo>
+                    <a:pt x="4220669" y="723357"/>
+                  </a:lnTo>
+                  <a:lnTo>
+                    <a:pt x="4291013" y="725153"/>
+                  </a:lnTo>
+                  <a:lnTo>
+                    <a:pt x="4361358" y="726936"/>
+                  </a:lnTo>
+                  <a:lnTo>
+                    <a:pt x="4431702" y="728708"/>
+                  </a:lnTo>
+                  <a:lnTo>
+                    <a:pt x="4502047" y="730467"/>
+                  </a:lnTo>
+                  <a:lnTo>
+                    <a:pt x="4572391" y="732214"/>
+                  </a:lnTo>
+                  <a:lnTo>
+                    <a:pt x="4642736" y="733950"/>
+                  </a:lnTo>
+                  <a:lnTo>
+                    <a:pt x="4713080" y="735674"/>
+                  </a:lnTo>
+                  <a:lnTo>
+                    <a:pt x="4783425" y="737386"/>
+                  </a:lnTo>
+                  <a:lnTo>
+                    <a:pt x="4853769" y="739087"/>
+                  </a:lnTo>
+                  <a:lnTo>
+                    <a:pt x="4924114" y="740776"/>
+                  </a:lnTo>
+                  <a:lnTo>
+                    <a:pt x="4994458" y="742454"/>
+                  </a:lnTo>
+                  <a:lnTo>
+                    <a:pt x="5064803" y="744120"/>
+                  </a:lnTo>
+                  <a:lnTo>
+                    <a:pt x="5135147" y="745775"/>
+                  </a:lnTo>
+                  <a:lnTo>
+                    <a:pt x="5205492" y="747419"/>
+                  </a:lnTo>
+                  <a:lnTo>
+                    <a:pt x="5275836" y="749052"/>
+                  </a:lnTo>
+                  <a:lnTo>
+                    <a:pt x="5346181" y="750674"/>
+                  </a:lnTo>
+                  <a:lnTo>
+                    <a:pt x="5416525" y="752284"/>
+                  </a:lnTo>
+                  <a:lnTo>
+                    <a:pt x="5486870" y="753884"/>
+                  </a:lnTo>
+                  <a:lnTo>
+                    <a:pt x="5557214" y="755473"/>
+                  </a:lnTo>
+                  <a:lnTo>
+                    <a:pt x="5627559" y="757052"/>
+                  </a:lnTo>
+                  <a:lnTo>
+                    <a:pt x="5697903" y="758620"/>
+                  </a:lnTo>
+                  <a:lnTo>
+                    <a:pt x="5768248" y="760177"/>
+                  </a:lnTo>
+                  <a:lnTo>
+                    <a:pt x="5838592" y="761723"/>
+                  </a:lnTo>
+                  <a:lnTo>
+                    <a:pt x="5908937" y="763259"/>
+                  </a:lnTo>
+                  <a:lnTo>
+                    <a:pt x="5979281" y="764785"/>
+                  </a:lnTo>
+                  <a:lnTo>
+                    <a:pt x="6049626" y="766300"/>
+                  </a:lnTo>
+                  <a:lnTo>
+                    <a:pt x="6119970" y="767806"/>
+                  </a:lnTo>
+                  <a:lnTo>
+                    <a:pt x="6190315" y="769301"/>
+                  </a:lnTo>
+                  <a:lnTo>
+                    <a:pt x="6260659" y="770786"/>
+                  </a:lnTo>
+                  <a:lnTo>
+                    <a:pt x="6331004" y="772260"/>
+                  </a:lnTo>
+                  <a:lnTo>
+                    <a:pt x="6401348" y="773725"/>
+                  </a:lnTo>
+                  <a:lnTo>
+                    <a:pt x="6471693" y="775180"/>
+                  </a:lnTo>
+                  <a:lnTo>
+                    <a:pt x="6542037" y="776625"/>
+                  </a:lnTo>
+                  <a:lnTo>
+                    <a:pt x="6612382" y="778061"/>
+                  </a:lnTo>
+                  <a:lnTo>
+                    <a:pt x="6682726" y="779486"/>
+                  </a:lnTo>
+                  <a:lnTo>
+                    <a:pt x="6753071" y="780902"/>
+                  </a:lnTo>
+                  <a:lnTo>
+                    <a:pt x="6823415" y="782309"/>
+                  </a:lnTo>
+                  <a:lnTo>
+                    <a:pt x="6893760" y="783706"/>
+                  </a:lnTo>
+                  <a:lnTo>
+                    <a:pt x="6964104" y="785093"/>
+                  </a:lnTo>
+                  <a:lnTo>
+                    <a:pt x="6964104" y="928372"/>
+                  </a:lnTo>
+                  <a:lnTo>
+                    <a:pt x="6893760" y="926639"/>
+                  </a:lnTo>
+                  <a:lnTo>
+                    <a:pt x="6823415" y="924857"/>
+                  </a:lnTo>
+                  <a:lnTo>
+                    <a:pt x="6753071" y="923023"/>
+                  </a:lnTo>
+                  <a:lnTo>
+                    <a:pt x="6682726" y="921138"/>
+                  </a:lnTo>
+                  <a:lnTo>
+                    <a:pt x="6612382" y="919198"/>
+                  </a:lnTo>
+                  <a:lnTo>
+                    <a:pt x="6542037" y="917202"/>
+                  </a:lnTo>
+                  <a:lnTo>
+                    <a:pt x="6471693" y="915150"/>
+                  </a:lnTo>
+                  <a:lnTo>
+                    <a:pt x="6401348" y="913039"/>
+                  </a:lnTo>
+                  <a:lnTo>
+                    <a:pt x="6331004" y="910867"/>
+                  </a:lnTo>
+                  <a:lnTo>
+                    <a:pt x="6260659" y="908633"/>
+                  </a:lnTo>
+                  <a:lnTo>
+                    <a:pt x="6190315" y="906336"/>
+                  </a:lnTo>
+                  <a:lnTo>
+                    <a:pt x="6119970" y="903972"/>
+                  </a:lnTo>
+                  <a:lnTo>
+                    <a:pt x="6049626" y="901541"/>
+                  </a:lnTo>
+                  <a:lnTo>
+                    <a:pt x="5979281" y="899041"/>
+                  </a:lnTo>
+                  <a:lnTo>
+                    <a:pt x="5908937" y="896469"/>
+                  </a:lnTo>
+                  <a:lnTo>
+                    <a:pt x="5838592" y="893823"/>
+                  </a:lnTo>
+                  <a:lnTo>
+                    <a:pt x="5768248" y="891102"/>
+                  </a:lnTo>
+                  <a:lnTo>
+                    <a:pt x="5697903" y="888302"/>
+                  </a:lnTo>
+                  <a:lnTo>
+                    <a:pt x="5627559" y="885423"/>
+                  </a:lnTo>
+                  <a:lnTo>
+                    <a:pt x="5557214" y="882461"/>
+                  </a:lnTo>
+                  <a:lnTo>
+                    <a:pt x="5486870" y="879415"/>
+                  </a:lnTo>
+                  <a:lnTo>
+                    <a:pt x="5416525" y="876281"/>
+                  </a:lnTo>
+                  <a:lnTo>
+                    <a:pt x="5346181" y="873058"/>
+                  </a:lnTo>
+                  <a:lnTo>
+                    <a:pt x="5275836" y="869742"/>
+                  </a:lnTo>
+                  <a:lnTo>
+                    <a:pt x="5205492" y="866331"/>
+                  </a:lnTo>
+                  <a:lnTo>
+                    <a:pt x="5135147" y="862823"/>
+                  </a:lnTo>
+                  <a:lnTo>
+                    <a:pt x="5064803" y="859215"/>
+                  </a:lnTo>
+                  <a:lnTo>
+                    <a:pt x="4994458" y="855503"/>
+                  </a:lnTo>
+                  <a:lnTo>
+                    <a:pt x="4924114" y="851685"/>
+                  </a:lnTo>
+                  <a:lnTo>
+                    <a:pt x="4853769" y="847758"/>
+                  </a:lnTo>
+                  <a:lnTo>
+                    <a:pt x="4783425" y="843719"/>
+                  </a:lnTo>
+                  <a:lnTo>
+                    <a:pt x="4713080" y="839564"/>
+                  </a:lnTo>
+                  <a:lnTo>
+                    <a:pt x="4642736" y="835290"/>
+                  </a:lnTo>
+                  <a:lnTo>
+                    <a:pt x="4572391" y="830893"/>
+                  </a:lnTo>
+                  <a:lnTo>
+                    <a:pt x="4502047" y="826371"/>
+                  </a:lnTo>
+                  <a:lnTo>
+                    <a:pt x="4431702" y="821720"/>
+                  </a:lnTo>
+                  <a:lnTo>
+                    <a:pt x="4361358" y="816935"/>
+                  </a:lnTo>
+                  <a:lnTo>
+                    <a:pt x="4291013" y="812014"/>
+                  </a:lnTo>
+                  <a:lnTo>
+                    <a:pt x="4220669" y="806952"/>
+                  </a:lnTo>
+                  <a:lnTo>
+                    <a:pt x="4150324" y="801744"/>
+                  </a:lnTo>
+                  <a:lnTo>
+                    <a:pt x="4079980" y="796388"/>
+                  </a:lnTo>
+                  <a:lnTo>
+                    <a:pt x="4009635" y="790879"/>
+                  </a:lnTo>
+                  <a:lnTo>
+                    <a:pt x="3939291" y="785212"/>
+                  </a:lnTo>
+                  <a:lnTo>
+                    <a:pt x="3868946" y="779383"/>
+                  </a:lnTo>
+                  <a:lnTo>
+                    <a:pt x="3798602" y="773387"/>
+                  </a:lnTo>
+                  <a:lnTo>
+                    <a:pt x="3728257" y="767219"/>
+                  </a:lnTo>
+                  <a:lnTo>
+                    <a:pt x="3657913" y="760875"/>
+                  </a:lnTo>
+                  <a:lnTo>
+                    <a:pt x="3587569" y="754349"/>
+                  </a:lnTo>
+                  <a:lnTo>
+                    <a:pt x="3517224" y="747637"/>
+                  </a:lnTo>
+                  <a:lnTo>
+                    <a:pt x="3446880" y="740733"/>
+                  </a:lnTo>
+                  <a:lnTo>
+                    <a:pt x="3376535" y="733631"/>
+                  </a:lnTo>
+                  <a:lnTo>
+                    <a:pt x="3306191" y="726326"/>
+                  </a:lnTo>
+                  <a:lnTo>
+                    <a:pt x="3235846" y="718811"/>
+                  </a:lnTo>
+                  <a:lnTo>
+                    <a:pt x="3165502" y="711082"/>
+                  </a:lnTo>
+                  <a:lnTo>
+                    <a:pt x="3095157" y="703132"/>
+                  </a:lnTo>
+                  <a:lnTo>
+                    <a:pt x="3024813" y="694954"/>
+                  </a:lnTo>
+                  <a:lnTo>
+                    <a:pt x="2954468" y="688866"/>
+                  </a:lnTo>
+                  <a:lnTo>
+                    <a:pt x="2884124" y="686823"/>
+                  </a:lnTo>
+                  <a:lnTo>
+                    <a:pt x="2813779" y="684767"/>
+                  </a:lnTo>
+                  <a:lnTo>
+                    <a:pt x="2743435" y="682696"/>
+                  </a:lnTo>
+                  <a:lnTo>
+                    <a:pt x="2673090" y="680612"/>
+                  </a:lnTo>
+                  <a:lnTo>
+                    <a:pt x="2602746" y="678513"/>
+                  </a:lnTo>
+                  <a:lnTo>
+                    <a:pt x="2532401" y="676400"/>
+                  </a:lnTo>
+                  <a:lnTo>
+                    <a:pt x="2462057" y="674273"/>
+                  </a:lnTo>
+                  <a:lnTo>
+                    <a:pt x="2391712" y="672131"/>
+                  </a:lnTo>
+                  <a:lnTo>
+                    <a:pt x="2321368" y="669974"/>
+                  </a:lnTo>
+                  <a:lnTo>
+                    <a:pt x="2251023" y="667803"/>
+                  </a:lnTo>
+                  <a:lnTo>
+                    <a:pt x="2180679" y="665618"/>
+                  </a:lnTo>
+                  <a:lnTo>
+                    <a:pt x="2110334" y="663417"/>
+                  </a:lnTo>
+                  <a:lnTo>
+                    <a:pt x="2039990" y="661201"/>
+                  </a:lnTo>
+                  <a:lnTo>
+                    <a:pt x="1969645" y="658970"/>
+                  </a:lnTo>
+                  <a:lnTo>
+                    <a:pt x="1899301" y="656724"/>
+                  </a:lnTo>
+                  <a:lnTo>
+                    <a:pt x="1828956" y="654463"/>
+                  </a:lnTo>
+                  <a:lnTo>
+                    <a:pt x="1758612" y="652186"/>
+                  </a:lnTo>
+                  <a:lnTo>
+                    <a:pt x="1688267" y="649894"/>
+                  </a:lnTo>
+                  <a:lnTo>
+                    <a:pt x="1617923" y="647586"/>
+                  </a:lnTo>
+                  <a:lnTo>
+                    <a:pt x="1547578" y="645263"/>
+                  </a:lnTo>
+                  <a:lnTo>
+                    <a:pt x="1477234" y="642924"/>
+                  </a:lnTo>
+                  <a:lnTo>
+                    <a:pt x="1406889" y="640568"/>
+                  </a:lnTo>
+                  <a:lnTo>
+                    <a:pt x="1336545" y="638197"/>
+                  </a:lnTo>
+                  <a:lnTo>
+                    <a:pt x="1266200" y="635810"/>
+                  </a:lnTo>
+                  <a:lnTo>
+                    <a:pt x="1195856" y="633406"/>
+                  </a:lnTo>
+                  <a:lnTo>
+                    <a:pt x="1125511" y="630986"/>
+                  </a:lnTo>
+                  <a:lnTo>
+                    <a:pt x="1055167" y="628550"/>
+                  </a:lnTo>
+                  <a:lnTo>
+                    <a:pt x="984822" y="626096"/>
+                  </a:lnTo>
+                  <a:lnTo>
+                    <a:pt x="914478" y="623627"/>
+                  </a:lnTo>
+                  <a:lnTo>
+                    <a:pt x="844133" y="621140"/>
+                  </a:lnTo>
+                  <a:lnTo>
+                    <a:pt x="773789" y="618637"/>
+                  </a:lnTo>
+                  <a:lnTo>
+                    <a:pt x="703444" y="616116"/>
+                  </a:lnTo>
+                  <a:lnTo>
+                    <a:pt x="633100" y="613578"/>
+                  </a:lnTo>
+                  <a:lnTo>
+                    <a:pt x="562755" y="611023"/>
+                  </a:lnTo>
+                  <a:lnTo>
+                    <a:pt x="492411" y="608451"/>
+                  </a:lnTo>
+                  <a:lnTo>
+                    <a:pt x="422066" y="605861"/>
+                  </a:lnTo>
+                  <a:lnTo>
+                    <a:pt x="351722" y="603254"/>
+                  </a:lnTo>
+                  <a:lnTo>
+                    <a:pt x="281377" y="600628"/>
+                  </a:lnTo>
+                  <a:lnTo>
+                    <a:pt x="211033" y="597985"/>
+                  </a:lnTo>
+                  <a:lnTo>
+                    <a:pt x="140688" y="595324"/>
+                  </a:lnTo>
+                  <a:lnTo>
+                    <a:pt x="70344" y="592645"/>
+                  </a:lnTo>
+                  <a:lnTo>
+                    <a:pt x="0" y="589948"/>
                   </a:lnTo>
                   <a:close/>
                 </a:path>
@@ -3670,643 +3705,318 @@
         </p:sp>
         <p:sp>
           <p:nvSpPr>
-            <p:cNvPr id="23" name="pl23"/>
-            <p:cNvSpPr/>
-            <p:nvPr/>
-          </p:nvSpPr>
-          <p:spPr>
-            <a:xfrm>
-              <a:off x="1172049" y="2816889"/>
-              <a:ext cx="7090630" cy="2175519"/>
-            </a:xfrm>
-            <a:custGeom>
-              <a:avLst/>
-              <a:pathLst>
-                <a:path w="7090630" h="2175519">
-                  <a:moveTo>
-                    <a:pt x="0" y="0"/>
-                  </a:moveTo>
-                  <a:lnTo>
-                    <a:pt x="71622" y="76231"/>
-                  </a:lnTo>
-                  <a:lnTo>
-                    <a:pt x="143245" y="150341"/>
-                  </a:lnTo>
-                  <a:lnTo>
-                    <a:pt x="214867" y="222390"/>
-                  </a:lnTo>
-                  <a:lnTo>
-                    <a:pt x="286490" y="292435"/>
-                  </a:lnTo>
-                  <a:lnTo>
-                    <a:pt x="358112" y="360531"/>
-                  </a:lnTo>
-                  <a:lnTo>
-                    <a:pt x="429735" y="426733"/>
-                  </a:lnTo>
-                  <a:lnTo>
-                    <a:pt x="501357" y="491093"/>
-                  </a:lnTo>
-                  <a:lnTo>
-                    <a:pt x="572980" y="553663"/>
-                  </a:lnTo>
-                  <a:lnTo>
-                    <a:pt x="644602" y="614493"/>
-                  </a:lnTo>
-                  <a:lnTo>
-                    <a:pt x="716225" y="673630"/>
-                  </a:lnTo>
-                  <a:lnTo>
-                    <a:pt x="787847" y="731122"/>
-                  </a:lnTo>
-                  <a:lnTo>
-                    <a:pt x="859470" y="787015"/>
-                  </a:lnTo>
-                  <a:lnTo>
-                    <a:pt x="931092" y="841353"/>
-                  </a:lnTo>
-                  <a:lnTo>
-                    <a:pt x="1002715" y="894179"/>
-                  </a:lnTo>
-                  <a:lnTo>
-                    <a:pt x="1074337" y="945536"/>
-                  </a:lnTo>
-                  <a:lnTo>
-                    <a:pt x="1145960" y="995464"/>
-                  </a:lnTo>
-                  <a:lnTo>
-                    <a:pt x="1217582" y="1044004"/>
-                  </a:lnTo>
-                  <a:lnTo>
-                    <a:pt x="1289205" y="1091193"/>
-                  </a:lnTo>
-                  <a:lnTo>
-                    <a:pt x="1360827" y="1137069"/>
-                  </a:lnTo>
-                  <a:lnTo>
-                    <a:pt x="1432450" y="1181669"/>
-                  </a:lnTo>
-                  <a:lnTo>
-                    <a:pt x="1504073" y="1225029"/>
-                  </a:lnTo>
-                  <a:lnTo>
-                    <a:pt x="1575695" y="1267182"/>
-                  </a:lnTo>
-                  <a:lnTo>
-                    <a:pt x="1647318" y="1308163"/>
-                  </a:lnTo>
-                  <a:lnTo>
-                    <a:pt x="1718940" y="1348004"/>
-                  </a:lnTo>
-                  <a:lnTo>
-                    <a:pt x="1790563" y="1386736"/>
-                  </a:lnTo>
-                  <a:lnTo>
-                    <a:pt x="1862185" y="1424391"/>
-                  </a:lnTo>
-                  <a:lnTo>
-                    <a:pt x="1933808" y="1460999"/>
-                  </a:lnTo>
-                  <a:lnTo>
-                    <a:pt x="2005430" y="1496588"/>
-                  </a:lnTo>
-                  <a:lnTo>
-                    <a:pt x="2077053" y="1531187"/>
-                  </a:lnTo>
-                  <a:lnTo>
-                    <a:pt x="2148675" y="1564824"/>
-                  </a:lnTo>
-                  <a:lnTo>
-                    <a:pt x="2220298" y="1597525"/>
-                  </a:lnTo>
-                  <a:lnTo>
-                    <a:pt x="2291920" y="1629316"/>
-                  </a:lnTo>
-                  <a:lnTo>
-                    <a:pt x="2363543" y="1660223"/>
-                  </a:lnTo>
-                  <a:lnTo>
-                    <a:pt x="2435165" y="1690270"/>
-                  </a:lnTo>
-                  <a:lnTo>
-                    <a:pt x="2506788" y="1719482"/>
-                  </a:lnTo>
-                  <a:lnTo>
-                    <a:pt x="2578410" y="1747880"/>
-                  </a:lnTo>
-                  <a:lnTo>
-                    <a:pt x="2650033" y="1775489"/>
-                  </a:lnTo>
-                  <a:lnTo>
-                    <a:pt x="2721655" y="1802330"/>
-                  </a:lnTo>
-                  <a:lnTo>
-                    <a:pt x="2793278" y="1828424"/>
-                  </a:lnTo>
-                  <a:lnTo>
-                    <a:pt x="2864901" y="1853792"/>
-                  </a:lnTo>
-                  <a:lnTo>
-                    <a:pt x="2936523" y="1878454"/>
-                  </a:lnTo>
-                  <a:lnTo>
-                    <a:pt x="3008146" y="1902431"/>
-                  </a:lnTo>
-                  <a:lnTo>
-                    <a:pt x="3079768" y="1914490"/>
-                  </a:lnTo>
-                  <a:lnTo>
-                    <a:pt x="3151391" y="1920074"/>
-                  </a:lnTo>
-                  <a:lnTo>
-                    <a:pt x="3223013" y="1925620"/>
-                  </a:lnTo>
-                  <a:lnTo>
-                    <a:pt x="3294636" y="1931128"/>
-                  </a:lnTo>
-                  <a:lnTo>
-                    <a:pt x="3366258" y="1936599"/>
-                  </a:lnTo>
-                  <a:lnTo>
-                    <a:pt x="3437881" y="1942033"/>
-                  </a:lnTo>
-                  <a:lnTo>
-                    <a:pt x="3509503" y="1947431"/>
-                  </a:lnTo>
-                  <a:lnTo>
-                    <a:pt x="3581126" y="1952792"/>
-                  </a:lnTo>
-                  <a:lnTo>
-                    <a:pt x="3652748" y="1958116"/>
-                  </a:lnTo>
-                  <a:lnTo>
-                    <a:pt x="3724371" y="1963405"/>
-                  </a:lnTo>
-                  <a:lnTo>
-                    <a:pt x="3795993" y="1968658"/>
-                  </a:lnTo>
-                  <a:lnTo>
-                    <a:pt x="3867616" y="1973875"/>
-                  </a:lnTo>
-                  <a:lnTo>
-                    <a:pt x="3939238" y="1979057"/>
-                  </a:lnTo>
-                  <a:lnTo>
-                    <a:pt x="4010861" y="1984204"/>
-                  </a:lnTo>
-                  <a:lnTo>
-                    <a:pt x="4082483" y="1989316"/>
-                  </a:lnTo>
-                  <a:lnTo>
-                    <a:pt x="4154106" y="1994394"/>
-                  </a:lnTo>
-                  <a:lnTo>
-                    <a:pt x="4225729" y="1999437"/>
-                  </a:lnTo>
-                  <a:lnTo>
-                    <a:pt x="4297351" y="2004447"/>
-                  </a:lnTo>
-                  <a:lnTo>
-                    <a:pt x="4368974" y="2009422"/>
-                  </a:lnTo>
-                  <a:lnTo>
-                    <a:pt x="4440596" y="2014364"/>
-                  </a:lnTo>
-                  <a:lnTo>
-                    <a:pt x="4512219" y="2019272"/>
-                  </a:lnTo>
-                  <a:lnTo>
-                    <a:pt x="4583841" y="2024147"/>
-                  </a:lnTo>
-                  <a:lnTo>
-                    <a:pt x="4655464" y="2028990"/>
-                  </a:lnTo>
-                  <a:lnTo>
-                    <a:pt x="4727086" y="2033799"/>
-                  </a:lnTo>
-                  <a:lnTo>
-                    <a:pt x="4798709" y="2038576"/>
-                  </a:lnTo>
-                  <a:lnTo>
-                    <a:pt x="4870331" y="2043321"/>
-                  </a:lnTo>
-                  <a:lnTo>
-                    <a:pt x="4941954" y="2048033"/>
-                  </a:lnTo>
-                  <a:lnTo>
-                    <a:pt x="5013576" y="2052714"/>
-                  </a:lnTo>
-                  <a:lnTo>
-                    <a:pt x="5085199" y="2057363"/>
-                  </a:lnTo>
-                  <a:lnTo>
-                    <a:pt x="5156821" y="2061981"/>
-                  </a:lnTo>
-                  <a:lnTo>
-                    <a:pt x="5228444" y="2066567"/>
-                  </a:lnTo>
-                  <a:lnTo>
-                    <a:pt x="5300066" y="2071122"/>
-                  </a:lnTo>
-                  <a:lnTo>
-                    <a:pt x="5371689" y="2075647"/>
-                  </a:lnTo>
-                  <a:lnTo>
-                    <a:pt x="5443311" y="2080141"/>
-                  </a:lnTo>
-                  <a:lnTo>
-                    <a:pt x="5514934" y="2084605"/>
-                  </a:lnTo>
-                  <a:lnTo>
-                    <a:pt x="5586557" y="2089038"/>
-                  </a:lnTo>
-                  <a:lnTo>
-                    <a:pt x="5658179" y="2093442"/>
-                  </a:lnTo>
-                  <a:lnTo>
-                    <a:pt x="5729802" y="2097815"/>
-                  </a:lnTo>
-                  <a:lnTo>
-                    <a:pt x="5801424" y="2102159"/>
-                  </a:lnTo>
-                  <a:lnTo>
-                    <a:pt x="5873047" y="2106474"/>
-                  </a:lnTo>
-                  <a:lnTo>
-                    <a:pt x="5944669" y="2110760"/>
-                  </a:lnTo>
-                  <a:lnTo>
-                    <a:pt x="6016292" y="2115016"/>
-                  </a:lnTo>
-                  <a:lnTo>
-                    <a:pt x="6087914" y="2119244"/>
-                  </a:lnTo>
-                  <a:lnTo>
-                    <a:pt x="6159537" y="2123443"/>
-                  </a:lnTo>
-                  <a:lnTo>
-                    <a:pt x="6231159" y="2127614"/>
-                  </a:lnTo>
-                  <a:lnTo>
-                    <a:pt x="6302782" y="2131757"/>
-                  </a:lnTo>
-                  <a:lnTo>
-                    <a:pt x="6374404" y="2135872"/>
-                  </a:lnTo>
-                  <a:lnTo>
-                    <a:pt x="6446027" y="2139959"/>
-                  </a:lnTo>
-                  <a:lnTo>
-                    <a:pt x="6517649" y="2144018"/>
-                  </a:lnTo>
-                  <a:lnTo>
-                    <a:pt x="6589272" y="2148050"/>
-                  </a:lnTo>
-                  <a:lnTo>
-                    <a:pt x="6660894" y="2152054"/>
-                  </a:lnTo>
-                  <a:lnTo>
-                    <a:pt x="6732517" y="2156031"/>
-                  </a:lnTo>
-                  <a:lnTo>
-                    <a:pt x="6804139" y="2159982"/>
-                  </a:lnTo>
-                  <a:lnTo>
-                    <a:pt x="6875762" y="2163906"/>
-                  </a:lnTo>
-                  <a:lnTo>
-                    <a:pt x="6947385" y="2167803"/>
-                  </a:lnTo>
-                  <a:lnTo>
-                    <a:pt x="7019007" y="2171674"/>
-                  </a:lnTo>
-                  <a:lnTo>
-                    <a:pt x="7090630" y="2175519"/>
-                  </a:lnTo>
-                </a:path>
-              </a:pathLst>
-            </a:custGeom>
-          </p:spPr>
-          <p:txBody>
-            <a:bodyPr/>
-            <a:lstStyle/>
-            <a:p/>
-          </p:txBody>
-        </p:sp>
-        <p:sp>
-          <p:nvSpPr>
             <p:cNvPr id="24" name="pl24"/>
             <p:cNvSpPr/>
             <p:nvPr/>
           </p:nvSpPr>
           <p:spPr>
             <a:xfrm>
-              <a:off x="1172049" y="4451653"/>
-              <a:ext cx="7090630" cy="937784"/>
+              <a:off x="1235312" y="2411362"/>
+              <a:ext cx="6964104" cy="785093"/>
             </a:xfrm>
             <a:custGeom>
               <a:avLst/>
               <a:pathLst>
-                <a:path w="7090630" h="937784">
+                <a:path w="6964104" h="785093">
                   <a:moveTo>
-                    <a:pt x="7090630" y="937784"/>
+                    <a:pt x="0" y="0"/>
                   </a:moveTo>
                   <a:lnTo>
-                    <a:pt x="7019007" y="932983"/>
-                  </a:lnTo>
-                  <a:lnTo>
-                    <a:pt x="6947385" y="928044"/>
-                  </a:lnTo>
-                  <a:lnTo>
-                    <a:pt x="6875762" y="922963"/>
-                  </a:lnTo>
-                  <a:lnTo>
-                    <a:pt x="6804139" y="917737"/>
-                  </a:lnTo>
-                  <a:lnTo>
-                    <a:pt x="6732517" y="912362"/>
-                  </a:lnTo>
-                  <a:lnTo>
-                    <a:pt x="6660894" y="906833"/>
-                  </a:lnTo>
-                  <a:lnTo>
-                    <a:pt x="6589272" y="901145"/>
-                  </a:lnTo>
-                  <a:lnTo>
-                    <a:pt x="6517649" y="895295"/>
-                  </a:lnTo>
-                  <a:lnTo>
-                    <a:pt x="6446027" y="889278"/>
-                  </a:lnTo>
-                  <a:lnTo>
-                    <a:pt x="6374404" y="883088"/>
-                  </a:lnTo>
-                  <a:lnTo>
-                    <a:pt x="6302782" y="876721"/>
-                  </a:lnTo>
-                  <a:lnTo>
-                    <a:pt x="6231159" y="870172"/>
-                  </a:lnTo>
-                  <a:lnTo>
-                    <a:pt x="6159537" y="863436"/>
-                  </a:lnTo>
-                  <a:lnTo>
-                    <a:pt x="6087914" y="856507"/>
-                  </a:lnTo>
-                  <a:lnTo>
-                    <a:pt x="6016292" y="849379"/>
-                  </a:lnTo>
-                  <a:lnTo>
-                    <a:pt x="5944669" y="842048"/>
-                  </a:lnTo>
-                  <a:lnTo>
-                    <a:pt x="5873047" y="834507"/>
-                  </a:lnTo>
-                  <a:lnTo>
-                    <a:pt x="5801424" y="826750"/>
-                  </a:lnTo>
-                  <a:lnTo>
-                    <a:pt x="5729802" y="818771"/>
-                  </a:lnTo>
-                  <a:lnTo>
-                    <a:pt x="5658179" y="810564"/>
-                  </a:lnTo>
-                  <a:lnTo>
-                    <a:pt x="5586557" y="802122"/>
-                  </a:lnTo>
-                  <a:lnTo>
-                    <a:pt x="5514934" y="793438"/>
-                  </a:lnTo>
-                  <a:lnTo>
-                    <a:pt x="5443311" y="784506"/>
-                  </a:lnTo>
-                  <a:lnTo>
-                    <a:pt x="5371689" y="775319"/>
-                  </a:lnTo>
-                  <a:lnTo>
-                    <a:pt x="5300066" y="765868"/>
-                  </a:lnTo>
-                  <a:lnTo>
-                    <a:pt x="5228444" y="756147"/>
-                  </a:lnTo>
-                  <a:lnTo>
-                    <a:pt x="5156821" y="746148"/>
-                  </a:lnTo>
-                  <a:lnTo>
-                    <a:pt x="5085199" y="735863"/>
-                  </a:lnTo>
-                  <a:lnTo>
-                    <a:pt x="5013576" y="725283"/>
-                  </a:lnTo>
-                  <a:lnTo>
-                    <a:pt x="4941954" y="714401"/>
-                  </a:lnTo>
-                  <a:lnTo>
-                    <a:pt x="4870331" y="703208"/>
-                  </a:lnTo>
-                  <a:lnTo>
-                    <a:pt x="4798709" y="691694"/>
-                  </a:lnTo>
-                  <a:lnTo>
-                    <a:pt x="4727086" y="679850"/>
-                  </a:lnTo>
-                  <a:lnTo>
-                    <a:pt x="4655464" y="667668"/>
-                  </a:lnTo>
-                  <a:lnTo>
-                    <a:pt x="4583841" y="655137"/>
-                  </a:lnTo>
-                  <a:lnTo>
-                    <a:pt x="4512219" y="642248"/>
-                  </a:lnTo>
-                  <a:lnTo>
-                    <a:pt x="4440596" y="628990"/>
-                  </a:lnTo>
-                  <a:lnTo>
-                    <a:pt x="4368974" y="615352"/>
-                  </a:lnTo>
-                  <a:lnTo>
-                    <a:pt x="4297351" y="601324"/>
-                  </a:lnTo>
-                  <a:lnTo>
-                    <a:pt x="4225729" y="586895"/>
-                  </a:lnTo>
-                  <a:lnTo>
-                    <a:pt x="4154106" y="572053"/>
-                  </a:lnTo>
-                  <a:lnTo>
-                    <a:pt x="4082483" y="556786"/>
-                  </a:lnTo>
-                  <a:lnTo>
-                    <a:pt x="4010861" y="541083"/>
-                  </a:lnTo>
-                  <a:lnTo>
-                    <a:pt x="3939238" y="524930"/>
-                  </a:lnTo>
-                  <a:lnTo>
-                    <a:pt x="3867616" y="508315"/>
-                  </a:lnTo>
-                  <a:lnTo>
-                    <a:pt x="3795993" y="491224"/>
-                  </a:lnTo>
-                  <a:lnTo>
-                    <a:pt x="3724371" y="473645"/>
-                  </a:lnTo>
-                  <a:lnTo>
-                    <a:pt x="3652748" y="455562"/>
-                  </a:lnTo>
-                  <a:lnTo>
-                    <a:pt x="3581126" y="436962"/>
-                  </a:lnTo>
-                  <a:lnTo>
-                    <a:pt x="3509503" y="417830"/>
-                  </a:lnTo>
-                  <a:lnTo>
-                    <a:pt x="3437881" y="398150"/>
-                  </a:lnTo>
-                  <a:lnTo>
-                    <a:pt x="3366258" y="377907"/>
-                  </a:lnTo>
-                  <a:lnTo>
-                    <a:pt x="3294636" y="357085"/>
-                  </a:lnTo>
-                  <a:lnTo>
-                    <a:pt x="3223013" y="335668"/>
-                  </a:lnTo>
-                  <a:lnTo>
-                    <a:pt x="3151391" y="313637"/>
-                  </a:lnTo>
-                  <a:lnTo>
-                    <a:pt x="3079768" y="290976"/>
-                  </a:lnTo>
-                  <a:lnTo>
-                    <a:pt x="3008146" y="274104"/>
-                  </a:lnTo>
-                  <a:lnTo>
-                    <a:pt x="2936523" y="268445"/>
-                  </a:lnTo>
-                  <a:lnTo>
-                    <a:pt x="2864901" y="262746"/>
-                  </a:lnTo>
-                  <a:lnTo>
-                    <a:pt x="2793278" y="257009"/>
-                  </a:lnTo>
-                  <a:lnTo>
-                    <a:pt x="2721655" y="251233"/>
-                  </a:lnTo>
-                  <a:lnTo>
-                    <a:pt x="2650033" y="245417"/>
-                  </a:lnTo>
-                  <a:lnTo>
-                    <a:pt x="2578410" y="239562"/>
-                  </a:lnTo>
-                  <a:lnTo>
-                    <a:pt x="2506788" y="233667"/>
-                  </a:lnTo>
-                  <a:lnTo>
-                    <a:pt x="2435165" y="227732"/>
-                  </a:lnTo>
-                  <a:lnTo>
-                    <a:pt x="2363543" y="221757"/>
-                  </a:lnTo>
-                  <a:lnTo>
-                    <a:pt x="2291920" y="215741"/>
-                  </a:lnTo>
-                  <a:lnTo>
-                    <a:pt x="2220298" y="209683"/>
-                  </a:lnTo>
-                  <a:lnTo>
-                    <a:pt x="2148675" y="203585"/>
-                  </a:lnTo>
-                  <a:lnTo>
-                    <a:pt x="2077053" y="197445"/>
-                  </a:lnTo>
-                  <a:lnTo>
-                    <a:pt x="2005430" y="191264"/>
-                  </a:lnTo>
-                  <a:lnTo>
-                    <a:pt x="1933808" y="185040"/>
-                  </a:lnTo>
-                  <a:lnTo>
-                    <a:pt x="1862185" y="178774"/>
-                  </a:lnTo>
-                  <a:lnTo>
-                    <a:pt x="1790563" y="172465"/>
-                  </a:lnTo>
-                  <a:lnTo>
-                    <a:pt x="1718940" y="166113"/>
-                  </a:lnTo>
-                  <a:lnTo>
-                    <a:pt x="1647318" y="159718"/>
-                  </a:lnTo>
-                  <a:lnTo>
-                    <a:pt x="1575695" y="153280"/>
-                  </a:lnTo>
-                  <a:lnTo>
-                    <a:pt x="1504073" y="146798"/>
-                  </a:lnTo>
-                  <a:lnTo>
-                    <a:pt x="1432450" y="140271"/>
-                  </a:lnTo>
-                  <a:lnTo>
-                    <a:pt x="1360827" y="133700"/>
-                  </a:lnTo>
-                  <a:lnTo>
-                    <a:pt x="1289205" y="127085"/>
-                  </a:lnTo>
-                  <a:lnTo>
-                    <a:pt x="1217582" y="120424"/>
-                  </a:lnTo>
-                  <a:lnTo>
-                    <a:pt x="1145960" y="113718"/>
-                  </a:lnTo>
-                  <a:lnTo>
-                    <a:pt x="1074337" y="106967"/>
-                  </a:lnTo>
-                  <a:lnTo>
-                    <a:pt x="1002715" y="100169"/>
-                  </a:lnTo>
-                  <a:lnTo>
-                    <a:pt x="931092" y="93326"/>
-                  </a:lnTo>
-                  <a:lnTo>
-                    <a:pt x="859470" y="86435"/>
-                  </a:lnTo>
-                  <a:lnTo>
-                    <a:pt x="787847" y="79498"/>
-                  </a:lnTo>
-                  <a:lnTo>
-                    <a:pt x="716225" y="72513"/>
-                  </a:lnTo>
-                  <a:lnTo>
-                    <a:pt x="644602" y="65481"/>
-                  </a:lnTo>
-                  <a:lnTo>
-                    <a:pt x="572980" y="58401"/>
-                  </a:lnTo>
-                  <a:lnTo>
-                    <a:pt x="501357" y="51273"/>
-                  </a:lnTo>
-                  <a:lnTo>
-                    <a:pt x="429735" y="44097"/>
-                  </a:lnTo>
-                  <a:lnTo>
-                    <a:pt x="358112" y="36871"/>
-                  </a:lnTo>
-                  <a:lnTo>
-                    <a:pt x="286490" y="29597"/>
-                  </a:lnTo>
-                  <a:lnTo>
-                    <a:pt x="214867" y="22272"/>
-                  </a:lnTo>
-                  <a:lnTo>
-                    <a:pt x="143245" y="14898"/>
-                  </a:lnTo>
-                  <a:lnTo>
-                    <a:pt x="71622" y="7474"/>
-                  </a:lnTo>
-                  <a:lnTo>
-                    <a:pt x="0" y="0"/>
+                    <a:pt x="70344" y="27510"/>
+                  </a:lnTo>
+                  <a:lnTo>
+                    <a:pt x="140688" y="54254"/>
+                  </a:lnTo>
+                  <a:lnTo>
+                    <a:pt x="211033" y="80255"/>
+                  </a:lnTo>
+                  <a:lnTo>
+                    <a:pt x="281377" y="105533"/>
+                  </a:lnTo>
+                  <a:lnTo>
+                    <a:pt x="351722" y="130107"/>
+                  </a:lnTo>
+                  <a:lnTo>
+                    <a:pt x="422066" y="153998"/>
+                  </a:lnTo>
+                  <a:lnTo>
+                    <a:pt x="492411" y="177224"/>
+                  </a:lnTo>
+                  <a:lnTo>
+                    <a:pt x="562755" y="199804"/>
+                  </a:lnTo>
+                  <a:lnTo>
+                    <a:pt x="633100" y="221756"/>
+                  </a:lnTo>
+                  <a:lnTo>
+                    <a:pt x="703444" y="243097"/>
+                  </a:lnTo>
+                  <a:lnTo>
+                    <a:pt x="773789" y="263844"/>
+                  </a:lnTo>
+                  <a:lnTo>
+                    <a:pt x="844133" y="284015"/>
+                  </a:lnTo>
+                  <a:lnTo>
+                    <a:pt x="914478" y="303624"/>
+                  </a:lnTo>
+                  <a:lnTo>
+                    <a:pt x="984822" y="322688"/>
+                  </a:lnTo>
+                  <a:lnTo>
+                    <a:pt x="1055167" y="341221"/>
+                  </a:lnTo>
+                  <a:lnTo>
+                    <a:pt x="1125511" y="359239"/>
+                  </a:lnTo>
+                  <a:lnTo>
+                    <a:pt x="1195856" y="376756"/>
+                  </a:lnTo>
+                  <a:lnTo>
+                    <a:pt x="1266200" y="393786"/>
+                  </a:lnTo>
+                  <a:lnTo>
+                    <a:pt x="1336545" y="410341"/>
+                  </a:lnTo>
+                  <a:lnTo>
+                    <a:pt x="1406889" y="426436"/>
+                  </a:lnTo>
+                  <a:lnTo>
+                    <a:pt x="1477234" y="442084"/>
+                  </a:lnTo>
+                  <a:lnTo>
+                    <a:pt x="1547578" y="457296"/>
+                  </a:lnTo>
+                  <a:lnTo>
+                    <a:pt x="1617923" y="472085"/>
+                  </a:lnTo>
+                  <a:lnTo>
+                    <a:pt x="1688267" y="486463"/>
+                  </a:lnTo>
+                  <a:lnTo>
+                    <a:pt x="1758612" y="500440"/>
+                  </a:lnTo>
+                  <a:lnTo>
+                    <a:pt x="1828956" y="514029"/>
+                  </a:lnTo>
+                  <a:lnTo>
+                    <a:pt x="1899301" y="527240"/>
+                  </a:lnTo>
+                  <a:lnTo>
+                    <a:pt x="1969645" y="540083"/>
+                  </a:lnTo>
+                  <a:lnTo>
+                    <a:pt x="2039990" y="552569"/>
+                  </a:lnTo>
+                  <a:lnTo>
+                    <a:pt x="2110334" y="564708"/>
+                  </a:lnTo>
+                  <a:lnTo>
+                    <a:pt x="2180679" y="576509"/>
+                  </a:lnTo>
+                  <a:lnTo>
+                    <a:pt x="2251023" y="587982"/>
+                  </a:lnTo>
+                  <a:lnTo>
+                    <a:pt x="2321368" y="599135"/>
+                  </a:lnTo>
+                  <a:lnTo>
+                    <a:pt x="2391712" y="609978"/>
+                  </a:lnTo>
+                  <a:lnTo>
+                    <a:pt x="2462057" y="620520"/>
+                  </a:lnTo>
+                  <a:lnTo>
+                    <a:pt x="2532401" y="630769"/>
+                  </a:lnTo>
+                  <a:lnTo>
+                    <a:pt x="2602746" y="640732"/>
+                  </a:lnTo>
+                  <a:lnTo>
+                    <a:pt x="2673090" y="650418"/>
+                  </a:lnTo>
+                  <a:lnTo>
+                    <a:pt x="2743435" y="659835"/>
+                  </a:lnTo>
+                  <a:lnTo>
+                    <a:pt x="2813779" y="668990"/>
+                  </a:lnTo>
+                  <a:lnTo>
+                    <a:pt x="2884124" y="677890"/>
+                  </a:lnTo>
+                  <a:lnTo>
+                    <a:pt x="2954468" y="686542"/>
+                  </a:lnTo>
+                  <a:lnTo>
+                    <a:pt x="3024813" y="690894"/>
+                  </a:lnTo>
+                  <a:lnTo>
+                    <a:pt x="3095157" y="692909"/>
+                  </a:lnTo>
+                  <a:lnTo>
+                    <a:pt x="3165502" y="694911"/>
+                  </a:lnTo>
+                  <a:lnTo>
+                    <a:pt x="3235846" y="696898"/>
+                  </a:lnTo>
+                  <a:lnTo>
+                    <a:pt x="3306191" y="698873"/>
+                  </a:lnTo>
+                  <a:lnTo>
+                    <a:pt x="3376535" y="700834"/>
+                  </a:lnTo>
+                  <a:lnTo>
+                    <a:pt x="3446880" y="702782"/>
+                  </a:lnTo>
+                  <a:lnTo>
+                    <a:pt x="3517224" y="704716"/>
+                  </a:lnTo>
+                  <a:lnTo>
+                    <a:pt x="3587569" y="706638"/>
+                  </a:lnTo>
+                  <a:lnTo>
+                    <a:pt x="3657913" y="708546"/>
+                  </a:lnTo>
+                  <a:lnTo>
+                    <a:pt x="3728257" y="710442"/>
+                  </a:lnTo>
+                  <a:lnTo>
+                    <a:pt x="3798602" y="712325"/>
+                  </a:lnTo>
+                  <a:lnTo>
+                    <a:pt x="3868946" y="714195"/>
+                  </a:lnTo>
+                  <a:lnTo>
+                    <a:pt x="3939291" y="716052"/>
+                  </a:lnTo>
+                  <a:lnTo>
+                    <a:pt x="4009635" y="717897"/>
+                  </a:lnTo>
+                  <a:lnTo>
+                    <a:pt x="4079980" y="719730"/>
+                  </a:lnTo>
+                  <a:lnTo>
+                    <a:pt x="4150324" y="721550"/>
+                  </a:lnTo>
+                  <a:lnTo>
+                    <a:pt x="4220669" y="723357"/>
+                  </a:lnTo>
+                  <a:lnTo>
+                    <a:pt x="4291013" y="725153"/>
+                  </a:lnTo>
+                  <a:lnTo>
+                    <a:pt x="4361358" y="726936"/>
+                  </a:lnTo>
+                  <a:lnTo>
+                    <a:pt x="4431702" y="728708"/>
+                  </a:lnTo>
+                  <a:lnTo>
+                    <a:pt x="4502047" y="730467"/>
+                  </a:lnTo>
+                  <a:lnTo>
+                    <a:pt x="4572391" y="732214"/>
+                  </a:lnTo>
+                  <a:lnTo>
+                    <a:pt x="4642736" y="733950"/>
+                  </a:lnTo>
+                  <a:lnTo>
+                    <a:pt x="4713080" y="735674"/>
+                  </a:lnTo>
+                  <a:lnTo>
+                    <a:pt x="4783425" y="737386"/>
+                  </a:lnTo>
+                  <a:lnTo>
+                    <a:pt x="4853769" y="739087"/>
+                  </a:lnTo>
+                  <a:lnTo>
+                    <a:pt x="4924114" y="740776"/>
+                  </a:lnTo>
+                  <a:lnTo>
+                    <a:pt x="4994458" y="742454"/>
+                  </a:lnTo>
+                  <a:lnTo>
+                    <a:pt x="5064803" y="744120"/>
+                  </a:lnTo>
+                  <a:lnTo>
+                    <a:pt x="5135147" y="745775"/>
+                  </a:lnTo>
+                  <a:lnTo>
+                    <a:pt x="5205492" y="747419"/>
+                  </a:lnTo>
+                  <a:lnTo>
+                    <a:pt x="5275836" y="749052"/>
+                  </a:lnTo>
+                  <a:lnTo>
+                    <a:pt x="5346181" y="750674"/>
+                  </a:lnTo>
+                  <a:lnTo>
+                    <a:pt x="5416525" y="752284"/>
+                  </a:lnTo>
+                  <a:lnTo>
+                    <a:pt x="5486870" y="753884"/>
+                  </a:lnTo>
+                  <a:lnTo>
+                    <a:pt x="5557214" y="755473"/>
+                  </a:lnTo>
+                  <a:lnTo>
+                    <a:pt x="5627559" y="757052"/>
+                  </a:lnTo>
+                  <a:lnTo>
+                    <a:pt x="5697903" y="758620"/>
+                  </a:lnTo>
+                  <a:lnTo>
+                    <a:pt x="5768248" y="760177"/>
+                  </a:lnTo>
+                  <a:lnTo>
+                    <a:pt x="5838592" y="761723"/>
+                  </a:lnTo>
+                  <a:lnTo>
+                    <a:pt x="5908937" y="763259"/>
+                  </a:lnTo>
+                  <a:lnTo>
+                    <a:pt x="5979281" y="764785"/>
+                  </a:lnTo>
+                  <a:lnTo>
+                    <a:pt x="6049626" y="766300"/>
+                  </a:lnTo>
+                  <a:lnTo>
+                    <a:pt x="6119970" y="767806"/>
+                  </a:lnTo>
+                  <a:lnTo>
+                    <a:pt x="6190315" y="769301"/>
+                  </a:lnTo>
+                  <a:lnTo>
+                    <a:pt x="6260659" y="770786"/>
+                  </a:lnTo>
+                  <a:lnTo>
+                    <a:pt x="6331004" y="772260"/>
+                  </a:lnTo>
+                  <a:lnTo>
+                    <a:pt x="6401348" y="773725"/>
+                  </a:lnTo>
+                  <a:lnTo>
+                    <a:pt x="6471693" y="775180"/>
+                  </a:lnTo>
+                  <a:lnTo>
+                    <a:pt x="6542037" y="776625"/>
+                  </a:lnTo>
+                  <a:lnTo>
+                    <a:pt x="6612382" y="778061"/>
+                  </a:lnTo>
+                  <a:lnTo>
+                    <a:pt x="6682726" y="779486"/>
+                  </a:lnTo>
+                  <a:lnTo>
+                    <a:pt x="6753071" y="780902"/>
+                  </a:lnTo>
+                  <a:lnTo>
+                    <a:pt x="6823415" y="782309"/>
+                  </a:lnTo>
+                  <a:lnTo>
+                    <a:pt x="6893760" y="783706"/>
+                  </a:lnTo>
+                  <a:lnTo>
+                    <a:pt x="6964104" y="785093"/>
                   </a:lnTo>
                 </a:path>
               </a:pathLst>
@@ -4326,312 +4036,637 @@
           </p:nvSpPr>
           <p:spPr>
             <a:xfrm>
-              <a:off x="1172049" y="3816637"/>
-              <a:ext cx="7090630" cy="1432738"/>
+              <a:off x="1235312" y="3001310"/>
+              <a:ext cx="6964104" cy="338424"/>
             </a:xfrm>
             <a:custGeom>
               <a:avLst/>
               <a:pathLst>
-                <a:path w="7090630" h="1432738">
+                <a:path w="6964104" h="338424">
+                  <a:moveTo>
+                    <a:pt x="6964104" y="338424"/>
+                  </a:moveTo>
+                  <a:lnTo>
+                    <a:pt x="6893760" y="336691"/>
+                  </a:lnTo>
+                  <a:lnTo>
+                    <a:pt x="6823415" y="334909"/>
+                  </a:lnTo>
+                  <a:lnTo>
+                    <a:pt x="6753071" y="333075"/>
+                  </a:lnTo>
+                  <a:lnTo>
+                    <a:pt x="6682726" y="331189"/>
+                  </a:lnTo>
+                  <a:lnTo>
+                    <a:pt x="6612382" y="329250"/>
+                  </a:lnTo>
+                  <a:lnTo>
+                    <a:pt x="6542037" y="327254"/>
+                  </a:lnTo>
+                  <a:lnTo>
+                    <a:pt x="6471693" y="325202"/>
+                  </a:lnTo>
+                  <a:lnTo>
+                    <a:pt x="6401348" y="323091"/>
+                  </a:lnTo>
+                  <a:lnTo>
+                    <a:pt x="6331004" y="320919"/>
+                  </a:lnTo>
+                  <a:lnTo>
+                    <a:pt x="6260659" y="318685"/>
+                  </a:lnTo>
+                  <a:lnTo>
+                    <a:pt x="6190315" y="316388"/>
+                  </a:lnTo>
+                  <a:lnTo>
+                    <a:pt x="6119970" y="314024"/>
+                  </a:lnTo>
+                  <a:lnTo>
+                    <a:pt x="6049626" y="311593"/>
+                  </a:lnTo>
+                  <a:lnTo>
+                    <a:pt x="5979281" y="309093"/>
+                  </a:lnTo>
+                  <a:lnTo>
+                    <a:pt x="5908937" y="306521"/>
+                  </a:lnTo>
+                  <a:lnTo>
+                    <a:pt x="5838592" y="303875"/>
+                  </a:lnTo>
+                  <a:lnTo>
+                    <a:pt x="5768248" y="301154"/>
+                  </a:lnTo>
+                  <a:lnTo>
+                    <a:pt x="5697903" y="298354"/>
+                  </a:lnTo>
+                  <a:lnTo>
+                    <a:pt x="5627559" y="295475"/>
+                  </a:lnTo>
+                  <a:lnTo>
+                    <a:pt x="5557214" y="292513"/>
+                  </a:lnTo>
+                  <a:lnTo>
+                    <a:pt x="5486870" y="289467"/>
+                  </a:lnTo>
+                  <a:lnTo>
+                    <a:pt x="5416525" y="286333"/>
+                  </a:lnTo>
+                  <a:lnTo>
+                    <a:pt x="5346181" y="283110"/>
+                  </a:lnTo>
+                  <a:lnTo>
+                    <a:pt x="5275836" y="279794"/>
+                  </a:lnTo>
+                  <a:lnTo>
+                    <a:pt x="5205492" y="276383"/>
+                  </a:lnTo>
+                  <a:lnTo>
+                    <a:pt x="5135147" y="272875"/>
+                  </a:lnTo>
+                  <a:lnTo>
+                    <a:pt x="5064803" y="269267"/>
+                  </a:lnTo>
+                  <a:lnTo>
+                    <a:pt x="4994458" y="265555"/>
+                  </a:lnTo>
+                  <a:lnTo>
+                    <a:pt x="4924114" y="261737"/>
+                  </a:lnTo>
+                  <a:lnTo>
+                    <a:pt x="4853769" y="257810"/>
+                  </a:lnTo>
+                  <a:lnTo>
+                    <a:pt x="4783425" y="253771"/>
+                  </a:lnTo>
+                  <a:lnTo>
+                    <a:pt x="4713080" y="249616"/>
+                  </a:lnTo>
+                  <a:lnTo>
+                    <a:pt x="4642736" y="245342"/>
+                  </a:lnTo>
+                  <a:lnTo>
+                    <a:pt x="4572391" y="240945"/>
+                  </a:lnTo>
+                  <a:lnTo>
+                    <a:pt x="4502047" y="236423"/>
+                  </a:lnTo>
+                  <a:lnTo>
+                    <a:pt x="4431702" y="231772"/>
+                  </a:lnTo>
+                  <a:lnTo>
+                    <a:pt x="4361358" y="226987"/>
+                  </a:lnTo>
+                  <a:lnTo>
+                    <a:pt x="4291013" y="222066"/>
+                  </a:lnTo>
+                  <a:lnTo>
+                    <a:pt x="4220669" y="217003"/>
+                  </a:lnTo>
+                  <a:lnTo>
+                    <a:pt x="4150324" y="211796"/>
+                  </a:lnTo>
+                  <a:lnTo>
+                    <a:pt x="4079980" y="206440"/>
+                  </a:lnTo>
+                  <a:lnTo>
+                    <a:pt x="4009635" y="200931"/>
+                  </a:lnTo>
+                  <a:lnTo>
+                    <a:pt x="3939291" y="195264"/>
+                  </a:lnTo>
+                  <a:lnTo>
+                    <a:pt x="3868946" y="189435"/>
+                  </a:lnTo>
+                  <a:lnTo>
+                    <a:pt x="3798602" y="183438"/>
+                  </a:lnTo>
+                  <a:lnTo>
+                    <a:pt x="3728257" y="177271"/>
+                  </a:lnTo>
+                  <a:lnTo>
+                    <a:pt x="3657913" y="170927"/>
+                  </a:lnTo>
+                  <a:lnTo>
+                    <a:pt x="3587569" y="164401"/>
+                  </a:lnTo>
+                  <a:lnTo>
+                    <a:pt x="3517224" y="157689"/>
+                  </a:lnTo>
+                  <a:lnTo>
+                    <a:pt x="3446880" y="150785"/>
+                  </a:lnTo>
+                  <a:lnTo>
+                    <a:pt x="3376535" y="143683"/>
+                  </a:lnTo>
+                  <a:lnTo>
+                    <a:pt x="3306191" y="136378"/>
+                  </a:lnTo>
+                  <a:lnTo>
+                    <a:pt x="3235846" y="128863"/>
+                  </a:lnTo>
+                  <a:lnTo>
+                    <a:pt x="3165502" y="121134"/>
+                  </a:lnTo>
+                  <a:lnTo>
+                    <a:pt x="3095157" y="113184"/>
+                  </a:lnTo>
+                  <a:lnTo>
+                    <a:pt x="3024813" y="105006"/>
+                  </a:lnTo>
+                  <a:lnTo>
+                    <a:pt x="2954468" y="98918"/>
+                  </a:lnTo>
+                  <a:lnTo>
+                    <a:pt x="2884124" y="96875"/>
+                  </a:lnTo>
+                  <a:lnTo>
+                    <a:pt x="2813779" y="94819"/>
+                  </a:lnTo>
+                  <a:lnTo>
+                    <a:pt x="2743435" y="92748"/>
+                  </a:lnTo>
+                  <a:lnTo>
+                    <a:pt x="2673090" y="90664"/>
+                  </a:lnTo>
+                  <a:lnTo>
+                    <a:pt x="2602746" y="88565"/>
+                  </a:lnTo>
+                  <a:lnTo>
+                    <a:pt x="2532401" y="86452"/>
+                  </a:lnTo>
+                  <a:lnTo>
+                    <a:pt x="2462057" y="84325"/>
+                  </a:lnTo>
+                  <a:lnTo>
+                    <a:pt x="2391712" y="82183"/>
+                  </a:lnTo>
+                  <a:lnTo>
+                    <a:pt x="2321368" y="80026"/>
+                  </a:lnTo>
+                  <a:lnTo>
+                    <a:pt x="2251023" y="77855"/>
+                  </a:lnTo>
+                  <a:lnTo>
+                    <a:pt x="2180679" y="75669"/>
+                  </a:lnTo>
+                  <a:lnTo>
+                    <a:pt x="2110334" y="73469"/>
+                  </a:lnTo>
+                  <a:lnTo>
+                    <a:pt x="2039990" y="71253"/>
+                  </a:lnTo>
+                  <a:lnTo>
+                    <a:pt x="1969645" y="69022"/>
+                  </a:lnTo>
+                  <a:lnTo>
+                    <a:pt x="1899301" y="66776"/>
+                  </a:lnTo>
+                  <a:lnTo>
+                    <a:pt x="1828956" y="64515"/>
+                  </a:lnTo>
+                  <a:lnTo>
+                    <a:pt x="1758612" y="62238"/>
+                  </a:lnTo>
+                  <a:lnTo>
+                    <a:pt x="1688267" y="59946"/>
+                  </a:lnTo>
+                  <a:lnTo>
+                    <a:pt x="1617923" y="57638"/>
+                  </a:lnTo>
+                  <a:lnTo>
+                    <a:pt x="1547578" y="55315"/>
+                  </a:lnTo>
+                  <a:lnTo>
+                    <a:pt x="1477234" y="52976"/>
+                  </a:lnTo>
+                  <a:lnTo>
+                    <a:pt x="1406889" y="50620"/>
+                  </a:lnTo>
+                  <a:lnTo>
+                    <a:pt x="1336545" y="48249"/>
+                  </a:lnTo>
+                  <a:lnTo>
+                    <a:pt x="1266200" y="45862"/>
+                  </a:lnTo>
+                  <a:lnTo>
+                    <a:pt x="1195856" y="43458"/>
+                  </a:lnTo>
+                  <a:lnTo>
+                    <a:pt x="1125511" y="41038"/>
+                  </a:lnTo>
+                  <a:lnTo>
+                    <a:pt x="1055167" y="38602"/>
+                  </a:lnTo>
+                  <a:lnTo>
+                    <a:pt x="984822" y="36148"/>
+                  </a:lnTo>
+                  <a:lnTo>
+                    <a:pt x="914478" y="33679"/>
+                  </a:lnTo>
+                  <a:lnTo>
+                    <a:pt x="844133" y="31192"/>
+                  </a:lnTo>
+                  <a:lnTo>
+                    <a:pt x="773789" y="28689"/>
+                  </a:lnTo>
+                  <a:lnTo>
+                    <a:pt x="703444" y="26168"/>
+                  </a:lnTo>
+                  <a:lnTo>
+                    <a:pt x="633100" y="23630"/>
+                  </a:lnTo>
+                  <a:lnTo>
+                    <a:pt x="562755" y="21075"/>
+                  </a:lnTo>
+                  <a:lnTo>
+                    <a:pt x="492411" y="18503"/>
+                  </a:lnTo>
+                  <a:lnTo>
+                    <a:pt x="422066" y="15913"/>
+                  </a:lnTo>
+                  <a:lnTo>
+                    <a:pt x="351722" y="13306"/>
+                  </a:lnTo>
+                  <a:lnTo>
+                    <a:pt x="281377" y="10680"/>
+                  </a:lnTo>
+                  <a:lnTo>
+                    <a:pt x="211033" y="8037"/>
+                  </a:lnTo>
+                  <a:lnTo>
+                    <a:pt x="140688" y="5376"/>
+                  </a:lnTo>
+                  <a:lnTo>
+                    <a:pt x="70344" y="2697"/>
+                  </a:lnTo>
+                  <a:lnTo>
+                    <a:pt x="0" y="0"/>
+                  </a:lnTo>
+                </a:path>
+              </a:pathLst>
+            </a:custGeom>
+          </p:spPr>
+          <p:txBody>
+            <a:bodyPr/>
+            <a:lstStyle/>
+            <a:p/>
+          </p:txBody>
+        </p:sp>
+        <p:sp>
+          <p:nvSpPr>
+            <p:cNvPr id="26" name="pl26"/>
+            <p:cNvSpPr/>
+            <p:nvPr/>
+          </p:nvSpPr>
+          <p:spPr>
+            <a:xfrm>
+              <a:off x="1235312" y="2772148"/>
+              <a:ext cx="6964104" cy="517041"/>
+            </a:xfrm>
+            <a:custGeom>
+              <a:avLst/>
+              <a:pathLst>
+                <a:path w="6964104" h="517041">
                   <a:moveTo>
                     <a:pt x="0" y="0"/>
                   </a:moveTo>
                   <a:lnTo>
-                    <a:pt x="71622" y="30192"/>
-                  </a:lnTo>
-                  <a:lnTo>
-                    <a:pt x="143245" y="59860"/>
-                  </a:lnTo>
-                  <a:lnTo>
-                    <a:pt x="214867" y="89014"/>
-                  </a:lnTo>
-                  <a:lnTo>
-                    <a:pt x="286490" y="117663"/>
-                  </a:lnTo>
-                  <a:lnTo>
-                    <a:pt x="358112" y="145814"/>
-                  </a:lnTo>
-                  <a:lnTo>
-                    <a:pt x="429735" y="173477"/>
-                  </a:lnTo>
-                  <a:lnTo>
-                    <a:pt x="501357" y="200660"/>
-                  </a:lnTo>
-                  <a:lnTo>
-                    <a:pt x="572980" y="227372"/>
-                  </a:lnTo>
-                  <a:lnTo>
-                    <a:pt x="644602" y="253620"/>
-                  </a:lnTo>
-                  <a:lnTo>
-                    <a:pt x="716225" y="279413"/>
-                  </a:lnTo>
-                  <a:lnTo>
-                    <a:pt x="787847" y="304759"/>
-                  </a:lnTo>
-                  <a:lnTo>
-                    <a:pt x="859470" y="329665"/>
-                  </a:lnTo>
-                  <a:lnTo>
-                    <a:pt x="931092" y="354139"/>
-                  </a:lnTo>
-                  <a:lnTo>
-                    <a:pt x="1002715" y="378188"/>
-                  </a:lnTo>
-                  <a:lnTo>
-                    <a:pt x="1074337" y="401820"/>
-                  </a:lnTo>
-                  <a:lnTo>
-                    <a:pt x="1145960" y="425043"/>
-                  </a:lnTo>
-                  <a:lnTo>
-                    <a:pt x="1217582" y="447862"/>
-                  </a:lnTo>
-                  <a:lnTo>
-                    <a:pt x="1289205" y="470286"/>
-                  </a:lnTo>
-                  <a:lnTo>
-                    <a:pt x="1360827" y="492321"/>
-                  </a:lnTo>
-                  <a:lnTo>
-                    <a:pt x="1432450" y="513974"/>
-                  </a:lnTo>
-                  <a:lnTo>
-                    <a:pt x="1504073" y="535251"/>
-                  </a:lnTo>
-                  <a:lnTo>
-                    <a:pt x="1575695" y="556159"/>
-                  </a:lnTo>
-                  <a:lnTo>
-                    <a:pt x="1647318" y="576704"/>
-                  </a:lnTo>
-                  <a:lnTo>
-                    <a:pt x="1718940" y="596893"/>
-                  </a:lnTo>
-                  <a:lnTo>
-                    <a:pt x="1790563" y="616731"/>
-                  </a:lnTo>
-                  <a:lnTo>
-                    <a:pt x="1862185" y="636226"/>
-                  </a:lnTo>
-                  <a:lnTo>
-                    <a:pt x="1933808" y="655382"/>
-                  </a:lnTo>
-                  <a:lnTo>
-                    <a:pt x="2005430" y="674207"/>
-                  </a:lnTo>
-                  <a:lnTo>
-                    <a:pt x="2077053" y="692704"/>
-                  </a:lnTo>
-                  <a:lnTo>
-                    <a:pt x="2148675" y="710881"/>
-                  </a:lnTo>
-                  <a:lnTo>
-                    <a:pt x="2220298" y="728742"/>
-                  </a:lnTo>
-                  <a:lnTo>
-                    <a:pt x="2291920" y="746294"/>
-                  </a:lnTo>
-                  <a:lnTo>
-                    <a:pt x="2363543" y="763541"/>
-                  </a:lnTo>
-                  <a:lnTo>
-                    <a:pt x="2435165" y="780489"/>
-                  </a:lnTo>
-                  <a:lnTo>
-                    <a:pt x="2506788" y="797144"/>
-                  </a:lnTo>
-                  <a:lnTo>
-                    <a:pt x="2578410" y="813509"/>
-                  </a:lnTo>
-                  <a:lnTo>
-                    <a:pt x="2650033" y="829590"/>
-                  </a:lnTo>
-                  <a:lnTo>
-                    <a:pt x="2721655" y="845392"/>
-                  </a:lnTo>
-                  <a:lnTo>
-                    <a:pt x="2793278" y="860921"/>
-                  </a:lnTo>
-                  <a:lnTo>
-                    <a:pt x="2864901" y="876180"/>
-                  </a:lnTo>
-                  <a:lnTo>
-                    <a:pt x="2936523" y="891174"/>
-                  </a:lnTo>
-                  <a:lnTo>
-                    <a:pt x="3008146" y="905908"/>
-                  </a:lnTo>
-                  <a:lnTo>
-                    <a:pt x="3079768" y="920387"/>
-                  </a:lnTo>
-                  <a:lnTo>
-                    <a:pt x="3151391" y="934614"/>
-                  </a:lnTo>
-                  <a:lnTo>
-                    <a:pt x="3223013" y="948595"/>
-                  </a:lnTo>
-                  <a:lnTo>
-                    <a:pt x="3294636" y="962333"/>
-                  </a:lnTo>
-                  <a:lnTo>
-                    <a:pt x="3366258" y="975833"/>
-                  </a:lnTo>
-                  <a:lnTo>
-                    <a:pt x="3437881" y="989098"/>
-                  </a:lnTo>
-                  <a:lnTo>
-                    <a:pt x="3509503" y="1002134"/>
-                  </a:lnTo>
-                  <a:lnTo>
-                    <a:pt x="3581126" y="1014944"/>
-                  </a:lnTo>
-                  <a:lnTo>
-                    <a:pt x="3652748" y="1027531"/>
-                  </a:lnTo>
-                  <a:lnTo>
-                    <a:pt x="3724371" y="1039900"/>
-                  </a:lnTo>
-                  <a:lnTo>
-                    <a:pt x="3795993" y="1052054"/>
-                  </a:lnTo>
-                  <a:lnTo>
-                    <a:pt x="3867616" y="1063998"/>
-                  </a:lnTo>
-                  <a:lnTo>
-                    <a:pt x="3939238" y="1075734"/>
-                  </a:lnTo>
-                  <a:lnTo>
-                    <a:pt x="4010861" y="1087267"/>
-                  </a:lnTo>
-                  <a:lnTo>
-                    <a:pt x="4082483" y="1098600"/>
-                  </a:lnTo>
-                  <a:lnTo>
-                    <a:pt x="4154106" y="1109736"/>
-                  </a:lnTo>
-                  <a:lnTo>
-                    <a:pt x="4225729" y="1120679"/>
-                  </a:lnTo>
-                  <a:lnTo>
-                    <a:pt x="4297351" y="1131432"/>
-                  </a:lnTo>
-                  <a:lnTo>
-                    <a:pt x="4368974" y="1141999"/>
-                  </a:lnTo>
-                  <a:lnTo>
-                    <a:pt x="4440596" y="1152382"/>
-                  </a:lnTo>
-                  <a:lnTo>
-                    <a:pt x="4512219" y="1162586"/>
-                  </a:lnTo>
-                  <a:lnTo>
-                    <a:pt x="4583841" y="1172612"/>
-                  </a:lnTo>
-                  <a:lnTo>
-                    <a:pt x="4655464" y="1182464"/>
-                  </a:lnTo>
-                  <a:lnTo>
-                    <a:pt x="4727086" y="1192146"/>
-                  </a:lnTo>
-                  <a:lnTo>
-                    <a:pt x="4798709" y="1201659"/>
-                  </a:lnTo>
-                  <a:lnTo>
-                    <a:pt x="4870331" y="1211008"/>
-                  </a:lnTo>
-                  <a:lnTo>
-                    <a:pt x="4941954" y="1220194"/>
-                  </a:lnTo>
-                  <a:lnTo>
-                    <a:pt x="5013576" y="1229221"/>
-                  </a:lnTo>
-                  <a:lnTo>
-                    <a:pt x="5085199" y="1238092"/>
-                  </a:lnTo>
-                  <a:lnTo>
-                    <a:pt x="5156821" y="1246809"/>
-                  </a:lnTo>
-                  <a:lnTo>
-                    <a:pt x="5228444" y="1255374"/>
-                  </a:lnTo>
-                  <a:lnTo>
-                    <a:pt x="5300066" y="1263791"/>
-                  </a:lnTo>
-                  <a:lnTo>
-                    <a:pt x="5371689" y="1272062"/>
-                  </a:lnTo>
-                  <a:lnTo>
-                    <a:pt x="5443311" y="1280189"/>
-                  </a:lnTo>
-                  <a:lnTo>
-                    <a:pt x="5514934" y="1288175"/>
-                  </a:lnTo>
-                  <a:lnTo>
-                    <a:pt x="5586557" y="1296023"/>
-                  </a:lnTo>
-                  <a:lnTo>
-                    <a:pt x="5658179" y="1303735"/>
-                  </a:lnTo>
-                  <a:lnTo>
-                    <a:pt x="5729802" y="1311313"/>
-                  </a:lnTo>
-                  <a:lnTo>
-                    <a:pt x="5801424" y="1318760"/>
-                  </a:lnTo>
-                  <a:lnTo>
-                    <a:pt x="5873047" y="1326077"/>
-                  </a:lnTo>
-                  <a:lnTo>
-                    <a:pt x="5944669" y="1333267"/>
-                  </a:lnTo>
-                  <a:lnTo>
-                    <a:pt x="6016292" y="1340333"/>
-                  </a:lnTo>
-                  <a:lnTo>
-                    <a:pt x="6087914" y="1347276"/>
-                  </a:lnTo>
-                  <a:lnTo>
-                    <a:pt x="6159537" y="1354099"/>
-                  </a:lnTo>
-                  <a:lnTo>
-                    <a:pt x="6231159" y="1360803"/>
-                  </a:lnTo>
-                  <a:lnTo>
-                    <a:pt x="6302782" y="1367391"/>
-                  </a:lnTo>
-                  <a:lnTo>
-                    <a:pt x="6374404" y="1373865"/>
-                  </a:lnTo>
-                  <a:lnTo>
-                    <a:pt x="6446027" y="1380227"/>
-                  </a:lnTo>
-                  <a:lnTo>
-                    <a:pt x="6517649" y="1386478"/>
-                  </a:lnTo>
-                  <a:lnTo>
-                    <a:pt x="6589272" y="1392621"/>
-                  </a:lnTo>
-                  <a:lnTo>
-                    <a:pt x="6660894" y="1398657"/>
-                  </a:lnTo>
-                  <a:lnTo>
-                    <a:pt x="6732517" y="1404588"/>
-                  </a:lnTo>
-                  <a:lnTo>
-                    <a:pt x="6804139" y="1410417"/>
-                  </a:lnTo>
-                  <a:lnTo>
-                    <a:pt x="6875762" y="1416144"/>
-                  </a:lnTo>
-                  <a:lnTo>
-                    <a:pt x="6947385" y="1421773"/>
-                  </a:lnTo>
-                  <a:lnTo>
-                    <a:pt x="7019007" y="1427303"/>
-                  </a:lnTo>
-                  <a:lnTo>
-                    <a:pt x="7090630" y="1432738"/>
+                    <a:pt x="70344" y="10895"/>
+                  </a:lnTo>
+                  <a:lnTo>
+                    <a:pt x="140688" y="21602"/>
+                  </a:lnTo>
+                  <a:lnTo>
+                    <a:pt x="211033" y="32123"/>
+                  </a:lnTo>
+                  <a:lnTo>
+                    <a:pt x="281377" y="42461"/>
+                  </a:lnTo>
+                  <a:lnTo>
+                    <a:pt x="351722" y="52620"/>
+                  </a:lnTo>
+                  <a:lnTo>
+                    <a:pt x="422066" y="62603"/>
+                  </a:lnTo>
+                  <a:lnTo>
+                    <a:pt x="492411" y="72413"/>
+                  </a:lnTo>
+                  <a:lnTo>
+                    <a:pt x="562755" y="82053"/>
+                  </a:lnTo>
+                  <a:lnTo>
+                    <a:pt x="633100" y="91525"/>
+                  </a:lnTo>
+                  <a:lnTo>
+                    <a:pt x="703444" y="100833"/>
+                  </a:lnTo>
+                  <a:lnTo>
+                    <a:pt x="773789" y="109980"/>
+                  </a:lnTo>
+                  <a:lnTo>
+                    <a:pt x="844133" y="118968"/>
+                  </a:lnTo>
+                  <a:lnTo>
+                    <a:pt x="914478" y="127800"/>
+                  </a:lnTo>
+                  <a:lnTo>
+                    <a:pt x="984822" y="136479"/>
+                  </a:lnTo>
+                  <a:lnTo>
+                    <a:pt x="1055167" y="145007"/>
+                  </a:lnTo>
+                  <a:lnTo>
+                    <a:pt x="1125511" y="153388"/>
+                  </a:lnTo>
+                  <a:lnTo>
+                    <a:pt x="1195856" y="161623"/>
+                  </a:lnTo>
+                  <a:lnTo>
+                    <a:pt x="1266200" y="169715"/>
+                  </a:lnTo>
+                  <a:lnTo>
+                    <a:pt x="1336545" y="177667"/>
+                  </a:lnTo>
+                  <a:lnTo>
+                    <a:pt x="1406889" y="185481"/>
+                  </a:lnTo>
+                  <a:lnTo>
+                    <a:pt x="1477234" y="193159"/>
+                  </a:lnTo>
+                  <a:lnTo>
+                    <a:pt x="1547578" y="200704"/>
+                  </a:lnTo>
+                  <a:lnTo>
+                    <a:pt x="1617923" y="208119"/>
+                  </a:lnTo>
+                  <a:lnTo>
+                    <a:pt x="1688267" y="215404"/>
+                  </a:lnTo>
+                  <a:lnTo>
+                    <a:pt x="1758612" y="222564"/>
+                  </a:lnTo>
+                  <a:lnTo>
+                    <a:pt x="1828956" y="229599"/>
+                  </a:lnTo>
+                  <a:lnTo>
+                    <a:pt x="1899301" y="236512"/>
+                  </a:lnTo>
+                  <a:lnTo>
+                    <a:pt x="1969645" y="243305"/>
+                  </a:lnTo>
+                  <a:lnTo>
+                    <a:pt x="2039990" y="249980"/>
+                  </a:lnTo>
+                  <a:lnTo>
+                    <a:pt x="2110334" y="256540"/>
+                  </a:lnTo>
+                  <a:lnTo>
+                    <a:pt x="2180679" y="262986"/>
+                  </a:lnTo>
+                  <a:lnTo>
+                    <a:pt x="2251023" y="269320"/>
+                  </a:lnTo>
+                  <a:lnTo>
+                    <a:pt x="2321368" y="275544"/>
+                  </a:lnTo>
+                  <a:lnTo>
+                    <a:pt x="2391712" y="281660"/>
+                  </a:lnTo>
+                  <a:lnTo>
+                    <a:pt x="2462057" y="287670"/>
+                  </a:lnTo>
+                  <a:lnTo>
+                    <a:pt x="2532401" y="293576"/>
+                  </a:lnTo>
+                  <a:lnTo>
+                    <a:pt x="2602746" y="299379"/>
+                  </a:lnTo>
+                  <a:lnTo>
+                    <a:pt x="2673090" y="305082"/>
+                  </a:lnTo>
+                  <a:lnTo>
+                    <a:pt x="2743435" y="310686"/>
+                  </a:lnTo>
+                  <a:lnTo>
+                    <a:pt x="2813779" y="316192"/>
+                  </a:lnTo>
+                  <a:lnTo>
+                    <a:pt x="2884124" y="321603"/>
+                  </a:lnTo>
+                  <a:lnTo>
+                    <a:pt x="2954468" y="326921"/>
+                  </a:lnTo>
+                  <a:lnTo>
+                    <a:pt x="3024813" y="332146"/>
+                  </a:lnTo>
+                  <a:lnTo>
+                    <a:pt x="3095157" y="337280"/>
+                  </a:lnTo>
+                  <a:lnTo>
+                    <a:pt x="3165502" y="342325"/>
+                  </a:lnTo>
+                  <a:lnTo>
+                    <a:pt x="3235846" y="347283"/>
+                  </a:lnTo>
+                  <a:lnTo>
+                    <a:pt x="3306191" y="352155"/>
+                  </a:lnTo>
+                  <a:lnTo>
+                    <a:pt x="3376535" y="356942"/>
+                  </a:lnTo>
+                  <a:lnTo>
+                    <a:pt x="3446880" y="361646"/>
+                  </a:lnTo>
+                  <a:lnTo>
+                    <a:pt x="3517224" y="366269"/>
+                  </a:lnTo>
+                  <a:lnTo>
+                    <a:pt x="3587569" y="370811"/>
+                  </a:lnTo>
+                  <a:lnTo>
+                    <a:pt x="3657913" y="375275"/>
+                  </a:lnTo>
+                  <a:lnTo>
+                    <a:pt x="3728257" y="379661"/>
+                  </a:lnTo>
+                  <a:lnTo>
+                    <a:pt x="3798602" y="383971"/>
+                  </a:lnTo>
+                  <a:lnTo>
+                    <a:pt x="3868946" y="388207"/>
+                  </a:lnTo>
+                  <a:lnTo>
+                    <a:pt x="3939291" y="392369"/>
+                  </a:lnTo>
+                  <a:lnTo>
+                    <a:pt x="4009635" y="396459"/>
+                  </a:lnTo>
+                  <a:lnTo>
+                    <a:pt x="4079980" y="400477"/>
+                  </a:lnTo>
+                  <a:lnTo>
+                    <a:pt x="4150324" y="404426"/>
+                  </a:lnTo>
+                  <a:lnTo>
+                    <a:pt x="4220669" y="408307"/>
+                  </a:lnTo>
+                  <a:lnTo>
+                    <a:pt x="4291013" y="412120"/>
+                  </a:lnTo>
+                  <a:lnTo>
+                    <a:pt x="4361358" y="415867"/>
+                  </a:lnTo>
+                  <a:lnTo>
+                    <a:pt x="4431702" y="419550"/>
+                  </a:lnTo>
+                  <a:lnTo>
+                    <a:pt x="4502047" y="423168"/>
+                  </a:lnTo>
+                  <a:lnTo>
+                    <a:pt x="4572391" y="426723"/>
+                  </a:lnTo>
+                  <a:lnTo>
+                    <a:pt x="4642736" y="430217"/>
+                  </a:lnTo>
+                  <a:lnTo>
+                    <a:pt x="4713080" y="433650"/>
+                  </a:lnTo>
+                  <a:lnTo>
+                    <a:pt x="4783425" y="437024"/>
+                  </a:lnTo>
+                  <a:lnTo>
+                    <a:pt x="4853769" y="440339"/>
+                  </a:lnTo>
+                  <a:lnTo>
+                    <a:pt x="4924114" y="443597"/>
+                  </a:lnTo>
+                  <a:lnTo>
+                    <a:pt x="4994458" y="446798"/>
+                  </a:lnTo>
+                  <a:lnTo>
+                    <a:pt x="5064803" y="449944"/>
+                  </a:lnTo>
+                  <a:lnTo>
+                    <a:pt x="5135147" y="453035"/>
+                  </a:lnTo>
+                  <a:lnTo>
+                    <a:pt x="5205492" y="456072"/>
+                  </a:lnTo>
+                  <a:lnTo>
+                    <a:pt x="5275836" y="459057"/>
+                  </a:lnTo>
+                  <a:lnTo>
+                    <a:pt x="5346181" y="461990"/>
+                  </a:lnTo>
+                  <a:lnTo>
+                    <a:pt x="5416525" y="464872"/>
+                  </a:lnTo>
+                  <a:lnTo>
+                    <a:pt x="5486870" y="467704"/>
+                  </a:lnTo>
+                  <a:lnTo>
+                    <a:pt x="5557214" y="470487"/>
+                  </a:lnTo>
+                  <a:lnTo>
+                    <a:pt x="5627559" y="473222"/>
+                  </a:lnTo>
+                  <a:lnTo>
+                    <a:pt x="5697903" y="475909"/>
+                  </a:lnTo>
+                  <a:lnTo>
+                    <a:pt x="5768248" y="478550"/>
+                  </a:lnTo>
+                  <a:lnTo>
+                    <a:pt x="5838592" y="481144"/>
+                  </a:lnTo>
+                  <a:lnTo>
+                    <a:pt x="5908937" y="483694"/>
+                  </a:lnTo>
+                  <a:lnTo>
+                    <a:pt x="5979281" y="486200"/>
+                  </a:lnTo>
+                  <a:lnTo>
+                    <a:pt x="6049626" y="488662"/>
+                  </a:lnTo>
+                  <a:lnTo>
+                    <a:pt x="6119970" y="491082"/>
+                  </a:lnTo>
+                  <a:lnTo>
+                    <a:pt x="6190315" y="493459"/>
+                  </a:lnTo>
+                  <a:lnTo>
+                    <a:pt x="6260659" y="495795"/>
+                  </a:lnTo>
+                  <a:lnTo>
+                    <a:pt x="6331004" y="498091"/>
+                  </a:lnTo>
+                  <a:lnTo>
+                    <a:pt x="6401348" y="500347"/>
+                  </a:lnTo>
+                  <a:lnTo>
+                    <a:pt x="6471693" y="502564"/>
+                  </a:lnTo>
+                  <a:lnTo>
+                    <a:pt x="6542037" y="504742"/>
+                  </a:lnTo>
+                  <a:lnTo>
+                    <a:pt x="6612382" y="506883"/>
+                  </a:lnTo>
+                  <a:lnTo>
+                    <a:pt x="6682726" y="508986"/>
+                  </a:lnTo>
+                  <a:lnTo>
+                    <a:pt x="6753071" y="511053"/>
+                  </a:lnTo>
+                  <a:lnTo>
+                    <a:pt x="6823415" y="513084"/>
+                  </a:lnTo>
+                  <a:lnTo>
+                    <a:pt x="6893760" y="515080"/>
+                  </a:lnTo>
+                  <a:lnTo>
+                    <a:pt x="6964104" y="517041"/>
                   </a:lnTo>
                 </a:path>
               </a:pathLst>
@@ -4654,27 +4689,27 @@
         </p:sp>
         <p:sp>
           <p:nvSpPr>
-            <p:cNvPr id="26" name="pl26"/>
+            <p:cNvPr id="27" name="pl27"/>
             <p:cNvSpPr/>
             <p:nvPr/>
           </p:nvSpPr>
           <p:spPr>
             <a:xfrm>
-              <a:off x="817517" y="4727786"/>
-              <a:ext cx="7799693" cy="0"/>
+              <a:off x="887106" y="3100960"/>
+              <a:ext cx="7660515" cy="0"/>
             </a:xfrm>
             <a:custGeom>
               <a:avLst/>
               <a:pathLst>
-                <a:path w="7799693" h="0">
+                <a:path w="7660515" h="0">
                   <a:moveTo>
                     <a:pt x="0" y="0"/>
                   </a:moveTo>
                   <a:lnTo>
-                    <a:pt x="7799693" y="0"/>
-                  </a:lnTo>
-                  <a:lnTo>
-                    <a:pt x="7799693" y="0"/>
+                    <a:pt x="7660515" y="0"/>
+                  </a:lnTo>
+                  <a:lnTo>
+                    <a:pt x="7660515" y="0"/>
                   </a:lnTo>
                 </a:path>
               </a:pathLst>
@@ -4697,21 +4732,21 @@
         </p:sp>
         <p:sp>
           <p:nvSpPr>
-            <p:cNvPr id="27" name="pl27"/>
+            <p:cNvPr id="28" name="pl28"/>
             <p:cNvSpPr/>
             <p:nvPr/>
           </p:nvSpPr>
           <p:spPr>
             <a:xfrm>
-              <a:off x="4205975" y="2073503"/>
-              <a:ext cx="0" cy="3649639"/>
+              <a:off x="4215100" y="2143092"/>
+              <a:ext cx="0" cy="1317069"/>
             </a:xfrm>
             <a:custGeom>
               <a:avLst/>
               <a:pathLst>
-                <a:path w="0" h="3649639">
+                <a:path w="0" h="1317069">
                   <a:moveTo>
-                    <a:pt x="0" y="3649639"/>
+                    <a:pt x="0" y="1317069"/>
                   </a:moveTo>
                   <a:lnTo>
                     <a:pt x="0" y="0"/>
@@ -4740,21 +4775,21 @@
         </p:sp>
         <p:sp>
           <p:nvSpPr>
-            <p:cNvPr id="28" name="pl28"/>
+            <p:cNvPr id="29" name="pl29"/>
             <p:cNvSpPr/>
             <p:nvPr/>
           </p:nvSpPr>
           <p:spPr>
             <a:xfrm>
-              <a:off x="3016442" y="2073503"/>
-              <a:ext cx="0" cy="3649639"/>
+              <a:off x="3046793" y="2143092"/>
+              <a:ext cx="0" cy="1317069"/>
             </a:xfrm>
             <a:custGeom>
               <a:avLst/>
               <a:pathLst>
-                <a:path w="0" h="3649639">
+                <a:path w="0" h="1317069">
                   <a:moveTo>
-                    <a:pt x="0" y="3649639"/>
+                    <a:pt x="0" y="1317069"/>
                   </a:moveTo>
                   <a:lnTo>
                     <a:pt x="0" y="0"/>
@@ -4783,21 +4818,21 @@
         </p:sp>
         <p:sp>
           <p:nvSpPr>
-            <p:cNvPr id="29" name="pl29"/>
+            <p:cNvPr id="30" name="pl30"/>
             <p:cNvSpPr/>
             <p:nvPr/>
           </p:nvSpPr>
           <p:spPr>
             <a:xfrm>
-              <a:off x="5421760" y="2073503"/>
-              <a:ext cx="0" cy="3649639"/>
+              <a:off x="5409191" y="2143092"/>
+              <a:ext cx="0" cy="1317069"/>
             </a:xfrm>
             <a:custGeom>
               <a:avLst/>
               <a:pathLst>
-                <a:path w="0" h="3649639">
+                <a:path w="0" h="1317069">
                   <a:moveTo>
-                    <a:pt x="0" y="3649639"/>
+                    <a:pt x="0" y="1317069"/>
                   </a:moveTo>
                   <a:lnTo>
                     <a:pt x="0" y="0"/>
@@ -4826,13 +4861,13 @@
         </p:sp>
         <p:sp>
           <p:nvSpPr>
-            <p:cNvPr id="30" name="tx30"/>
+            <p:cNvPr id="31" name="tx31"/>
             <p:cNvSpPr/>
             <p:nvPr/>
           </p:nvSpPr>
           <p:spPr>
             <a:xfrm>
-              <a:off x="692708" y="5517199"/>
+              <a:off x="762297" y="3360243"/>
               <a:ext cx="62179" cy="80101"/>
             </a:xfrm>
             <a:prstGeom prst="rect">
@@ -4872,13 +4907,13 @@
         </p:sp>
         <p:sp>
           <p:nvSpPr>
-            <p:cNvPr id="31" name="tx31"/>
+            <p:cNvPr id="32" name="tx32"/>
             <p:cNvSpPr/>
             <p:nvPr/>
           </p:nvSpPr>
           <p:spPr>
             <a:xfrm>
-              <a:off x="692708" y="4687735"/>
+              <a:off x="762297" y="3060909"/>
               <a:ext cx="62179" cy="80101"/>
             </a:xfrm>
             <a:prstGeom prst="rect">
@@ -4918,13 +4953,13 @@
         </p:sp>
         <p:sp>
           <p:nvSpPr>
-            <p:cNvPr id="32" name="tx32"/>
+            <p:cNvPr id="33" name="tx33"/>
             <p:cNvSpPr/>
             <p:nvPr/>
           </p:nvSpPr>
           <p:spPr>
             <a:xfrm>
-              <a:off x="692708" y="3858272"/>
+              <a:off x="762297" y="2761575"/>
               <a:ext cx="62179" cy="80101"/>
             </a:xfrm>
             <a:prstGeom prst="rect">
@@ -4964,13 +4999,13 @@
         </p:sp>
         <p:sp>
           <p:nvSpPr>
-            <p:cNvPr id="33" name="tx33"/>
+            <p:cNvPr id="34" name="tx34"/>
             <p:cNvSpPr/>
             <p:nvPr/>
           </p:nvSpPr>
           <p:spPr>
             <a:xfrm>
-              <a:off x="692708" y="3028808"/>
+              <a:off x="762297" y="2462242"/>
               <a:ext cx="62179" cy="80101"/>
             </a:xfrm>
             <a:prstGeom prst="rect">
@@ -5010,13 +5045,13 @@
         </p:sp>
         <p:sp>
           <p:nvSpPr>
-            <p:cNvPr id="34" name="tx34"/>
+            <p:cNvPr id="35" name="tx35"/>
             <p:cNvSpPr/>
             <p:nvPr/>
           </p:nvSpPr>
           <p:spPr>
             <a:xfrm>
-              <a:off x="692708" y="2199345"/>
+              <a:off x="762297" y="2162908"/>
               <a:ext cx="62179" cy="80101"/>
             </a:xfrm>
             <a:prstGeom prst="rect">
@@ -5056,13 +5091,13 @@
         </p:sp>
         <p:sp>
           <p:nvSpPr>
-            <p:cNvPr id="35" name="tx35"/>
+            <p:cNvPr id="36" name="tx36"/>
             <p:cNvSpPr/>
             <p:nvPr/>
           </p:nvSpPr>
           <p:spPr>
             <a:xfrm>
-              <a:off x="1977028" y="5785772"/>
+              <a:off x="2024485" y="3522791"/>
               <a:ext cx="161574" cy="80101"/>
             </a:xfrm>
             <a:prstGeom prst="rect">
@@ -5102,13 +5137,13 @@
         </p:sp>
         <p:sp>
           <p:nvSpPr>
-            <p:cNvPr id="36" name="tx36"/>
+            <p:cNvPr id="37" name="tx37"/>
             <p:cNvSpPr/>
             <p:nvPr/>
           </p:nvSpPr>
           <p:spPr>
             <a:xfrm>
-              <a:off x="3728813" y="5785772"/>
+              <a:off x="3745012" y="3522791"/>
               <a:ext cx="161574" cy="80101"/>
             </a:xfrm>
             <a:prstGeom prst="rect">
@@ -5148,13 +5183,13 @@
         </p:sp>
         <p:sp>
           <p:nvSpPr>
-            <p:cNvPr id="37" name="tx37"/>
+            <p:cNvPr id="38" name="tx38"/>
             <p:cNvSpPr/>
             <p:nvPr/>
           </p:nvSpPr>
           <p:spPr>
             <a:xfrm>
-              <a:off x="5530296" y="5785772"/>
+              <a:off x="5515235" y="3522791"/>
               <a:ext cx="62179" cy="80101"/>
             </a:xfrm>
             <a:prstGeom prst="rect">
@@ -5194,13 +5229,13 @@
         </p:sp>
         <p:sp>
           <p:nvSpPr>
-            <p:cNvPr id="38" name="tx38"/>
+            <p:cNvPr id="39" name="tx39"/>
             <p:cNvSpPr/>
             <p:nvPr/>
           </p:nvSpPr>
           <p:spPr>
             <a:xfrm>
-              <a:off x="7250992" y="5785772"/>
+              <a:off x="7204672" y="3522791"/>
               <a:ext cx="124358" cy="80101"/>
             </a:xfrm>
             <a:prstGeom prst="rect">
@@ -5240,13 +5275,13 @@
         </p:sp>
         <p:sp>
           <p:nvSpPr>
-            <p:cNvPr id="39" name="tx39"/>
+            <p:cNvPr id="40" name="tx40"/>
             <p:cNvSpPr/>
             <p:nvPr/>
           </p:nvSpPr>
           <p:spPr>
             <a:xfrm>
-              <a:off x="1561815" y="5925448"/>
+              <a:off x="1561815" y="3662467"/>
               <a:ext cx="6311097" cy="100218"/>
             </a:xfrm>
             <a:prstGeom prst="rect">
@@ -5286,13 +5321,13 @@
         </p:sp>
         <p:sp>
           <p:nvSpPr>
-            <p:cNvPr id="40" name="tx40"/>
+            <p:cNvPr id="41" name="tx41"/>
             <p:cNvSpPr/>
             <p:nvPr/>
           </p:nvSpPr>
           <p:spPr>
             <a:xfrm rot="-5400000">
-              <a:off x="68446" y="3848213"/>
+              <a:off x="138035" y="2751517"/>
               <a:ext cx="1016904" cy="100218"/>
             </a:xfrm>
             <a:prstGeom prst="rect">
@@ -5332,13 +5367,13 @@
         </p:sp>
         <p:sp>
           <p:nvSpPr>
-            <p:cNvPr id="41" name="tx41"/>
+            <p:cNvPr id="42" name="tx42"/>
             <p:cNvSpPr/>
             <p:nvPr/>
           </p:nvSpPr>
           <p:spPr>
             <a:xfrm>
-              <a:off x="817517" y="1896563"/>
+              <a:off x="887106" y="1966152"/>
               <a:ext cx="6959864" cy="82021"/>
             </a:xfrm>
             <a:prstGeom prst="rect">
@@ -5378,13 +5413,3746 @@
         </p:sp>
         <p:sp>
           <p:nvSpPr>
-            <p:cNvPr id="42" name="tx42"/>
+            <p:cNvPr id="43" name="tx43"/>
             <p:cNvSpPr/>
             <p:nvPr/>
           </p:nvSpPr>
           <p:spPr>
             <a:xfrm>
-              <a:off x="817517" y="1669789"/>
+              <a:off x="887106" y="1739378"/>
+              <a:ext cx="1834103" cy="120152"/>
+            </a:xfrm>
+            <a:prstGeom prst="rect">
+              <a:avLst/>
+            </a:prstGeom>
+            <a:noFill/>
+          </p:spPr>
+          <p:txBody>
+            <a:bodyPr lIns="0" rIns="0" tIns="0" bIns="0" anchorCtr="1" anchor="ctr" wrap="none"/>
+            <a:lstStyle/>
+            <a:p>
+              <a:pPr algn="l" marL="0" marR="0" indent="0">
+                <a:lnSpc>
+                  <a:spcPts val="1320"/>
+                </a:lnSpc>
+                <a:spcBef>
+                  <a:spcPts val="0"/>
+                </a:spcBef>
+                <a:spcAft>
+                  <a:spcPts val="0"/>
+                </a:spcAft>
+              </a:pPr>
+              <a:r>
+                <a:rPr sz="1320">
+                  <a:solidFill>
+                    <a:srgbClr val="000000">
+                      <a:alpha val="100000"/>
+                    </a:srgbClr>
+                  </a:solidFill>
+                  <a:latin typeface="Helvetica"/>
+                  <a:cs typeface="Helvetica"/>
+                </a:rPr>
+                <a:t>AKI Grade 2 (Sensitivity)</a:t>
+              </a:r>
+            </a:p>
+          </p:txBody>
+        </p:sp>
+        <p:sp>
+          <p:nvSpPr>
+            <p:cNvPr id="44" name="pl44"/>
+            <p:cNvSpPr/>
+            <p:nvPr/>
+          </p:nvSpPr>
+          <p:spPr>
+            <a:xfrm>
+              <a:off x="887106" y="5444019"/>
+              <a:ext cx="7660515" cy="0"/>
+            </a:xfrm>
+            <a:custGeom>
+              <a:avLst/>
+              <a:pathLst>
+                <a:path w="7660515" h="0">
+                  <a:moveTo>
+                    <a:pt x="0" y="0"/>
+                  </a:moveTo>
+                  <a:lnTo>
+                    <a:pt x="7660515" y="0"/>
+                  </a:lnTo>
+                  <a:lnTo>
+                    <a:pt x="7660515" y="0"/>
+                  </a:lnTo>
+                </a:path>
+              </a:pathLst>
+            </a:custGeom>
+            <a:ln w="6775" cap="flat">
+              <a:solidFill>
+                <a:srgbClr val="EBEBEB">
+                  <a:alpha val="100000"/>
+                </a:srgbClr>
+              </a:solidFill>
+              <a:prstDash val="solid"/>
+              <a:round/>
+            </a:ln>
+          </p:spPr>
+          <p:txBody>
+            <a:bodyPr/>
+            <a:lstStyle/>
+            <a:p/>
+          </p:txBody>
+        </p:sp>
+        <p:sp>
+          <p:nvSpPr>
+            <p:cNvPr id="45" name="pl45"/>
+            <p:cNvSpPr/>
+            <p:nvPr/>
+          </p:nvSpPr>
+          <p:spPr>
+            <a:xfrm>
+              <a:off x="887106" y="5144686"/>
+              <a:ext cx="7660515" cy="0"/>
+            </a:xfrm>
+            <a:custGeom>
+              <a:avLst/>
+              <a:pathLst>
+                <a:path w="7660515" h="0">
+                  <a:moveTo>
+                    <a:pt x="0" y="0"/>
+                  </a:moveTo>
+                  <a:lnTo>
+                    <a:pt x="7660515" y="0"/>
+                  </a:lnTo>
+                  <a:lnTo>
+                    <a:pt x="7660515" y="0"/>
+                  </a:lnTo>
+                </a:path>
+              </a:pathLst>
+            </a:custGeom>
+            <a:ln w="6775" cap="flat">
+              <a:solidFill>
+                <a:srgbClr val="EBEBEB">
+                  <a:alpha val="100000"/>
+                </a:srgbClr>
+              </a:solidFill>
+              <a:prstDash val="solid"/>
+              <a:round/>
+            </a:ln>
+          </p:spPr>
+          <p:txBody>
+            <a:bodyPr/>
+            <a:lstStyle/>
+            <a:p/>
+          </p:txBody>
+        </p:sp>
+        <p:sp>
+          <p:nvSpPr>
+            <p:cNvPr id="46" name="pl46"/>
+            <p:cNvSpPr/>
+            <p:nvPr/>
+          </p:nvSpPr>
+          <p:spPr>
+            <a:xfrm>
+              <a:off x="887106" y="4845352"/>
+              <a:ext cx="7660515" cy="0"/>
+            </a:xfrm>
+            <a:custGeom>
+              <a:avLst/>
+              <a:pathLst>
+                <a:path w="7660515" h="0">
+                  <a:moveTo>
+                    <a:pt x="0" y="0"/>
+                  </a:moveTo>
+                  <a:lnTo>
+                    <a:pt x="7660515" y="0"/>
+                  </a:lnTo>
+                  <a:lnTo>
+                    <a:pt x="7660515" y="0"/>
+                  </a:lnTo>
+                </a:path>
+              </a:pathLst>
+            </a:custGeom>
+            <a:ln w="6775" cap="flat">
+              <a:solidFill>
+                <a:srgbClr val="EBEBEB">
+                  <a:alpha val="100000"/>
+                </a:srgbClr>
+              </a:solidFill>
+              <a:prstDash val="solid"/>
+              <a:round/>
+            </a:ln>
+          </p:spPr>
+          <p:txBody>
+            <a:bodyPr/>
+            <a:lstStyle/>
+            <a:p/>
+          </p:txBody>
+        </p:sp>
+        <p:sp>
+          <p:nvSpPr>
+            <p:cNvPr id="47" name="pl47"/>
+            <p:cNvSpPr/>
+            <p:nvPr/>
+          </p:nvSpPr>
+          <p:spPr>
+            <a:xfrm>
+              <a:off x="887106" y="4546018"/>
+              <a:ext cx="7660515" cy="0"/>
+            </a:xfrm>
+            <a:custGeom>
+              <a:avLst/>
+              <a:pathLst>
+                <a:path w="7660515" h="0">
+                  <a:moveTo>
+                    <a:pt x="0" y="0"/>
+                  </a:moveTo>
+                  <a:lnTo>
+                    <a:pt x="7660515" y="0"/>
+                  </a:lnTo>
+                  <a:lnTo>
+                    <a:pt x="7660515" y="0"/>
+                  </a:lnTo>
+                </a:path>
+              </a:pathLst>
+            </a:custGeom>
+            <a:ln w="6775" cap="flat">
+              <a:solidFill>
+                <a:srgbClr val="EBEBEB">
+                  <a:alpha val="100000"/>
+                </a:srgbClr>
+              </a:solidFill>
+              <a:prstDash val="solid"/>
+              <a:round/>
+            </a:ln>
+          </p:spPr>
+          <p:txBody>
+            <a:bodyPr/>
+            <a:lstStyle/>
+            <a:p/>
+          </p:txBody>
+        </p:sp>
+        <p:sp>
+          <p:nvSpPr>
+            <p:cNvPr id="48" name="pl48"/>
+            <p:cNvSpPr/>
+            <p:nvPr/>
+          </p:nvSpPr>
+          <p:spPr>
+            <a:xfrm>
+              <a:off x="1675141" y="4336484"/>
+              <a:ext cx="0" cy="1317069"/>
+            </a:xfrm>
+            <a:custGeom>
+              <a:avLst/>
+              <a:pathLst>
+                <a:path w="0" h="1317069">
+                  <a:moveTo>
+                    <a:pt x="0" y="1317069"/>
+                  </a:moveTo>
+                  <a:lnTo>
+                    <a:pt x="0" y="0"/>
+                  </a:lnTo>
+                  <a:lnTo>
+                    <a:pt x="0" y="0"/>
+                  </a:lnTo>
+                </a:path>
+              </a:pathLst>
+            </a:custGeom>
+            <a:ln w="6775" cap="flat">
+              <a:solidFill>
+                <a:srgbClr val="EBEBEB">
+                  <a:alpha val="100000"/>
+                </a:srgbClr>
+              </a:solidFill>
+              <a:prstDash val="solid"/>
+              <a:round/>
+            </a:ln>
+          </p:spPr>
+          <p:txBody>
+            <a:bodyPr/>
+            <a:lstStyle/>
+            <a:p/>
+          </p:txBody>
+        </p:sp>
+        <p:sp>
+          <p:nvSpPr>
+            <p:cNvPr id="49" name="pl49"/>
+            <p:cNvSpPr/>
+            <p:nvPr/>
+          </p:nvSpPr>
+          <p:spPr>
+            <a:xfrm>
+              <a:off x="2535404" y="4336484"/>
+              <a:ext cx="0" cy="1317069"/>
+            </a:xfrm>
+            <a:custGeom>
+              <a:avLst/>
+              <a:pathLst>
+                <a:path w="0" h="1317069">
+                  <a:moveTo>
+                    <a:pt x="0" y="1317069"/>
+                  </a:moveTo>
+                  <a:lnTo>
+                    <a:pt x="0" y="0"/>
+                  </a:lnTo>
+                  <a:lnTo>
+                    <a:pt x="0" y="0"/>
+                  </a:lnTo>
+                </a:path>
+              </a:pathLst>
+            </a:custGeom>
+            <a:ln w="6775" cap="flat">
+              <a:solidFill>
+                <a:srgbClr val="EBEBEB">
+                  <a:alpha val="100000"/>
+                </a:srgbClr>
+              </a:solidFill>
+              <a:prstDash val="solid"/>
+              <a:round/>
+            </a:ln>
+          </p:spPr>
+          <p:txBody>
+            <a:bodyPr/>
+            <a:lstStyle/>
+            <a:p/>
+          </p:txBody>
+        </p:sp>
+        <p:sp>
+          <p:nvSpPr>
+            <p:cNvPr id="50" name="pl50"/>
+            <p:cNvSpPr/>
+            <p:nvPr/>
+          </p:nvSpPr>
+          <p:spPr>
+            <a:xfrm>
+              <a:off x="3395667" y="4336484"/>
+              <a:ext cx="0" cy="1317069"/>
+            </a:xfrm>
+            <a:custGeom>
+              <a:avLst/>
+              <a:pathLst>
+                <a:path w="0" h="1317069">
+                  <a:moveTo>
+                    <a:pt x="0" y="1317069"/>
+                  </a:moveTo>
+                  <a:lnTo>
+                    <a:pt x="0" y="0"/>
+                  </a:lnTo>
+                  <a:lnTo>
+                    <a:pt x="0" y="0"/>
+                  </a:lnTo>
+                </a:path>
+              </a:pathLst>
+            </a:custGeom>
+            <a:ln w="6775" cap="flat">
+              <a:solidFill>
+                <a:srgbClr val="EBEBEB">
+                  <a:alpha val="100000"/>
+                </a:srgbClr>
+              </a:solidFill>
+              <a:prstDash val="solid"/>
+              <a:round/>
+            </a:ln>
+          </p:spPr>
+          <p:txBody>
+            <a:bodyPr/>
+            <a:lstStyle/>
+            <a:p/>
+          </p:txBody>
+        </p:sp>
+        <p:sp>
+          <p:nvSpPr>
+            <p:cNvPr id="51" name="pl51"/>
+            <p:cNvSpPr/>
+            <p:nvPr/>
+          </p:nvSpPr>
+          <p:spPr>
+            <a:xfrm>
+              <a:off x="4255930" y="4336484"/>
+              <a:ext cx="0" cy="1317069"/>
+            </a:xfrm>
+            <a:custGeom>
+              <a:avLst/>
+              <a:pathLst>
+                <a:path w="0" h="1317069">
+                  <a:moveTo>
+                    <a:pt x="0" y="1317069"/>
+                  </a:moveTo>
+                  <a:lnTo>
+                    <a:pt x="0" y="0"/>
+                  </a:lnTo>
+                  <a:lnTo>
+                    <a:pt x="0" y="0"/>
+                  </a:lnTo>
+                </a:path>
+              </a:pathLst>
+            </a:custGeom>
+            <a:ln w="6775" cap="flat">
+              <a:solidFill>
+                <a:srgbClr val="EBEBEB">
+                  <a:alpha val="100000"/>
+                </a:srgbClr>
+              </a:solidFill>
+              <a:prstDash val="solid"/>
+              <a:round/>
+            </a:ln>
+          </p:spPr>
+          <p:txBody>
+            <a:bodyPr/>
+            <a:lstStyle/>
+            <a:p/>
+          </p:txBody>
+        </p:sp>
+        <p:sp>
+          <p:nvSpPr>
+            <p:cNvPr id="52" name="pl52"/>
+            <p:cNvSpPr/>
+            <p:nvPr/>
+          </p:nvSpPr>
+          <p:spPr>
+            <a:xfrm>
+              <a:off x="5116193" y="4336484"/>
+              <a:ext cx="0" cy="1317069"/>
+            </a:xfrm>
+            <a:custGeom>
+              <a:avLst/>
+              <a:pathLst>
+                <a:path w="0" h="1317069">
+                  <a:moveTo>
+                    <a:pt x="0" y="1317069"/>
+                  </a:moveTo>
+                  <a:lnTo>
+                    <a:pt x="0" y="0"/>
+                  </a:lnTo>
+                  <a:lnTo>
+                    <a:pt x="0" y="0"/>
+                  </a:lnTo>
+                </a:path>
+              </a:pathLst>
+            </a:custGeom>
+            <a:ln w="6775" cap="flat">
+              <a:solidFill>
+                <a:srgbClr val="EBEBEB">
+                  <a:alpha val="100000"/>
+                </a:srgbClr>
+              </a:solidFill>
+              <a:prstDash val="solid"/>
+              <a:round/>
+            </a:ln>
+          </p:spPr>
+          <p:txBody>
+            <a:bodyPr/>
+            <a:lstStyle/>
+            <a:p/>
+          </p:txBody>
+        </p:sp>
+        <p:sp>
+          <p:nvSpPr>
+            <p:cNvPr id="53" name="pl53"/>
+            <p:cNvSpPr/>
+            <p:nvPr/>
+          </p:nvSpPr>
+          <p:spPr>
+            <a:xfrm>
+              <a:off x="5976457" y="4336484"/>
+              <a:ext cx="0" cy="1317069"/>
+            </a:xfrm>
+            <a:custGeom>
+              <a:avLst/>
+              <a:pathLst>
+                <a:path w="0" h="1317069">
+                  <a:moveTo>
+                    <a:pt x="0" y="1317069"/>
+                  </a:moveTo>
+                  <a:lnTo>
+                    <a:pt x="0" y="0"/>
+                  </a:lnTo>
+                  <a:lnTo>
+                    <a:pt x="0" y="0"/>
+                  </a:lnTo>
+                </a:path>
+              </a:pathLst>
+            </a:custGeom>
+            <a:ln w="6775" cap="flat">
+              <a:solidFill>
+                <a:srgbClr val="EBEBEB">
+                  <a:alpha val="100000"/>
+                </a:srgbClr>
+              </a:solidFill>
+              <a:prstDash val="solid"/>
+              <a:round/>
+            </a:ln>
+          </p:spPr>
+          <p:txBody>
+            <a:bodyPr/>
+            <a:lstStyle/>
+            <a:p/>
+          </p:txBody>
+        </p:sp>
+        <p:sp>
+          <p:nvSpPr>
+            <p:cNvPr id="54" name="pl54"/>
+            <p:cNvSpPr/>
+            <p:nvPr/>
+          </p:nvSpPr>
+          <p:spPr>
+            <a:xfrm>
+              <a:off x="6836720" y="4336484"/>
+              <a:ext cx="0" cy="1317069"/>
+            </a:xfrm>
+            <a:custGeom>
+              <a:avLst/>
+              <a:pathLst>
+                <a:path w="0" h="1317069">
+                  <a:moveTo>
+                    <a:pt x="0" y="1317069"/>
+                  </a:moveTo>
+                  <a:lnTo>
+                    <a:pt x="0" y="0"/>
+                  </a:lnTo>
+                  <a:lnTo>
+                    <a:pt x="0" y="0"/>
+                  </a:lnTo>
+                </a:path>
+              </a:pathLst>
+            </a:custGeom>
+            <a:ln w="6775" cap="flat">
+              <a:solidFill>
+                <a:srgbClr val="EBEBEB">
+                  <a:alpha val="100000"/>
+                </a:srgbClr>
+              </a:solidFill>
+              <a:prstDash val="solid"/>
+              <a:round/>
+            </a:ln>
+          </p:spPr>
+          <p:txBody>
+            <a:bodyPr/>
+            <a:lstStyle/>
+            <a:p/>
+          </p:txBody>
+        </p:sp>
+        <p:sp>
+          <p:nvSpPr>
+            <p:cNvPr id="55" name="pl55"/>
+            <p:cNvSpPr/>
+            <p:nvPr/>
+          </p:nvSpPr>
+          <p:spPr>
+            <a:xfrm>
+              <a:off x="7696983" y="4336484"/>
+              <a:ext cx="0" cy="1317069"/>
+            </a:xfrm>
+            <a:custGeom>
+              <a:avLst/>
+              <a:pathLst>
+                <a:path w="0" h="1317069">
+                  <a:moveTo>
+                    <a:pt x="0" y="1317069"/>
+                  </a:moveTo>
+                  <a:lnTo>
+                    <a:pt x="0" y="0"/>
+                  </a:lnTo>
+                  <a:lnTo>
+                    <a:pt x="0" y="0"/>
+                  </a:lnTo>
+                </a:path>
+              </a:pathLst>
+            </a:custGeom>
+            <a:ln w="6775" cap="flat">
+              <a:solidFill>
+                <a:srgbClr val="EBEBEB">
+                  <a:alpha val="100000"/>
+                </a:srgbClr>
+              </a:solidFill>
+              <a:prstDash val="solid"/>
+              <a:round/>
+            </a:ln>
+          </p:spPr>
+          <p:txBody>
+            <a:bodyPr/>
+            <a:lstStyle/>
+            <a:p/>
+          </p:txBody>
+        </p:sp>
+        <p:sp>
+          <p:nvSpPr>
+            <p:cNvPr id="56" name="pl56"/>
+            <p:cNvSpPr/>
+            <p:nvPr/>
+          </p:nvSpPr>
+          <p:spPr>
+            <a:xfrm>
+              <a:off x="887106" y="5593686"/>
+              <a:ext cx="7660515" cy="0"/>
+            </a:xfrm>
+            <a:custGeom>
+              <a:avLst/>
+              <a:pathLst>
+                <a:path w="7660515" h="0">
+                  <a:moveTo>
+                    <a:pt x="0" y="0"/>
+                  </a:moveTo>
+                  <a:lnTo>
+                    <a:pt x="7660515" y="0"/>
+                  </a:lnTo>
+                  <a:lnTo>
+                    <a:pt x="7660515" y="0"/>
+                  </a:lnTo>
+                </a:path>
+              </a:pathLst>
+            </a:custGeom>
+            <a:ln w="13550" cap="flat">
+              <a:solidFill>
+                <a:srgbClr val="EBEBEB">
+                  <a:alpha val="100000"/>
+                </a:srgbClr>
+              </a:solidFill>
+              <a:prstDash val="solid"/>
+              <a:round/>
+            </a:ln>
+          </p:spPr>
+          <p:txBody>
+            <a:bodyPr/>
+            <a:lstStyle/>
+            <a:p/>
+          </p:txBody>
+        </p:sp>
+        <p:sp>
+          <p:nvSpPr>
+            <p:cNvPr id="57" name="pl57"/>
+            <p:cNvSpPr/>
+            <p:nvPr/>
+          </p:nvSpPr>
+          <p:spPr>
+            <a:xfrm>
+              <a:off x="887106" y="5294352"/>
+              <a:ext cx="7660515" cy="0"/>
+            </a:xfrm>
+            <a:custGeom>
+              <a:avLst/>
+              <a:pathLst>
+                <a:path w="7660515" h="0">
+                  <a:moveTo>
+                    <a:pt x="0" y="0"/>
+                  </a:moveTo>
+                  <a:lnTo>
+                    <a:pt x="7660515" y="0"/>
+                  </a:lnTo>
+                  <a:lnTo>
+                    <a:pt x="7660515" y="0"/>
+                  </a:lnTo>
+                </a:path>
+              </a:pathLst>
+            </a:custGeom>
+            <a:ln w="13550" cap="flat">
+              <a:solidFill>
+                <a:srgbClr val="EBEBEB">
+                  <a:alpha val="100000"/>
+                </a:srgbClr>
+              </a:solidFill>
+              <a:prstDash val="solid"/>
+              <a:round/>
+            </a:ln>
+          </p:spPr>
+          <p:txBody>
+            <a:bodyPr/>
+            <a:lstStyle/>
+            <a:p/>
+          </p:txBody>
+        </p:sp>
+        <p:sp>
+          <p:nvSpPr>
+            <p:cNvPr id="58" name="pl58"/>
+            <p:cNvSpPr/>
+            <p:nvPr/>
+          </p:nvSpPr>
+          <p:spPr>
+            <a:xfrm>
+              <a:off x="887106" y="4995019"/>
+              <a:ext cx="7660515" cy="0"/>
+            </a:xfrm>
+            <a:custGeom>
+              <a:avLst/>
+              <a:pathLst>
+                <a:path w="7660515" h="0">
+                  <a:moveTo>
+                    <a:pt x="0" y="0"/>
+                  </a:moveTo>
+                  <a:lnTo>
+                    <a:pt x="7660515" y="0"/>
+                  </a:lnTo>
+                  <a:lnTo>
+                    <a:pt x="7660515" y="0"/>
+                  </a:lnTo>
+                </a:path>
+              </a:pathLst>
+            </a:custGeom>
+            <a:ln w="13550" cap="flat">
+              <a:solidFill>
+                <a:srgbClr val="EBEBEB">
+                  <a:alpha val="100000"/>
+                </a:srgbClr>
+              </a:solidFill>
+              <a:prstDash val="solid"/>
+              <a:round/>
+            </a:ln>
+          </p:spPr>
+          <p:txBody>
+            <a:bodyPr/>
+            <a:lstStyle/>
+            <a:p/>
+          </p:txBody>
+        </p:sp>
+        <p:sp>
+          <p:nvSpPr>
+            <p:cNvPr id="59" name="pl59"/>
+            <p:cNvSpPr/>
+            <p:nvPr/>
+          </p:nvSpPr>
+          <p:spPr>
+            <a:xfrm>
+              <a:off x="887106" y="4695685"/>
+              <a:ext cx="7660515" cy="0"/>
+            </a:xfrm>
+            <a:custGeom>
+              <a:avLst/>
+              <a:pathLst>
+                <a:path w="7660515" h="0">
+                  <a:moveTo>
+                    <a:pt x="0" y="0"/>
+                  </a:moveTo>
+                  <a:lnTo>
+                    <a:pt x="7660515" y="0"/>
+                  </a:lnTo>
+                  <a:lnTo>
+                    <a:pt x="7660515" y="0"/>
+                  </a:lnTo>
+                </a:path>
+              </a:pathLst>
+            </a:custGeom>
+            <a:ln w="13550" cap="flat">
+              <a:solidFill>
+                <a:srgbClr val="EBEBEB">
+                  <a:alpha val="100000"/>
+                </a:srgbClr>
+              </a:solidFill>
+              <a:prstDash val="solid"/>
+              <a:round/>
+            </a:ln>
+          </p:spPr>
+          <p:txBody>
+            <a:bodyPr/>
+            <a:lstStyle/>
+            <a:p/>
+          </p:txBody>
+        </p:sp>
+        <p:sp>
+          <p:nvSpPr>
+            <p:cNvPr id="60" name="pl60"/>
+            <p:cNvSpPr/>
+            <p:nvPr/>
+          </p:nvSpPr>
+          <p:spPr>
+            <a:xfrm>
+              <a:off x="887106" y="4396351"/>
+              <a:ext cx="7660515" cy="0"/>
+            </a:xfrm>
+            <a:custGeom>
+              <a:avLst/>
+              <a:pathLst>
+                <a:path w="7660515" h="0">
+                  <a:moveTo>
+                    <a:pt x="0" y="0"/>
+                  </a:moveTo>
+                  <a:lnTo>
+                    <a:pt x="7660515" y="0"/>
+                  </a:lnTo>
+                  <a:lnTo>
+                    <a:pt x="7660515" y="0"/>
+                  </a:lnTo>
+                </a:path>
+              </a:pathLst>
+            </a:custGeom>
+            <a:ln w="13550" cap="flat">
+              <a:solidFill>
+                <a:srgbClr val="EBEBEB">
+                  <a:alpha val="100000"/>
+                </a:srgbClr>
+              </a:solidFill>
+              <a:prstDash val="solid"/>
+              <a:round/>
+            </a:ln>
+          </p:spPr>
+          <p:txBody>
+            <a:bodyPr/>
+            <a:lstStyle/>
+            <a:p/>
+          </p:txBody>
+        </p:sp>
+        <p:sp>
+          <p:nvSpPr>
+            <p:cNvPr id="61" name="pl61"/>
+            <p:cNvSpPr/>
+            <p:nvPr/>
+          </p:nvSpPr>
+          <p:spPr>
+            <a:xfrm>
+              <a:off x="1245010" y="4336484"/>
+              <a:ext cx="0" cy="1317069"/>
+            </a:xfrm>
+            <a:custGeom>
+              <a:avLst/>
+              <a:pathLst>
+                <a:path w="0" h="1317069">
+                  <a:moveTo>
+                    <a:pt x="0" y="1317069"/>
+                  </a:moveTo>
+                  <a:lnTo>
+                    <a:pt x="0" y="0"/>
+                  </a:lnTo>
+                  <a:lnTo>
+                    <a:pt x="0" y="0"/>
+                  </a:lnTo>
+                </a:path>
+              </a:pathLst>
+            </a:custGeom>
+            <a:ln w="13550" cap="flat">
+              <a:solidFill>
+                <a:srgbClr val="EBEBEB">
+                  <a:alpha val="100000"/>
+                </a:srgbClr>
+              </a:solidFill>
+              <a:prstDash val="solid"/>
+              <a:round/>
+            </a:ln>
+          </p:spPr>
+          <p:txBody>
+            <a:bodyPr/>
+            <a:lstStyle/>
+            <a:p/>
+          </p:txBody>
+        </p:sp>
+        <p:sp>
+          <p:nvSpPr>
+            <p:cNvPr id="62" name="pl62"/>
+            <p:cNvSpPr/>
+            <p:nvPr/>
+          </p:nvSpPr>
+          <p:spPr>
+            <a:xfrm>
+              <a:off x="2105273" y="4336484"/>
+              <a:ext cx="0" cy="1317069"/>
+            </a:xfrm>
+            <a:custGeom>
+              <a:avLst/>
+              <a:pathLst>
+                <a:path w="0" h="1317069">
+                  <a:moveTo>
+                    <a:pt x="0" y="1317069"/>
+                  </a:moveTo>
+                  <a:lnTo>
+                    <a:pt x="0" y="0"/>
+                  </a:lnTo>
+                  <a:lnTo>
+                    <a:pt x="0" y="0"/>
+                  </a:lnTo>
+                </a:path>
+              </a:pathLst>
+            </a:custGeom>
+            <a:ln w="13550" cap="flat">
+              <a:solidFill>
+                <a:srgbClr val="EBEBEB">
+                  <a:alpha val="100000"/>
+                </a:srgbClr>
+              </a:solidFill>
+              <a:prstDash val="solid"/>
+              <a:round/>
+            </a:ln>
+          </p:spPr>
+          <p:txBody>
+            <a:bodyPr/>
+            <a:lstStyle/>
+            <a:p/>
+          </p:txBody>
+        </p:sp>
+        <p:sp>
+          <p:nvSpPr>
+            <p:cNvPr id="63" name="pl63"/>
+            <p:cNvSpPr/>
+            <p:nvPr/>
+          </p:nvSpPr>
+          <p:spPr>
+            <a:xfrm>
+              <a:off x="2965536" y="4336484"/>
+              <a:ext cx="0" cy="1317069"/>
+            </a:xfrm>
+            <a:custGeom>
+              <a:avLst/>
+              <a:pathLst>
+                <a:path w="0" h="1317069">
+                  <a:moveTo>
+                    <a:pt x="0" y="1317069"/>
+                  </a:moveTo>
+                  <a:lnTo>
+                    <a:pt x="0" y="0"/>
+                  </a:lnTo>
+                  <a:lnTo>
+                    <a:pt x="0" y="0"/>
+                  </a:lnTo>
+                </a:path>
+              </a:pathLst>
+            </a:custGeom>
+            <a:ln w="13550" cap="flat">
+              <a:solidFill>
+                <a:srgbClr val="EBEBEB">
+                  <a:alpha val="100000"/>
+                </a:srgbClr>
+              </a:solidFill>
+              <a:prstDash val="solid"/>
+              <a:round/>
+            </a:ln>
+          </p:spPr>
+          <p:txBody>
+            <a:bodyPr/>
+            <a:lstStyle/>
+            <a:p/>
+          </p:txBody>
+        </p:sp>
+        <p:sp>
+          <p:nvSpPr>
+            <p:cNvPr id="64" name="pl64"/>
+            <p:cNvSpPr/>
+            <p:nvPr/>
+          </p:nvSpPr>
+          <p:spPr>
+            <a:xfrm>
+              <a:off x="3825799" y="4336484"/>
+              <a:ext cx="0" cy="1317069"/>
+            </a:xfrm>
+            <a:custGeom>
+              <a:avLst/>
+              <a:pathLst>
+                <a:path w="0" h="1317069">
+                  <a:moveTo>
+                    <a:pt x="0" y="1317069"/>
+                  </a:moveTo>
+                  <a:lnTo>
+                    <a:pt x="0" y="0"/>
+                  </a:lnTo>
+                  <a:lnTo>
+                    <a:pt x="0" y="0"/>
+                  </a:lnTo>
+                </a:path>
+              </a:pathLst>
+            </a:custGeom>
+            <a:ln w="13550" cap="flat">
+              <a:solidFill>
+                <a:srgbClr val="EBEBEB">
+                  <a:alpha val="100000"/>
+                </a:srgbClr>
+              </a:solidFill>
+              <a:prstDash val="solid"/>
+              <a:round/>
+            </a:ln>
+          </p:spPr>
+          <p:txBody>
+            <a:bodyPr/>
+            <a:lstStyle/>
+            <a:p/>
+          </p:txBody>
+        </p:sp>
+        <p:sp>
+          <p:nvSpPr>
+            <p:cNvPr id="65" name="pl65"/>
+            <p:cNvSpPr/>
+            <p:nvPr/>
+          </p:nvSpPr>
+          <p:spPr>
+            <a:xfrm>
+              <a:off x="4686062" y="4336484"/>
+              <a:ext cx="0" cy="1317069"/>
+            </a:xfrm>
+            <a:custGeom>
+              <a:avLst/>
+              <a:pathLst>
+                <a:path w="0" h="1317069">
+                  <a:moveTo>
+                    <a:pt x="0" y="1317069"/>
+                  </a:moveTo>
+                  <a:lnTo>
+                    <a:pt x="0" y="0"/>
+                  </a:lnTo>
+                  <a:lnTo>
+                    <a:pt x="0" y="0"/>
+                  </a:lnTo>
+                </a:path>
+              </a:pathLst>
+            </a:custGeom>
+            <a:ln w="13550" cap="flat">
+              <a:solidFill>
+                <a:srgbClr val="EBEBEB">
+                  <a:alpha val="100000"/>
+                </a:srgbClr>
+              </a:solidFill>
+              <a:prstDash val="solid"/>
+              <a:round/>
+            </a:ln>
+          </p:spPr>
+          <p:txBody>
+            <a:bodyPr/>
+            <a:lstStyle/>
+            <a:p/>
+          </p:txBody>
+        </p:sp>
+        <p:sp>
+          <p:nvSpPr>
+            <p:cNvPr id="66" name="pl66"/>
+            <p:cNvSpPr/>
+            <p:nvPr/>
+          </p:nvSpPr>
+          <p:spPr>
+            <a:xfrm>
+              <a:off x="5546325" y="4336484"/>
+              <a:ext cx="0" cy="1317069"/>
+            </a:xfrm>
+            <a:custGeom>
+              <a:avLst/>
+              <a:pathLst>
+                <a:path w="0" h="1317069">
+                  <a:moveTo>
+                    <a:pt x="0" y="1317069"/>
+                  </a:moveTo>
+                  <a:lnTo>
+                    <a:pt x="0" y="0"/>
+                  </a:lnTo>
+                  <a:lnTo>
+                    <a:pt x="0" y="0"/>
+                  </a:lnTo>
+                </a:path>
+              </a:pathLst>
+            </a:custGeom>
+            <a:ln w="13550" cap="flat">
+              <a:solidFill>
+                <a:srgbClr val="EBEBEB">
+                  <a:alpha val="100000"/>
+                </a:srgbClr>
+              </a:solidFill>
+              <a:prstDash val="solid"/>
+              <a:round/>
+            </a:ln>
+          </p:spPr>
+          <p:txBody>
+            <a:bodyPr/>
+            <a:lstStyle/>
+            <a:p/>
+          </p:txBody>
+        </p:sp>
+        <p:sp>
+          <p:nvSpPr>
+            <p:cNvPr id="67" name="pl67"/>
+            <p:cNvSpPr/>
+            <p:nvPr/>
+          </p:nvSpPr>
+          <p:spPr>
+            <a:xfrm>
+              <a:off x="6406588" y="4336484"/>
+              <a:ext cx="0" cy="1317069"/>
+            </a:xfrm>
+            <a:custGeom>
+              <a:avLst/>
+              <a:pathLst>
+                <a:path w="0" h="1317069">
+                  <a:moveTo>
+                    <a:pt x="0" y="1317069"/>
+                  </a:moveTo>
+                  <a:lnTo>
+                    <a:pt x="0" y="0"/>
+                  </a:lnTo>
+                  <a:lnTo>
+                    <a:pt x="0" y="0"/>
+                  </a:lnTo>
+                </a:path>
+              </a:pathLst>
+            </a:custGeom>
+            <a:ln w="13550" cap="flat">
+              <a:solidFill>
+                <a:srgbClr val="EBEBEB">
+                  <a:alpha val="100000"/>
+                </a:srgbClr>
+              </a:solidFill>
+              <a:prstDash val="solid"/>
+              <a:round/>
+            </a:ln>
+          </p:spPr>
+          <p:txBody>
+            <a:bodyPr/>
+            <a:lstStyle/>
+            <a:p/>
+          </p:txBody>
+        </p:sp>
+        <p:sp>
+          <p:nvSpPr>
+            <p:cNvPr id="68" name="pl68"/>
+            <p:cNvSpPr/>
+            <p:nvPr/>
+          </p:nvSpPr>
+          <p:spPr>
+            <a:xfrm>
+              <a:off x="7266851" y="4336484"/>
+              <a:ext cx="0" cy="1317069"/>
+            </a:xfrm>
+            <a:custGeom>
+              <a:avLst/>
+              <a:pathLst>
+                <a:path w="0" h="1317069">
+                  <a:moveTo>
+                    <a:pt x="0" y="1317069"/>
+                  </a:moveTo>
+                  <a:lnTo>
+                    <a:pt x="0" y="0"/>
+                  </a:lnTo>
+                  <a:lnTo>
+                    <a:pt x="0" y="0"/>
+                  </a:lnTo>
+                </a:path>
+              </a:pathLst>
+            </a:custGeom>
+            <a:ln w="13550" cap="flat">
+              <a:solidFill>
+                <a:srgbClr val="EBEBEB">
+                  <a:alpha val="100000"/>
+                </a:srgbClr>
+              </a:solidFill>
+              <a:prstDash val="solid"/>
+              <a:round/>
+            </a:ln>
+          </p:spPr>
+          <p:txBody>
+            <a:bodyPr/>
+            <a:lstStyle/>
+            <a:p/>
+          </p:txBody>
+        </p:sp>
+        <p:sp>
+          <p:nvSpPr>
+            <p:cNvPr id="69" name="pl69"/>
+            <p:cNvSpPr/>
+            <p:nvPr/>
+          </p:nvSpPr>
+          <p:spPr>
+            <a:xfrm>
+              <a:off x="8127114" y="4336484"/>
+              <a:ext cx="0" cy="1317069"/>
+            </a:xfrm>
+            <a:custGeom>
+              <a:avLst/>
+              <a:pathLst>
+                <a:path w="0" h="1317069">
+                  <a:moveTo>
+                    <a:pt x="0" y="1317069"/>
+                  </a:moveTo>
+                  <a:lnTo>
+                    <a:pt x="0" y="0"/>
+                  </a:lnTo>
+                  <a:lnTo>
+                    <a:pt x="0" y="0"/>
+                  </a:lnTo>
+                </a:path>
+              </a:pathLst>
+            </a:custGeom>
+            <a:ln w="13550" cap="flat">
+              <a:solidFill>
+                <a:srgbClr val="EBEBEB">
+                  <a:alpha val="100000"/>
+                </a:srgbClr>
+              </a:solidFill>
+              <a:prstDash val="solid"/>
+              <a:round/>
+            </a:ln>
+          </p:spPr>
+          <p:txBody>
+            <a:bodyPr/>
+            <a:lstStyle/>
+            <a:p/>
+          </p:txBody>
+        </p:sp>
+        <p:sp>
+          <p:nvSpPr>
+            <p:cNvPr id="70" name="pg70"/>
+            <p:cNvSpPr/>
+            <p:nvPr/>
+          </p:nvSpPr>
+          <p:spPr>
+            <a:xfrm>
+              <a:off x="1235312" y="4604755"/>
+              <a:ext cx="6964104" cy="928372"/>
+            </a:xfrm>
+            <a:custGeom>
+              <a:avLst/>
+              <a:pathLst>
+                <a:path w="6964104" h="928372">
+                  <a:moveTo>
+                    <a:pt x="0" y="0"/>
+                  </a:moveTo>
+                  <a:lnTo>
+                    <a:pt x="70344" y="27510"/>
+                  </a:lnTo>
+                  <a:lnTo>
+                    <a:pt x="140688" y="54254"/>
+                  </a:lnTo>
+                  <a:lnTo>
+                    <a:pt x="211033" y="80255"/>
+                  </a:lnTo>
+                  <a:lnTo>
+                    <a:pt x="281377" y="105533"/>
+                  </a:lnTo>
+                  <a:lnTo>
+                    <a:pt x="351722" y="130107"/>
+                  </a:lnTo>
+                  <a:lnTo>
+                    <a:pt x="422066" y="153998"/>
+                  </a:lnTo>
+                  <a:lnTo>
+                    <a:pt x="492411" y="177224"/>
+                  </a:lnTo>
+                  <a:lnTo>
+                    <a:pt x="562755" y="199804"/>
+                  </a:lnTo>
+                  <a:lnTo>
+                    <a:pt x="633100" y="221756"/>
+                  </a:lnTo>
+                  <a:lnTo>
+                    <a:pt x="703444" y="243097"/>
+                  </a:lnTo>
+                  <a:lnTo>
+                    <a:pt x="773789" y="263844"/>
+                  </a:lnTo>
+                  <a:lnTo>
+                    <a:pt x="844133" y="284015"/>
+                  </a:lnTo>
+                  <a:lnTo>
+                    <a:pt x="914478" y="303624"/>
+                  </a:lnTo>
+                  <a:lnTo>
+                    <a:pt x="984822" y="322688"/>
+                  </a:lnTo>
+                  <a:lnTo>
+                    <a:pt x="1055167" y="341221"/>
+                  </a:lnTo>
+                  <a:lnTo>
+                    <a:pt x="1125511" y="359239"/>
+                  </a:lnTo>
+                  <a:lnTo>
+                    <a:pt x="1195856" y="376756"/>
+                  </a:lnTo>
+                  <a:lnTo>
+                    <a:pt x="1266200" y="393786"/>
+                  </a:lnTo>
+                  <a:lnTo>
+                    <a:pt x="1336545" y="410341"/>
+                  </a:lnTo>
+                  <a:lnTo>
+                    <a:pt x="1406889" y="426436"/>
+                  </a:lnTo>
+                  <a:lnTo>
+                    <a:pt x="1477234" y="442084"/>
+                  </a:lnTo>
+                  <a:lnTo>
+                    <a:pt x="1547578" y="457296"/>
+                  </a:lnTo>
+                  <a:lnTo>
+                    <a:pt x="1617923" y="472085"/>
+                  </a:lnTo>
+                  <a:lnTo>
+                    <a:pt x="1688267" y="486463"/>
+                  </a:lnTo>
+                  <a:lnTo>
+                    <a:pt x="1758612" y="500440"/>
+                  </a:lnTo>
+                  <a:lnTo>
+                    <a:pt x="1828956" y="514029"/>
+                  </a:lnTo>
+                  <a:lnTo>
+                    <a:pt x="1899301" y="527240"/>
+                  </a:lnTo>
+                  <a:lnTo>
+                    <a:pt x="1969645" y="540083"/>
+                  </a:lnTo>
+                  <a:lnTo>
+                    <a:pt x="2039990" y="552569"/>
+                  </a:lnTo>
+                  <a:lnTo>
+                    <a:pt x="2110334" y="564708"/>
+                  </a:lnTo>
+                  <a:lnTo>
+                    <a:pt x="2180679" y="576509"/>
+                  </a:lnTo>
+                  <a:lnTo>
+                    <a:pt x="2251023" y="587982"/>
+                  </a:lnTo>
+                  <a:lnTo>
+                    <a:pt x="2321368" y="599135"/>
+                  </a:lnTo>
+                  <a:lnTo>
+                    <a:pt x="2391712" y="609978"/>
+                  </a:lnTo>
+                  <a:lnTo>
+                    <a:pt x="2462057" y="620520"/>
+                  </a:lnTo>
+                  <a:lnTo>
+                    <a:pt x="2532401" y="630769"/>
+                  </a:lnTo>
+                  <a:lnTo>
+                    <a:pt x="2602746" y="640732"/>
+                  </a:lnTo>
+                  <a:lnTo>
+                    <a:pt x="2673090" y="650418"/>
+                  </a:lnTo>
+                  <a:lnTo>
+                    <a:pt x="2743435" y="659835"/>
+                  </a:lnTo>
+                  <a:lnTo>
+                    <a:pt x="2813779" y="668990"/>
+                  </a:lnTo>
+                  <a:lnTo>
+                    <a:pt x="2884124" y="677890"/>
+                  </a:lnTo>
+                  <a:lnTo>
+                    <a:pt x="2954468" y="686542"/>
+                  </a:lnTo>
+                  <a:lnTo>
+                    <a:pt x="3024813" y="690894"/>
+                  </a:lnTo>
+                  <a:lnTo>
+                    <a:pt x="3095157" y="692909"/>
+                  </a:lnTo>
+                  <a:lnTo>
+                    <a:pt x="3165502" y="694911"/>
+                  </a:lnTo>
+                  <a:lnTo>
+                    <a:pt x="3235846" y="696898"/>
+                  </a:lnTo>
+                  <a:lnTo>
+                    <a:pt x="3306191" y="698873"/>
+                  </a:lnTo>
+                  <a:lnTo>
+                    <a:pt x="3376535" y="700834"/>
+                  </a:lnTo>
+                  <a:lnTo>
+                    <a:pt x="3446880" y="702782"/>
+                  </a:lnTo>
+                  <a:lnTo>
+                    <a:pt x="3517224" y="704716"/>
+                  </a:lnTo>
+                  <a:lnTo>
+                    <a:pt x="3587569" y="706638"/>
+                  </a:lnTo>
+                  <a:lnTo>
+                    <a:pt x="3657913" y="708546"/>
+                  </a:lnTo>
+                  <a:lnTo>
+                    <a:pt x="3728257" y="710442"/>
+                  </a:lnTo>
+                  <a:lnTo>
+                    <a:pt x="3798602" y="712325"/>
+                  </a:lnTo>
+                  <a:lnTo>
+                    <a:pt x="3868946" y="714195"/>
+                  </a:lnTo>
+                  <a:lnTo>
+                    <a:pt x="3939291" y="716052"/>
+                  </a:lnTo>
+                  <a:lnTo>
+                    <a:pt x="4009635" y="717897"/>
+                  </a:lnTo>
+                  <a:lnTo>
+                    <a:pt x="4079980" y="719730"/>
+                  </a:lnTo>
+                  <a:lnTo>
+                    <a:pt x="4150324" y="721550"/>
+                  </a:lnTo>
+                  <a:lnTo>
+                    <a:pt x="4220669" y="723357"/>
+                  </a:lnTo>
+                  <a:lnTo>
+                    <a:pt x="4291013" y="725153"/>
+                  </a:lnTo>
+                  <a:lnTo>
+                    <a:pt x="4361358" y="726936"/>
+                  </a:lnTo>
+                  <a:lnTo>
+                    <a:pt x="4431702" y="728708"/>
+                  </a:lnTo>
+                  <a:lnTo>
+                    <a:pt x="4502047" y="730467"/>
+                  </a:lnTo>
+                  <a:lnTo>
+                    <a:pt x="4572391" y="732214"/>
+                  </a:lnTo>
+                  <a:lnTo>
+                    <a:pt x="4642736" y="733950"/>
+                  </a:lnTo>
+                  <a:lnTo>
+                    <a:pt x="4713080" y="735674"/>
+                  </a:lnTo>
+                  <a:lnTo>
+                    <a:pt x="4783425" y="737386"/>
+                  </a:lnTo>
+                  <a:lnTo>
+                    <a:pt x="4853769" y="739087"/>
+                  </a:lnTo>
+                  <a:lnTo>
+                    <a:pt x="4924114" y="740776"/>
+                  </a:lnTo>
+                  <a:lnTo>
+                    <a:pt x="4994458" y="742454"/>
+                  </a:lnTo>
+                  <a:lnTo>
+                    <a:pt x="5064803" y="744120"/>
+                  </a:lnTo>
+                  <a:lnTo>
+                    <a:pt x="5135147" y="745775"/>
+                  </a:lnTo>
+                  <a:lnTo>
+                    <a:pt x="5205492" y="747419"/>
+                  </a:lnTo>
+                  <a:lnTo>
+                    <a:pt x="5275836" y="749052"/>
+                  </a:lnTo>
+                  <a:lnTo>
+                    <a:pt x="5346181" y="750674"/>
+                  </a:lnTo>
+                  <a:lnTo>
+                    <a:pt x="5416525" y="752284"/>
+                  </a:lnTo>
+                  <a:lnTo>
+                    <a:pt x="5486870" y="753884"/>
+                  </a:lnTo>
+                  <a:lnTo>
+                    <a:pt x="5557214" y="755473"/>
+                  </a:lnTo>
+                  <a:lnTo>
+                    <a:pt x="5627559" y="757052"/>
+                  </a:lnTo>
+                  <a:lnTo>
+                    <a:pt x="5697903" y="758620"/>
+                  </a:lnTo>
+                  <a:lnTo>
+                    <a:pt x="5768248" y="760177"/>
+                  </a:lnTo>
+                  <a:lnTo>
+                    <a:pt x="5838592" y="761723"/>
+                  </a:lnTo>
+                  <a:lnTo>
+                    <a:pt x="5908937" y="763259"/>
+                  </a:lnTo>
+                  <a:lnTo>
+                    <a:pt x="5979281" y="764785"/>
+                  </a:lnTo>
+                  <a:lnTo>
+                    <a:pt x="6049626" y="766300"/>
+                  </a:lnTo>
+                  <a:lnTo>
+                    <a:pt x="6119970" y="767806"/>
+                  </a:lnTo>
+                  <a:lnTo>
+                    <a:pt x="6190315" y="769301"/>
+                  </a:lnTo>
+                  <a:lnTo>
+                    <a:pt x="6260659" y="770786"/>
+                  </a:lnTo>
+                  <a:lnTo>
+                    <a:pt x="6331004" y="772260"/>
+                  </a:lnTo>
+                  <a:lnTo>
+                    <a:pt x="6401348" y="773725"/>
+                  </a:lnTo>
+                  <a:lnTo>
+                    <a:pt x="6471693" y="775180"/>
+                  </a:lnTo>
+                  <a:lnTo>
+                    <a:pt x="6542037" y="776625"/>
+                  </a:lnTo>
+                  <a:lnTo>
+                    <a:pt x="6612382" y="778061"/>
+                  </a:lnTo>
+                  <a:lnTo>
+                    <a:pt x="6682726" y="779486"/>
+                  </a:lnTo>
+                  <a:lnTo>
+                    <a:pt x="6753071" y="780902"/>
+                  </a:lnTo>
+                  <a:lnTo>
+                    <a:pt x="6823415" y="782309"/>
+                  </a:lnTo>
+                  <a:lnTo>
+                    <a:pt x="6893760" y="783706"/>
+                  </a:lnTo>
+                  <a:lnTo>
+                    <a:pt x="6964104" y="785093"/>
+                  </a:lnTo>
+                  <a:lnTo>
+                    <a:pt x="6964104" y="928372"/>
+                  </a:lnTo>
+                  <a:lnTo>
+                    <a:pt x="6893760" y="926639"/>
+                  </a:lnTo>
+                  <a:lnTo>
+                    <a:pt x="6823415" y="924857"/>
+                  </a:lnTo>
+                  <a:lnTo>
+                    <a:pt x="6753071" y="923023"/>
+                  </a:lnTo>
+                  <a:lnTo>
+                    <a:pt x="6682726" y="921138"/>
+                  </a:lnTo>
+                  <a:lnTo>
+                    <a:pt x="6612382" y="919198"/>
+                  </a:lnTo>
+                  <a:lnTo>
+                    <a:pt x="6542037" y="917202"/>
+                  </a:lnTo>
+                  <a:lnTo>
+                    <a:pt x="6471693" y="915150"/>
+                  </a:lnTo>
+                  <a:lnTo>
+                    <a:pt x="6401348" y="913039"/>
+                  </a:lnTo>
+                  <a:lnTo>
+                    <a:pt x="6331004" y="910867"/>
+                  </a:lnTo>
+                  <a:lnTo>
+                    <a:pt x="6260659" y="908633"/>
+                  </a:lnTo>
+                  <a:lnTo>
+                    <a:pt x="6190315" y="906336"/>
+                  </a:lnTo>
+                  <a:lnTo>
+                    <a:pt x="6119970" y="903972"/>
+                  </a:lnTo>
+                  <a:lnTo>
+                    <a:pt x="6049626" y="901541"/>
+                  </a:lnTo>
+                  <a:lnTo>
+                    <a:pt x="5979281" y="899041"/>
+                  </a:lnTo>
+                  <a:lnTo>
+                    <a:pt x="5908937" y="896469"/>
+                  </a:lnTo>
+                  <a:lnTo>
+                    <a:pt x="5838592" y="893823"/>
+                  </a:lnTo>
+                  <a:lnTo>
+                    <a:pt x="5768248" y="891102"/>
+                  </a:lnTo>
+                  <a:lnTo>
+                    <a:pt x="5697903" y="888302"/>
+                  </a:lnTo>
+                  <a:lnTo>
+                    <a:pt x="5627559" y="885423"/>
+                  </a:lnTo>
+                  <a:lnTo>
+                    <a:pt x="5557214" y="882461"/>
+                  </a:lnTo>
+                  <a:lnTo>
+                    <a:pt x="5486870" y="879415"/>
+                  </a:lnTo>
+                  <a:lnTo>
+                    <a:pt x="5416525" y="876281"/>
+                  </a:lnTo>
+                  <a:lnTo>
+                    <a:pt x="5346181" y="873058"/>
+                  </a:lnTo>
+                  <a:lnTo>
+                    <a:pt x="5275836" y="869742"/>
+                  </a:lnTo>
+                  <a:lnTo>
+                    <a:pt x="5205492" y="866331"/>
+                  </a:lnTo>
+                  <a:lnTo>
+                    <a:pt x="5135147" y="862823"/>
+                  </a:lnTo>
+                  <a:lnTo>
+                    <a:pt x="5064803" y="859215"/>
+                  </a:lnTo>
+                  <a:lnTo>
+                    <a:pt x="4994458" y="855503"/>
+                  </a:lnTo>
+                  <a:lnTo>
+                    <a:pt x="4924114" y="851685"/>
+                  </a:lnTo>
+                  <a:lnTo>
+                    <a:pt x="4853769" y="847758"/>
+                  </a:lnTo>
+                  <a:lnTo>
+                    <a:pt x="4783425" y="843719"/>
+                  </a:lnTo>
+                  <a:lnTo>
+                    <a:pt x="4713080" y="839564"/>
+                  </a:lnTo>
+                  <a:lnTo>
+                    <a:pt x="4642736" y="835290"/>
+                  </a:lnTo>
+                  <a:lnTo>
+                    <a:pt x="4572391" y="830893"/>
+                  </a:lnTo>
+                  <a:lnTo>
+                    <a:pt x="4502047" y="826371"/>
+                  </a:lnTo>
+                  <a:lnTo>
+                    <a:pt x="4431702" y="821720"/>
+                  </a:lnTo>
+                  <a:lnTo>
+                    <a:pt x="4361358" y="816935"/>
+                  </a:lnTo>
+                  <a:lnTo>
+                    <a:pt x="4291013" y="812014"/>
+                  </a:lnTo>
+                  <a:lnTo>
+                    <a:pt x="4220669" y="806952"/>
+                  </a:lnTo>
+                  <a:lnTo>
+                    <a:pt x="4150324" y="801744"/>
+                  </a:lnTo>
+                  <a:lnTo>
+                    <a:pt x="4079980" y="796388"/>
+                  </a:lnTo>
+                  <a:lnTo>
+                    <a:pt x="4009635" y="790879"/>
+                  </a:lnTo>
+                  <a:lnTo>
+                    <a:pt x="3939291" y="785212"/>
+                  </a:lnTo>
+                  <a:lnTo>
+                    <a:pt x="3868946" y="779383"/>
+                  </a:lnTo>
+                  <a:lnTo>
+                    <a:pt x="3798602" y="773387"/>
+                  </a:lnTo>
+                  <a:lnTo>
+                    <a:pt x="3728257" y="767219"/>
+                  </a:lnTo>
+                  <a:lnTo>
+                    <a:pt x="3657913" y="760875"/>
+                  </a:lnTo>
+                  <a:lnTo>
+                    <a:pt x="3587569" y="754349"/>
+                  </a:lnTo>
+                  <a:lnTo>
+                    <a:pt x="3517224" y="747637"/>
+                  </a:lnTo>
+                  <a:lnTo>
+                    <a:pt x="3446880" y="740733"/>
+                  </a:lnTo>
+                  <a:lnTo>
+                    <a:pt x="3376535" y="733631"/>
+                  </a:lnTo>
+                  <a:lnTo>
+                    <a:pt x="3306191" y="726326"/>
+                  </a:lnTo>
+                  <a:lnTo>
+                    <a:pt x="3235846" y="718811"/>
+                  </a:lnTo>
+                  <a:lnTo>
+                    <a:pt x="3165502" y="711082"/>
+                  </a:lnTo>
+                  <a:lnTo>
+                    <a:pt x="3095157" y="703132"/>
+                  </a:lnTo>
+                  <a:lnTo>
+                    <a:pt x="3024813" y="694954"/>
+                  </a:lnTo>
+                  <a:lnTo>
+                    <a:pt x="2954468" y="688866"/>
+                  </a:lnTo>
+                  <a:lnTo>
+                    <a:pt x="2884124" y="686823"/>
+                  </a:lnTo>
+                  <a:lnTo>
+                    <a:pt x="2813779" y="684767"/>
+                  </a:lnTo>
+                  <a:lnTo>
+                    <a:pt x="2743435" y="682696"/>
+                  </a:lnTo>
+                  <a:lnTo>
+                    <a:pt x="2673090" y="680612"/>
+                  </a:lnTo>
+                  <a:lnTo>
+                    <a:pt x="2602746" y="678513"/>
+                  </a:lnTo>
+                  <a:lnTo>
+                    <a:pt x="2532401" y="676400"/>
+                  </a:lnTo>
+                  <a:lnTo>
+                    <a:pt x="2462057" y="674273"/>
+                  </a:lnTo>
+                  <a:lnTo>
+                    <a:pt x="2391712" y="672131"/>
+                  </a:lnTo>
+                  <a:lnTo>
+                    <a:pt x="2321368" y="669974"/>
+                  </a:lnTo>
+                  <a:lnTo>
+                    <a:pt x="2251023" y="667803"/>
+                  </a:lnTo>
+                  <a:lnTo>
+                    <a:pt x="2180679" y="665618"/>
+                  </a:lnTo>
+                  <a:lnTo>
+                    <a:pt x="2110334" y="663417"/>
+                  </a:lnTo>
+                  <a:lnTo>
+                    <a:pt x="2039990" y="661201"/>
+                  </a:lnTo>
+                  <a:lnTo>
+                    <a:pt x="1969645" y="658970"/>
+                  </a:lnTo>
+                  <a:lnTo>
+                    <a:pt x="1899301" y="656724"/>
+                  </a:lnTo>
+                  <a:lnTo>
+                    <a:pt x="1828956" y="654463"/>
+                  </a:lnTo>
+                  <a:lnTo>
+                    <a:pt x="1758612" y="652186"/>
+                  </a:lnTo>
+                  <a:lnTo>
+                    <a:pt x="1688267" y="649894"/>
+                  </a:lnTo>
+                  <a:lnTo>
+                    <a:pt x="1617923" y="647586"/>
+                  </a:lnTo>
+                  <a:lnTo>
+                    <a:pt x="1547578" y="645263"/>
+                  </a:lnTo>
+                  <a:lnTo>
+                    <a:pt x="1477234" y="642924"/>
+                  </a:lnTo>
+                  <a:lnTo>
+                    <a:pt x="1406889" y="640568"/>
+                  </a:lnTo>
+                  <a:lnTo>
+                    <a:pt x="1336545" y="638197"/>
+                  </a:lnTo>
+                  <a:lnTo>
+                    <a:pt x="1266200" y="635810"/>
+                  </a:lnTo>
+                  <a:lnTo>
+                    <a:pt x="1195856" y="633406"/>
+                  </a:lnTo>
+                  <a:lnTo>
+                    <a:pt x="1125511" y="630986"/>
+                  </a:lnTo>
+                  <a:lnTo>
+                    <a:pt x="1055167" y="628550"/>
+                  </a:lnTo>
+                  <a:lnTo>
+                    <a:pt x="984822" y="626096"/>
+                  </a:lnTo>
+                  <a:lnTo>
+                    <a:pt x="914478" y="623627"/>
+                  </a:lnTo>
+                  <a:lnTo>
+                    <a:pt x="844133" y="621140"/>
+                  </a:lnTo>
+                  <a:lnTo>
+                    <a:pt x="773789" y="618637"/>
+                  </a:lnTo>
+                  <a:lnTo>
+                    <a:pt x="703444" y="616116"/>
+                  </a:lnTo>
+                  <a:lnTo>
+                    <a:pt x="633100" y="613578"/>
+                  </a:lnTo>
+                  <a:lnTo>
+                    <a:pt x="562755" y="611023"/>
+                  </a:lnTo>
+                  <a:lnTo>
+                    <a:pt x="492411" y="608451"/>
+                  </a:lnTo>
+                  <a:lnTo>
+                    <a:pt x="422066" y="605861"/>
+                  </a:lnTo>
+                  <a:lnTo>
+                    <a:pt x="351722" y="603254"/>
+                  </a:lnTo>
+                  <a:lnTo>
+                    <a:pt x="281377" y="600628"/>
+                  </a:lnTo>
+                  <a:lnTo>
+                    <a:pt x="211033" y="597985"/>
+                  </a:lnTo>
+                  <a:lnTo>
+                    <a:pt x="140688" y="595324"/>
+                  </a:lnTo>
+                  <a:lnTo>
+                    <a:pt x="70344" y="592645"/>
+                  </a:lnTo>
+                  <a:lnTo>
+                    <a:pt x="0" y="589948"/>
+                  </a:lnTo>
+                  <a:close/>
+                </a:path>
+              </a:pathLst>
+            </a:custGeom>
+            <a:solidFill>
+              <a:srgbClr val="FF8C00">
+                <a:alpha val="20000"/>
+              </a:srgbClr>
+            </a:solidFill>
+          </p:spPr>
+          <p:txBody>
+            <a:bodyPr/>
+            <a:lstStyle/>
+            <a:p/>
+          </p:txBody>
+        </p:sp>
+        <p:sp>
+          <p:nvSpPr>
+            <p:cNvPr id="71" name="pl71"/>
+            <p:cNvSpPr/>
+            <p:nvPr/>
+          </p:nvSpPr>
+          <p:spPr>
+            <a:xfrm>
+              <a:off x="1235312" y="4604755"/>
+              <a:ext cx="6964104" cy="785093"/>
+            </a:xfrm>
+            <a:custGeom>
+              <a:avLst/>
+              <a:pathLst>
+                <a:path w="6964104" h="785093">
+                  <a:moveTo>
+                    <a:pt x="0" y="0"/>
+                  </a:moveTo>
+                  <a:lnTo>
+                    <a:pt x="70344" y="27510"/>
+                  </a:lnTo>
+                  <a:lnTo>
+                    <a:pt x="140688" y="54254"/>
+                  </a:lnTo>
+                  <a:lnTo>
+                    <a:pt x="211033" y="80255"/>
+                  </a:lnTo>
+                  <a:lnTo>
+                    <a:pt x="281377" y="105533"/>
+                  </a:lnTo>
+                  <a:lnTo>
+                    <a:pt x="351722" y="130107"/>
+                  </a:lnTo>
+                  <a:lnTo>
+                    <a:pt x="422066" y="153998"/>
+                  </a:lnTo>
+                  <a:lnTo>
+                    <a:pt x="492411" y="177224"/>
+                  </a:lnTo>
+                  <a:lnTo>
+                    <a:pt x="562755" y="199804"/>
+                  </a:lnTo>
+                  <a:lnTo>
+                    <a:pt x="633100" y="221756"/>
+                  </a:lnTo>
+                  <a:lnTo>
+                    <a:pt x="703444" y="243097"/>
+                  </a:lnTo>
+                  <a:lnTo>
+                    <a:pt x="773789" y="263844"/>
+                  </a:lnTo>
+                  <a:lnTo>
+                    <a:pt x="844133" y="284015"/>
+                  </a:lnTo>
+                  <a:lnTo>
+                    <a:pt x="914478" y="303624"/>
+                  </a:lnTo>
+                  <a:lnTo>
+                    <a:pt x="984822" y="322688"/>
+                  </a:lnTo>
+                  <a:lnTo>
+                    <a:pt x="1055167" y="341221"/>
+                  </a:lnTo>
+                  <a:lnTo>
+                    <a:pt x="1125511" y="359239"/>
+                  </a:lnTo>
+                  <a:lnTo>
+                    <a:pt x="1195856" y="376756"/>
+                  </a:lnTo>
+                  <a:lnTo>
+                    <a:pt x="1266200" y="393786"/>
+                  </a:lnTo>
+                  <a:lnTo>
+                    <a:pt x="1336545" y="410341"/>
+                  </a:lnTo>
+                  <a:lnTo>
+                    <a:pt x="1406889" y="426436"/>
+                  </a:lnTo>
+                  <a:lnTo>
+                    <a:pt x="1477234" y="442084"/>
+                  </a:lnTo>
+                  <a:lnTo>
+                    <a:pt x="1547578" y="457296"/>
+                  </a:lnTo>
+                  <a:lnTo>
+                    <a:pt x="1617923" y="472085"/>
+                  </a:lnTo>
+                  <a:lnTo>
+                    <a:pt x="1688267" y="486463"/>
+                  </a:lnTo>
+                  <a:lnTo>
+                    <a:pt x="1758612" y="500440"/>
+                  </a:lnTo>
+                  <a:lnTo>
+                    <a:pt x="1828956" y="514029"/>
+                  </a:lnTo>
+                  <a:lnTo>
+                    <a:pt x="1899301" y="527240"/>
+                  </a:lnTo>
+                  <a:lnTo>
+                    <a:pt x="1969645" y="540083"/>
+                  </a:lnTo>
+                  <a:lnTo>
+                    <a:pt x="2039990" y="552569"/>
+                  </a:lnTo>
+                  <a:lnTo>
+                    <a:pt x="2110334" y="564708"/>
+                  </a:lnTo>
+                  <a:lnTo>
+                    <a:pt x="2180679" y="576509"/>
+                  </a:lnTo>
+                  <a:lnTo>
+                    <a:pt x="2251023" y="587982"/>
+                  </a:lnTo>
+                  <a:lnTo>
+                    <a:pt x="2321368" y="599135"/>
+                  </a:lnTo>
+                  <a:lnTo>
+                    <a:pt x="2391712" y="609978"/>
+                  </a:lnTo>
+                  <a:lnTo>
+                    <a:pt x="2462057" y="620520"/>
+                  </a:lnTo>
+                  <a:lnTo>
+                    <a:pt x="2532401" y="630769"/>
+                  </a:lnTo>
+                  <a:lnTo>
+                    <a:pt x="2602746" y="640732"/>
+                  </a:lnTo>
+                  <a:lnTo>
+                    <a:pt x="2673090" y="650418"/>
+                  </a:lnTo>
+                  <a:lnTo>
+                    <a:pt x="2743435" y="659835"/>
+                  </a:lnTo>
+                  <a:lnTo>
+                    <a:pt x="2813779" y="668990"/>
+                  </a:lnTo>
+                  <a:lnTo>
+                    <a:pt x="2884124" y="677890"/>
+                  </a:lnTo>
+                  <a:lnTo>
+                    <a:pt x="2954468" y="686542"/>
+                  </a:lnTo>
+                  <a:lnTo>
+                    <a:pt x="3024813" y="690894"/>
+                  </a:lnTo>
+                  <a:lnTo>
+                    <a:pt x="3095157" y="692909"/>
+                  </a:lnTo>
+                  <a:lnTo>
+                    <a:pt x="3165502" y="694911"/>
+                  </a:lnTo>
+                  <a:lnTo>
+                    <a:pt x="3235846" y="696898"/>
+                  </a:lnTo>
+                  <a:lnTo>
+                    <a:pt x="3306191" y="698873"/>
+                  </a:lnTo>
+                  <a:lnTo>
+                    <a:pt x="3376535" y="700834"/>
+                  </a:lnTo>
+                  <a:lnTo>
+                    <a:pt x="3446880" y="702782"/>
+                  </a:lnTo>
+                  <a:lnTo>
+                    <a:pt x="3517224" y="704716"/>
+                  </a:lnTo>
+                  <a:lnTo>
+                    <a:pt x="3587569" y="706638"/>
+                  </a:lnTo>
+                  <a:lnTo>
+                    <a:pt x="3657913" y="708546"/>
+                  </a:lnTo>
+                  <a:lnTo>
+                    <a:pt x="3728257" y="710442"/>
+                  </a:lnTo>
+                  <a:lnTo>
+                    <a:pt x="3798602" y="712325"/>
+                  </a:lnTo>
+                  <a:lnTo>
+                    <a:pt x="3868946" y="714195"/>
+                  </a:lnTo>
+                  <a:lnTo>
+                    <a:pt x="3939291" y="716052"/>
+                  </a:lnTo>
+                  <a:lnTo>
+                    <a:pt x="4009635" y="717897"/>
+                  </a:lnTo>
+                  <a:lnTo>
+                    <a:pt x="4079980" y="719730"/>
+                  </a:lnTo>
+                  <a:lnTo>
+                    <a:pt x="4150324" y="721550"/>
+                  </a:lnTo>
+                  <a:lnTo>
+                    <a:pt x="4220669" y="723357"/>
+                  </a:lnTo>
+                  <a:lnTo>
+                    <a:pt x="4291013" y="725153"/>
+                  </a:lnTo>
+                  <a:lnTo>
+                    <a:pt x="4361358" y="726936"/>
+                  </a:lnTo>
+                  <a:lnTo>
+                    <a:pt x="4431702" y="728708"/>
+                  </a:lnTo>
+                  <a:lnTo>
+                    <a:pt x="4502047" y="730467"/>
+                  </a:lnTo>
+                  <a:lnTo>
+                    <a:pt x="4572391" y="732214"/>
+                  </a:lnTo>
+                  <a:lnTo>
+                    <a:pt x="4642736" y="733950"/>
+                  </a:lnTo>
+                  <a:lnTo>
+                    <a:pt x="4713080" y="735674"/>
+                  </a:lnTo>
+                  <a:lnTo>
+                    <a:pt x="4783425" y="737386"/>
+                  </a:lnTo>
+                  <a:lnTo>
+                    <a:pt x="4853769" y="739087"/>
+                  </a:lnTo>
+                  <a:lnTo>
+                    <a:pt x="4924114" y="740776"/>
+                  </a:lnTo>
+                  <a:lnTo>
+                    <a:pt x="4994458" y="742454"/>
+                  </a:lnTo>
+                  <a:lnTo>
+                    <a:pt x="5064803" y="744120"/>
+                  </a:lnTo>
+                  <a:lnTo>
+                    <a:pt x="5135147" y="745775"/>
+                  </a:lnTo>
+                  <a:lnTo>
+                    <a:pt x="5205492" y="747419"/>
+                  </a:lnTo>
+                  <a:lnTo>
+                    <a:pt x="5275836" y="749052"/>
+                  </a:lnTo>
+                  <a:lnTo>
+                    <a:pt x="5346181" y="750674"/>
+                  </a:lnTo>
+                  <a:lnTo>
+                    <a:pt x="5416525" y="752284"/>
+                  </a:lnTo>
+                  <a:lnTo>
+                    <a:pt x="5486870" y="753884"/>
+                  </a:lnTo>
+                  <a:lnTo>
+                    <a:pt x="5557214" y="755473"/>
+                  </a:lnTo>
+                  <a:lnTo>
+                    <a:pt x="5627559" y="757052"/>
+                  </a:lnTo>
+                  <a:lnTo>
+                    <a:pt x="5697903" y="758620"/>
+                  </a:lnTo>
+                  <a:lnTo>
+                    <a:pt x="5768248" y="760177"/>
+                  </a:lnTo>
+                  <a:lnTo>
+                    <a:pt x="5838592" y="761723"/>
+                  </a:lnTo>
+                  <a:lnTo>
+                    <a:pt x="5908937" y="763259"/>
+                  </a:lnTo>
+                  <a:lnTo>
+                    <a:pt x="5979281" y="764785"/>
+                  </a:lnTo>
+                  <a:lnTo>
+                    <a:pt x="6049626" y="766300"/>
+                  </a:lnTo>
+                  <a:lnTo>
+                    <a:pt x="6119970" y="767806"/>
+                  </a:lnTo>
+                  <a:lnTo>
+                    <a:pt x="6190315" y="769301"/>
+                  </a:lnTo>
+                  <a:lnTo>
+                    <a:pt x="6260659" y="770786"/>
+                  </a:lnTo>
+                  <a:lnTo>
+                    <a:pt x="6331004" y="772260"/>
+                  </a:lnTo>
+                  <a:lnTo>
+                    <a:pt x="6401348" y="773725"/>
+                  </a:lnTo>
+                  <a:lnTo>
+                    <a:pt x="6471693" y="775180"/>
+                  </a:lnTo>
+                  <a:lnTo>
+                    <a:pt x="6542037" y="776625"/>
+                  </a:lnTo>
+                  <a:lnTo>
+                    <a:pt x="6612382" y="778061"/>
+                  </a:lnTo>
+                  <a:lnTo>
+                    <a:pt x="6682726" y="779486"/>
+                  </a:lnTo>
+                  <a:lnTo>
+                    <a:pt x="6753071" y="780902"/>
+                  </a:lnTo>
+                  <a:lnTo>
+                    <a:pt x="6823415" y="782309"/>
+                  </a:lnTo>
+                  <a:lnTo>
+                    <a:pt x="6893760" y="783706"/>
+                  </a:lnTo>
+                  <a:lnTo>
+                    <a:pt x="6964104" y="785093"/>
+                  </a:lnTo>
+                </a:path>
+              </a:pathLst>
+            </a:custGeom>
+          </p:spPr>
+          <p:txBody>
+            <a:bodyPr/>
+            <a:lstStyle/>
+            <a:p/>
+          </p:txBody>
+        </p:sp>
+        <p:sp>
+          <p:nvSpPr>
+            <p:cNvPr id="72" name="pl72"/>
+            <p:cNvSpPr/>
+            <p:nvPr/>
+          </p:nvSpPr>
+          <p:spPr>
+            <a:xfrm>
+              <a:off x="1235312" y="5194703"/>
+              <a:ext cx="6964104" cy="338424"/>
+            </a:xfrm>
+            <a:custGeom>
+              <a:avLst/>
+              <a:pathLst>
+                <a:path w="6964104" h="338424">
+                  <a:moveTo>
+                    <a:pt x="6964104" y="338424"/>
+                  </a:moveTo>
+                  <a:lnTo>
+                    <a:pt x="6893760" y="336691"/>
+                  </a:lnTo>
+                  <a:lnTo>
+                    <a:pt x="6823415" y="334909"/>
+                  </a:lnTo>
+                  <a:lnTo>
+                    <a:pt x="6753071" y="333075"/>
+                  </a:lnTo>
+                  <a:lnTo>
+                    <a:pt x="6682726" y="331189"/>
+                  </a:lnTo>
+                  <a:lnTo>
+                    <a:pt x="6612382" y="329250"/>
+                  </a:lnTo>
+                  <a:lnTo>
+                    <a:pt x="6542037" y="327254"/>
+                  </a:lnTo>
+                  <a:lnTo>
+                    <a:pt x="6471693" y="325202"/>
+                  </a:lnTo>
+                  <a:lnTo>
+                    <a:pt x="6401348" y="323091"/>
+                  </a:lnTo>
+                  <a:lnTo>
+                    <a:pt x="6331004" y="320919"/>
+                  </a:lnTo>
+                  <a:lnTo>
+                    <a:pt x="6260659" y="318685"/>
+                  </a:lnTo>
+                  <a:lnTo>
+                    <a:pt x="6190315" y="316388"/>
+                  </a:lnTo>
+                  <a:lnTo>
+                    <a:pt x="6119970" y="314024"/>
+                  </a:lnTo>
+                  <a:lnTo>
+                    <a:pt x="6049626" y="311593"/>
+                  </a:lnTo>
+                  <a:lnTo>
+                    <a:pt x="5979281" y="309093"/>
+                  </a:lnTo>
+                  <a:lnTo>
+                    <a:pt x="5908937" y="306521"/>
+                  </a:lnTo>
+                  <a:lnTo>
+                    <a:pt x="5838592" y="303875"/>
+                  </a:lnTo>
+                  <a:lnTo>
+                    <a:pt x="5768248" y="301154"/>
+                  </a:lnTo>
+                  <a:lnTo>
+                    <a:pt x="5697903" y="298354"/>
+                  </a:lnTo>
+                  <a:lnTo>
+                    <a:pt x="5627559" y="295475"/>
+                  </a:lnTo>
+                  <a:lnTo>
+                    <a:pt x="5557214" y="292513"/>
+                  </a:lnTo>
+                  <a:lnTo>
+                    <a:pt x="5486870" y="289467"/>
+                  </a:lnTo>
+                  <a:lnTo>
+                    <a:pt x="5416525" y="286333"/>
+                  </a:lnTo>
+                  <a:lnTo>
+                    <a:pt x="5346181" y="283110"/>
+                  </a:lnTo>
+                  <a:lnTo>
+                    <a:pt x="5275836" y="279794"/>
+                  </a:lnTo>
+                  <a:lnTo>
+                    <a:pt x="5205492" y="276383"/>
+                  </a:lnTo>
+                  <a:lnTo>
+                    <a:pt x="5135147" y="272875"/>
+                  </a:lnTo>
+                  <a:lnTo>
+                    <a:pt x="5064803" y="269267"/>
+                  </a:lnTo>
+                  <a:lnTo>
+                    <a:pt x="4994458" y="265555"/>
+                  </a:lnTo>
+                  <a:lnTo>
+                    <a:pt x="4924114" y="261737"/>
+                  </a:lnTo>
+                  <a:lnTo>
+                    <a:pt x="4853769" y="257810"/>
+                  </a:lnTo>
+                  <a:lnTo>
+                    <a:pt x="4783425" y="253771"/>
+                  </a:lnTo>
+                  <a:lnTo>
+                    <a:pt x="4713080" y="249616"/>
+                  </a:lnTo>
+                  <a:lnTo>
+                    <a:pt x="4642736" y="245342"/>
+                  </a:lnTo>
+                  <a:lnTo>
+                    <a:pt x="4572391" y="240945"/>
+                  </a:lnTo>
+                  <a:lnTo>
+                    <a:pt x="4502047" y="236423"/>
+                  </a:lnTo>
+                  <a:lnTo>
+                    <a:pt x="4431702" y="231772"/>
+                  </a:lnTo>
+                  <a:lnTo>
+                    <a:pt x="4361358" y="226987"/>
+                  </a:lnTo>
+                  <a:lnTo>
+                    <a:pt x="4291013" y="222066"/>
+                  </a:lnTo>
+                  <a:lnTo>
+                    <a:pt x="4220669" y="217003"/>
+                  </a:lnTo>
+                  <a:lnTo>
+                    <a:pt x="4150324" y="211796"/>
+                  </a:lnTo>
+                  <a:lnTo>
+                    <a:pt x="4079980" y="206440"/>
+                  </a:lnTo>
+                  <a:lnTo>
+                    <a:pt x="4009635" y="200931"/>
+                  </a:lnTo>
+                  <a:lnTo>
+                    <a:pt x="3939291" y="195264"/>
+                  </a:lnTo>
+                  <a:lnTo>
+                    <a:pt x="3868946" y="189435"/>
+                  </a:lnTo>
+                  <a:lnTo>
+                    <a:pt x="3798602" y="183438"/>
+                  </a:lnTo>
+                  <a:lnTo>
+                    <a:pt x="3728257" y="177271"/>
+                  </a:lnTo>
+                  <a:lnTo>
+                    <a:pt x="3657913" y="170927"/>
+                  </a:lnTo>
+                  <a:lnTo>
+                    <a:pt x="3587569" y="164401"/>
+                  </a:lnTo>
+                  <a:lnTo>
+                    <a:pt x="3517224" y="157689"/>
+                  </a:lnTo>
+                  <a:lnTo>
+                    <a:pt x="3446880" y="150785"/>
+                  </a:lnTo>
+                  <a:lnTo>
+                    <a:pt x="3376535" y="143683"/>
+                  </a:lnTo>
+                  <a:lnTo>
+                    <a:pt x="3306191" y="136378"/>
+                  </a:lnTo>
+                  <a:lnTo>
+                    <a:pt x="3235846" y="128863"/>
+                  </a:lnTo>
+                  <a:lnTo>
+                    <a:pt x="3165502" y="121134"/>
+                  </a:lnTo>
+                  <a:lnTo>
+                    <a:pt x="3095157" y="113184"/>
+                  </a:lnTo>
+                  <a:lnTo>
+                    <a:pt x="3024813" y="105006"/>
+                  </a:lnTo>
+                  <a:lnTo>
+                    <a:pt x="2954468" y="98918"/>
+                  </a:lnTo>
+                  <a:lnTo>
+                    <a:pt x="2884124" y="96875"/>
+                  </a:lnTo>
+                  <a:lnTo>
+                    <a:pt x="2813779" y="94819"/>
+                  </a:lnTo>
+                  <a:lnTo>
+                    <a:pt x="2743435" y="92748"/>
+                  </a:lnTo>
+                  <a:lnTo>
+                    <a:pt x="2673090" y="90664"/>
+                  </a:lnTo>
+                  <a:lnTo>
+                    <a:pt x="2602746" y="88565"/>
+                  </a:lnTo>
+                  <a:lnTo>
+                    <a:pt x="2532401" y="86452"/>
+                  </a:lnTo>
+                  <a:lnTo>
+                    <a:pt x="2462057" y="84325"/>
+                  </a:lnTo>
+                  <a:lnTo>
+                    <a:pt x="2391712" y="82183"/>
+                  </a:lnTo>
+                  <a:lnTo>
+                    <a:pt x="2321368" y="80026"/>
+                  </a:lnTo>
+                  <a:lnTo>
+                    <a:pt x="2251023" y="77855"/>
+                  </a:lnTo>
+                  <a:lnTo>
+                    <a:pt x="2180679" y="75669"/>
+                  </a:lnTo>
+                  <a:lnTo>
+                    <a:pt x="2110334" y="73469"/>
+                  </a:lnTo>
+                  <a:lnTo>
+                    <a:pt x="2039990" y="71253"/>
+                  </a:lnTo>
+                  <a:lnTo>
+                    <a:pt x="1969645" y="69022"/>
+                  </a:lnTo>
+                  <a:lnTo>
+                    <a:pt x="1899301" y="66776"/>
+                  </a:lnTo>
+                  <a:lnTo>
+                    <a:pt x="1828956" y="64515"/>
+                  </a:lnTo>
+                  <a:lnTo>
+                    <a:pt x="1758612" y="62238"/>
+                  </a:lnTo>
+                  <a:lnTo>
+                    <a:pt x="1688267" y="59946"/>
+                  </a:lnTo>
+                  <a:lnTo>
+                    <a:pt x="1617923" y="57638"/>
+                  </a:lnTo>
+                  <a:lnTo>
+                    <a:pt x="1547578" y="55315"/>
+                  </a:lnTo>
+                  <a:lnTo>
+                    <a:pt x="1477234" y="52976"/>
+                  </a:lnTo>
+                  <a:lnTo>
+                    <a:pt x="1406889" y="50620"/>
+                  </a:lnTo>
+                  <a:lnTo>
+                    <a:pt x="1336545" y="48249"/>
+                  </a:lnTo>
+                  <a:lnTo>
+                    <a:pt x="1266200" y="45862"/>
+                  </a:lnTo>
+                  <a:lnTo>
+                    <a:pt x="1195856" y="43458"/>
+                  </a:lnTo>
+                  <a:lnTo>
+                    <a:pt x="1125511" y="41038"/>
+                  </a:lnTo>
+                  <a:lnTo>
+                    <a:pt x="1055167" y="38602"/>
+                  </a:lnTo>
+                  <a:lnTo>
+                    <a:pt x="984822" y="36148"/>
+                  </a:lnTo>
+                  <a:lnTo>
+                    <a:pt x="914478" y="33679"/>
+                  </a:lnTo>
+                  <a:lnTo>
+                    <a:pt x="844133" y="31192"/>
+                  </a:lnTo>
+                  <a:lnTo>
+                    <a:pt x="773789" y="28689"/>
+                  </a:lnTo>
+                  <a:lnTo>
+                    <a:pt x="703444" y="26168"/>
+                  </a:lnTo>
+                  <a:lnTo>
+                    <a:pt x="633100" y="23630"/>
+                  </a:lnTo>
+                  <a:lnTo>
+                    <a:pt x="562755" y="21075"/>
+                  </a:lnTo>
+                  <a:lnTo>
+                    <a:pt x="492411" y="18503"/>
+                  </a:lnTo>
+                  <a:lnTo>
+                    <a:pt x="422066" y="15913"/>
+                  </a:lnTo>
+                  <a:lnTo>
+                    <a:pt x="351722" y="13306"/>
+                  </a:lnTo>
+                  <a:lnTo>
+                    <a:pt x="281377" y="10680"/>
+                  </a:lnTo>
+                  <a:lnTo>
+                    <a:pt x="211033" y="8037"/>
+                  </a:lnTo>
+                  <a:lnTo>
+                    <a:pt x="140688" y="5376"/>
+                  </a:lnTo>
+                  <a:lnTo>
+                    <a:pt x="70344" y="2697"/>
+                  </a:lnTo>
+                  <a:lnTo>
+                    <a:pt x="0" y="0"/>
+                  </a:lnTo>
+                </a:path>
+              </a:pathLst>
+            </a:custGeom>
+          </p:spPr>
+          <p:txBody>
+            <a:bodyPr/>
+            <a:lstStyle/>
+            <a:p/>
+          </p:txBody>
+        </p:sp>
+        <p:sp>
+          <p:nvSpPr>
+            <p:cNvPr id="73" name="pl73"/>
+            <p:cNvSpPr/>
+            <p:nvPr/>
+          </p:nvSpPr>
+          <p:spPr>
+            <a:xfrm>
+              <a:off x="1235312" y="4965540"/>
+              <a:ext cx="6964104" cy="517041"/>
+            </a:xfrm>
+            <a:custGeom>
+              <a:avLst/>
+              <a:pathLst>
+                <a:path w="6964104" h="517041">
+                  <a:moveTo>
+                    <a:pt x="0" y="0"/>
+                  </a:moveTo>
+                  <a:lnTo>
+                    <a:pt x="70344" y="10895"/>
+                  </a:lnTo>
+                  <a:lnTo>
+                    <a:pt x="140688" y="21602"/>
+                  </a:lnTo>
+                  <a:lnTo>
+                    <a:pt x="211033" y="32123"/>
+                  </a:lnTo>
+                  <a:lnTo>
+                    <a:pt x="281377" y="42461"/>
+                  </a:lnTo>
+                  <a:lnTo>
+                    <a:pt x="351722" y="52620"/>
+                  </a:lnTo>
+                  <a:lnTo>
+                    <a:pt x="422066" y="62603"/>
+                  </a:lnTo>
+                  <a:lnTo>
+                    <a:pt x="492411" y="72413"/>
+                  </a:lnTo>
+                  <a:lnTo>
+                    <a:pt x="562755" y="82053"/>
+                  </a:lnTo>
+                  <a:lnTo>
+                    <a:pt x="633100" y="91525"/>
+                  </a:lnTo>
+                  <a:lnTo>
+                    <a:pt x="703444" y="100833"/>
+                  </a:lnTo>
+                  <a:lnTo>
+                    <a:pt x="773789" y="109980"/>
+                  </a:lnTo>
+                  <a:lnTo>
+                    <a:pt x="844133" y="118968"/>
+                  </a:lnTo>
+                  <a:lnTo>
+                    <a:pt x="914478" y="127800"/>
+                  </a:lnTo>
+                  <a:lnTo>
+                    <a:pt x="984822" y="136479"/>
+                  </a:lnTo>
+                  <a:lnTo>
+                    <a:pt x="1055167" y="145007"/>
+                  </a:lnTo>
+                  <a:lnTo>
+                    <a:pt x="1125511" y="153388"/>
+                  </a:lnTo>
+                  <a:lnTo>
+                    <a:pt x="1195856" y="161623"/>
+                  </a:lnTo>
+                  <a:lnTo>
+                    <a:pt x="1266200" y="169715"/>
+                  </a:lnTo>
+                  <a:lnTo>
+                    <a:pt x="1336545" y="177667"/>
+                  </a:lnTo>
+                  <a:lnTo>
+                    <a:pt x="1406889" y="185481"/>
+                  </a:lnTo>
+                  <a:lnTo>
+                    <a:pt x="1477234" y="193159"/>
+                  </a:lnTo>
+                  <a:lnTo>
+                    <a:pt x="1547578" y="200704"/>
+                  </a:lnTo>
+                  <a:lnTo>
+                    <a:pt x="1617923" y="208119"/>
+                  </a:lnTo>
+                  <a:lnTo>
+                    <a:pt x="1688267" y="215404"/>
+                  </a:lnTo>
+                  <a:lnTo>
+                    <a:pt x="1758612" y="222564"/>
+                  </a:lnTo>
+                  <a:lnTo>
+                    <a:pt x="1828956" y="229599"/>
+                  </a:lnTo>
+                  <a:lnTo>
+                    <a:pt x="1899301" y="236512"/>
+                  </a:lnTo>
+                  <a:lnTo>
+                    <a:pt x="1969645" y="243305"/>
+                  </a:lnTo>
+                  <a:lnTo>
+                    <a:pt x="2039990" y="249980"/>
+                  </a:lnTo>
+                  <a:lnTo>
+                    <a:pt x="2110334" y="256540"/>
+                  </a:lnTo>
+                  <a:lnTo>
+                    <a:pt x="2180679" y="262986"/>
+                  </a:lnTo>
+                  <a:lnTo>
+                    <a:pt x="2251023" y="269320"/>
+                  </a:lnTo>
+                  <a:lnTo>
+                    <a:pt x="2321368" y="275544"/>
+                  </a:lnTo>
+                  <a:lnTo>
+                    <a:pt x="2391712" y="281660"/>
+                  </a:lnTo>
+                  <a:lnTo>
+                    <a:pt x="2462057" y="287670"/>
+                  </a:lnTo>
+                  <a:lnTo>
+                    <a:pt x="2532401" y="293576"/>
+                  </a:lnTo>
+                  <a:lnTo>
+                    <a:pt x="2602746" y="299379"/>
+                  </a:lnTo>
+                  <a:lnTo>
+                    <a:pt x="2673090" y="305082"/>
+                  </a:lnTo>
+                  <a:lnTo>
+                    <a:pt x="2743435" y="310686"/>
+                  </a:lnTo>
+                  <a:lnTo>
+                    <a:pt x="2813779" y="316192"/>
+                  </a:lnTo>
+                  <a:lnTo>
+                    <a:pt x="2884124" y="321603"/>
+                  </a:lnTo>
+                  <a:lnTo>
+                    <a:pt x="2954468" y="326921"/>
+                  </a:lnTo>
+                  <a:lnTo>
+                    <a:pt x="3024813" y="332146"/>
+                  </a:lnTo>
+                  <a:lnTo>
+                    <a:pt x="3095157" y="337280"/>
+                  </a:lnTo>
+                  <a:lnTo>
+                    <a:pt x="3165502" y="342325"/>
+                  </a:lnTo>
+                  <a:lnTo>
+                    <a:pt x="3235846" y="347283"/>
+                  </a:lnTo>
+                  <a:lnTo>
+                    <a:pt x="3306191" y="352155"/>
+                  </a:lnTo>
+                  <a:lnTo>
+                    <a:pt x="3376535" y="356942"/>
+                  </a:lnTo>
+                  <a:lnTo>
+                    <a:pt x="3446880" y="361646"/>
+                  </a:lnTo>
+                  <a:lnTo>
+                    <a:pt x="3517224" y="366269"/>
+                  </a:lnTo>
+                  <a:lnTo>
+                    <a:pt x="3587569" y="370811"/>
+                  </a:lnTo>
+                  <a:lnTo>
+                    <a:pt x="3657913" y="375275"/>
+                  </a:lnTo>
+                  <a:lnTo>
+                    <a:pt x="3728257" y="379661"/>
+                  </a:lnTo>
+                  <a:lnTo>
+                    <a:pt x="3798602" y="383971"/>
+                  </a:lnTo>
+                  <a:lnTo>
+                    <a:pt x="3868946" y="388207"/>
+                  </a:lnTo>
+                  <a:lnTo>
+                    <a:pt x="3939291" y="392369"/>
+                  </a:lnTo>
+                  <a:lnTo>
+                    <a:pt x="4009635" y="396459"/>
+                  </a:lnTo>
+                  <a:lnTo>
+                    <a:pt x="4079980" y="400477"/>
+                  </a:lnTo>
+                  <a:lnTo>
+                    <a:pt x="4150324" y="404426"/>
+                  </a:lnTo>
+                  <a:lnTo>
+                    <a:pt x="4220669" y="408307"/>
+                  </a:lnTo>
+                  <a:lnTo>
+                    <a:pt x="4291013" y="412120"/>
+                  </a:lnTo>
+                  <a:lnTo>
+                    <a:pt x="4361358" y="415867"/>
+                  </a:lnTo>
+                  <a:lnTo>
+                    <a:pt x="4431702" y="419550"/>
+                  </a:lnTo>
+                  <a:lnTo>
+                    <a:pt x="4502047" y="423168"/>
+                  </a:lnTo>
+                  <a:lnTo>
+                    <a:pt x="4572391" y="426723"/>
+                  </a:lnTo>
+                  <a:lnTo>
+                    <a:pt x="4642736" y="430217"/>
+                  </a:lnTo>
+                  <a:lnTo>
+                    <a:pt x="4713080" y="433650"/>
+                  </a:lnTo>
+                  <a:lnTo>
+                    <a:pt x="4783425" y="437024"/>
+                  </a:lnTo>
+                  <a:lnTo>
+                    <a:pt x="4853769" y="440339"/>
+                  </a:lnTo>
+                  <a:lnTo>
+                    <a:pt x="4924114" y="443597"/>
+                  </a:lnTo>
+                  <a:lnTo>
+                    <a:pt x="4994458" y="446798"/>
+                  </a:lnTo>
+                  <a:lnTo>
+                    <a:pt x="5064803" y="449944"/>
+                  </a:lnTo>
+                  <a:lnTo>
+                    <a:pt x="5135147" y="453035"/>
+                  </a:lnTo>
+                  <a:lnTo>
+                    <a:pt x="5205492" y="456072"/>
+                  </a:lnTo>
+                  <a:lnTo>
+                    <a:pt x="5275836" y="459057"/>
+                  </a:lnTo>
+                  <a:lnTo>
+                    <a:pt x="5346181" y="461990"/>
+                  </a:lnTo>
+                  <a:lnTo>
+                    <a:pt x="5416525" y="464872"/>
+                  </a:lnTo>
+                  <a:lnTo>
+                    <a:pt x="5486870" y="467704"/>
+                  </a:lnTo>
+                  <a:lnTo>
+                    <a:pt x="5557214" y="470487"/>
+                  </a:lnTo>
+                  <a:lnTo>
+                    <a:pt x="5627559" y="473222"/>
+                  </a:lnTo>
+                  <a:lnTo>
+                    <a:pt x="5697903" y="475909"/>
+                  </a:lnTo>
+                  <a:lnTo>
+                    <a:pt x="5768248" y="478550"/>
+                  </a:lnTo>
+                  <a:lnTo>
+                    <a:pt x="5838592" y="481144"/>
+                  </a:lnTo>
+                  <a:lnTo>
+                    <a:pt x="5908937" y="483694"/>
+                  </a:lnTo>
+                  <a:lnTo>
+                    <a:pt x="5979281" y="486200"/>
+                  </a:lnTo>
+                  <a:lnTo>
+                    <a:pt x="6049626" y="488662"/>
+                  </a:lnTo>
+                  <a:lnTo>
+                    <a:pt x="6119970" y="491082"/>
+                  </a:lnTo>
+                  <a:lnTo>
+                    <a:pt x="6190315" y="493459"/>
+                  </a:lnTo>
+                  <a:lnTo>
+                    <a:pt x="6260659" y="495795"/>
+                  </a:lnTo>
+                  <a:lnTo>
+                    <a:pt x="6331004" y="498091"/>
+                  </a:lnTo>
+                  <a:lnTo>
+                    <a:pt x="6401348" y="500347"/>
+                  </a:lnTo>
+                  <a:lnTo>
+                    <a:pt x="6471693" y="502564"/>
+                  </a:lnTo>
+                  <a:lnTo>
+                    <a:pt x="6542037" y="504742"/>
+                  </a:lnTo>
+                  <a:lnTo>
+                    <a:pt x="6612382" y="506883"/>
+                  </a:lnTo>
+                  <a:lnTo>
+                    <a:pt x="6682726" y="508986"/>
+                  </a:lnTo>
+                  <a:lnTo>
+                    <a:pt x="6753071" y="511053"/>
+                  </a:lnTo>
+                  <a:lnTo>
+                    <a:pt x="6823415" y="513084"/>
+                  </a:lnTo>
+                  <a:lnTo>
+                    <a:pt x="6893760" y="515080"/>
+                  </a:lnTo>
+                  <a:lnTo>
+                    <a:pt x="6964104" y="517041"/>
+                  </a:lnTo>
+                </a:path>
+              </a:pathLst>
+            </a:custGeom>
+            <a:ln w="27101" cap="flat">
+              <a:solidFill>
+                <a:srgbClr val="FF8C00">
+                  <a:alpha val="100000"/>
+                </a:srgbClr>
+              </a:solidFill>
+              <a:prstDash val="solid"/>
+              <a:round/>
+            </a:ln>
+          </p:spPr>
+          <p:txBody>
+            <a:bodyPr/>
+            <a:lstStyle/>
+            <a:p/>
+          </p:txBody>
+        </p:sp>
+        <p:sp>
+          <p:nvSpPr>
+            <p:cNvPr id="74" name="pl74"/>
+            <p:cNvSpPr/>
+            <p:nvPr/>
+          </p:nvSpPr>
+          <p:spPr>
+            <a:xfrm>
+              <a:off x="887106" y="5294352"/>
+              <a:ext cx="7660515" cy="0"/>
+            </a:xfrm>
+            <a:custGeom>
+              <a:avLst/>
+              <a:pathLst>
+                <a:path w="7660515" h="0">
+                  <a:moveTo>
+                    <a:pt x="0" y="0"/>
+                  </a:moveTo>
+                  <a:lnTo>
+                    <a:pt x="7660515" y="0"/>
+                  </a:lnTo>
+                  <a:lnTo>
+                    <a:pt x="7660515" y="0"/>
+                  </a:lnTo>
+                </a:path>
+              </a:pathLst>
+            </a:custGeom>
+            <a:ln w="13550" cap="flat">
+              <a:solidFill>
+                <a:srgbClr val="7F7F7F">
+                  <a:alpha val="100000"/>
+                </a:srgbClr>
+              </a:solidFill>
+              <a:prstDash val="dash"/>
+              <a:round/>
+            </a:ln>
+          </p:spPr>
+          <p:txBody>
+            <a:bodyPr/>
+            <a:lstStyle/>
+            <a:p/>
+          </p:txBody>
+        </p:sp>
+        <p:sp>
+          <p:nvSpPr>
+            <p:cNvPr id="75" name="pl75"/>
+            <p:cNvSpPr/>
+            <p:nvPr/>
+          </p:nvSpPr>
+          <p:spPr>
+            <a:xfrm>
+              <a:off x="4215100" y="4336484"/>
+              <a:ext cx="0" cy="1317069"/>
+            </a:xfrm>
+            <a:custGeom>
+              <a:avLst/>
+              <a:pathLst>
+                <a:path w="0" h="1317069">
+                  <a:moveTo>
+                    <a:pt x="0" y="1317069"/>
+                  </a:moveTo>
+                  <a:lnTo>
+                    <a:pt x="0" y="0"/>
+                  </a:lnTo>
+                  <a:lnTo>
+                    <a:pt x="0" y="0"/>
+                  </a:lnTo>
+                </a:path>
+              </a:pathLst>
+            </a:custGeom>
+            <a:ln w="13550" cap="flat">
+              <a:solidFill>
+                <a:srgbClr val="666666">
+                  <a:alpha val="100000"/>
+                </a:srgbClr>
+              </a:solidFill>
+              <a:prstDash val="dot"/>
+              <a:round/>
+            </a:ln>
+          </p:spPr>
+          <p:txBody>
+            <a:bodyPr/>
+            <a:lstStyle/>
+            <a:p/>
+          </p:txBody>
+        </p:sp>
+        <p:sp>
+          <p:nvSpPr>
+            <p:cNvPr id="76" name="pl76"/>
+            <p:cNvSpPr/>
+            <p:nvPr/>
+          </p:nvSpPr>
+          <p:spPr>
+            <a:xfrm>
+              <a:off x="3046793" y="4336484"/>
+              <a:ext cx="0" cy="1317069"/>
+            </a:xfrm>
+            <a:custGeom>
+              <a:avLst/>
+              <a:pathLst>
+                <a:path w="0" h="1317069">
+                  <a:moveTo>
+                    <a:pt x="0" y="1317069"/>
+                  </a:moveTo>
+                  <a:lnTo>
+                    <a:pt x="0" y="0"/>
+                  </a:lnTo>
+                  <a:lnTo>
+                    <a:pt x="0" y="0"/>
+                  </a:lnTo>
+                </a:path>
+              </a:pathLst>
+            </a:custGeom>
+            <a:ln w="13550" cap="flat">
+              <a:solidFill>
+                <a:srgbClr val="4682B4">
+                  <a:alpha val="69803"/>
+                </a:srgbClr>
+              </a:solidFill>
+              <a:prstDash val="dash"/>
+              <a:round/>
+            </a:ln>
+          </p:spPr>
+          <p:txBody>
+            <a:bodyPr/>
+            <a:lstStyle/>
+            <a:p/>
+          </p:txBody>
+        </p:sp>
+        <p:sp>
+          <p:nvSpPr>
+            <p:cNvPr id="77" name="pl77"/>
+            <p:cNvSpPr/>
+            <p:nvPr/>
+          </p:nvSpPr>
+          <p:spPr>
+            <a:xfrm>
+              <a:off x="5409191" y="4336484"/>
+              <a:ext cx="0" cy="1317069"/>
+            </a:xfrm>
+            <a:custGeom>
+              <a:avLst/>
+              <a:pathLst>
+                <a:path w="0" h="1317069">
+                  <a:moveTo>
+                    <a:pt x="0" y="1317069"/>
+                  </a:moveTo>
+                  <a:lnTo>
+                    <a:pt x="0" y="0"/>
+                  </a:lnTo>
+                  <a:lnTo>
+                    <a:pt x="0" y="0"/>
+                  </a:lnTo>
+                </a:path>
+              </a:pathLst>
+            </a:custGeom>
+            <a:ln w="13550" cap="flat">
+              <a:solidFill>
+                <a:srgbClr val="4682B4">
+                  <a:alpha val="69803"/>
+                </a:srgbClr>
+              </a:solidFill>
+              <a:prstDash val="dash"/>
+              <a:round/>
+            </a:ln>
+          </p:spPr>
+          <p:txBody>
+            <a:bodyPr/>
+            <a:lstStyle/>
+            <a:p/>
+          </p:txBody>
+        </p:sp>
+        <p:sp>
+          <p:nvSpPr>
+            <p:cNvPr id="78" name="tx78"/>
+            <p:cNvSpPr/>
+            <p:nvPr/>
+          </p:nvSpPr>
+          <p:spPr>
+            <a:xfrm>
+              <a:off x="762297" y="5553636"/>
+              <a:ext cx="62179" cy="80101"/>
+            </a:xfrm>
+            <a:prstGeom prst="rect">
+              <a:avLst/>
+            </a:prstGeom>
+            <a:noFill/>
+          </p:spPr>
+          <p:txBody>
+            <a:bodyPr lIns="0" rIns="0" tIns="0" bIns="0" anchorCtr="1" anchor="ctr" wrap="none"/>
+            <a:lstStyle/>
+            <a:p>
+              <a:pPr algn="l" marL="0" marR="0" indent="0">
+                <a:lnSpc>
+                  <a:spcPts val="880"/>
+                </a:lnSpc>
+                <a:spcBef>
+                  <a:spcPts val="0"/>
+                </a:spcBef>
+                <a:spcAft>
+                  <a:spcPts val="0"/>
+                </a:spcAft>
+              </a:pPr>
+              <a:r>
+                <a:rPr sz="880">
+                  <a:solidFill>
+                    <a:srgbClr val="4D4D4D">
+                      <a:alpha val="100000"/>
+                    </a:srgbClr>
+                  </a:solidFill>
+                  <a:latin typeface="Helvetica"/>
+                  <a:cs typeface="Helvetica"/>
+                </a:rPr>
+                <a:t>0</a:t>
+              </a:r>
+            </a:p>
+          </p:txBody>
+        </p:sp>
+        <p:sp>
+          <p:nvSpPr>
+            <p:cNvPr id="79" name="tx79"/>
+            <p:cNvSpPr/>
+            <p:nvPr/>
+          </p:nvSpPr>
+          <p:spPr>
+            <a:xfrm>
+              <a:off x="762297" y="5254302"/>
+              <a:ext cx="62179" cy="80101"/>
+            </a:xfrm>
+            <a:prstGeom prst="rect">
+              <a:avLst/>
+            </a:prstGeom>
+            <a:noFill/>
+          </p:spPr>
+          <p:txBody>
+            <a:bodyPr lIns="0" rIns="0" tIns="0" bIns="0" anchorCtr="1" anchor="ctr" wrap="none"/>
+            <a:lstStyle/>
+            <a:p>
+              <a:pPr algn="l" marL="0" marR="0" indent="0">
+                <a:lnSpc>
+                  <a:spcPts val="880"/>
+                </a:lnSpc>
+                <a:spcBef>
+                  <a:spcPts val="0"/>
+                </a:spcBef>
+                <a:spcAft>
+                  <a:spcPts val="0"/>
+                </a:spcAft>
+              </a:pPr>
+              <a:r>
+                <a:rPr sz="880">
+                  <a:solidFill>
+                    <a:srgbClr val="4D4D4D">
+                      <a:alpha val="100000"/>
+                    </a:srgbClr>
+                  </a:solidFill>
+                  <a:latin typeface="Helvetica"/>
+                  <a:cs typeface="Helvetica"/>
+                </a:rPr>
+                <a:t>1</a:t>
+              </a:r>
+            </a:p>
+          </p:txBody>
+        </p:sp>
+        <p:sp>
+          <p:nvSpPr>
+            <p:cNvPr id="80" name="tx80"/>
+            <p:cNvSpPr/>
+            <p:nvPr/>
+          </p:nvSpPr>
+          <p:spPr>
+            <a:xfrm>
+              <a:off x="762297" y="4954968"/>
+              <a:ext cx="62179" cy="80101"/>
+            </a:xfrm>
+            <a:prstGeom prst="rect">
+              <a:avLst/>
+            </a:prstGeom>
+            <a:noFill/>
+          </p:spPr>
+          <p:txBody>
+            <a:bodyPr lIns="0" rIns="0" tIns="0" bIns="0" anchorCtr="1" anchor="ctr" wrap="none"/>
+            <a:lstStyle/>
+            <a:p>
+              <a:pPr algn="l" marL="0" marR="0" indent="0">
+                <a:lnSpc>
+                  <a:spcPts val="880"/>
+                </a:lnSpc>
+                <a:spcBef>
+                  <a:spcPts val="0"/>
+                </a:spcBef>
+                <a:spcAft>
+                  <a:spcPts val="0"/>
+                </a:spcAft>
+              </a:pPr>
+              <a:r>
+                <a:rPr sz="880">
+                  <a:solidFill>
+                    <a:srgbClr val="4D4D4D">
+                      <a:alpha val="100000"/>
+                    </a:srgbClr>
+                  </a:solidFill>
+                  <a:latin typeface="Helvetica"/>
+                  <a:cs typeface="Helvetica"/>
+                </a:rPr>
+                <a:t>2</a:t>
+              </a:r>
+            </a:p>
+          </p:txBody>
+        </p:sp>
+        <p:sp>
+          <p:nvSpPr>
+            <p:cNvPr id="81" name="tx81"/>
+            <p:cNvSpPr/>
+            <p:nvPr/>
+          </p:nvSpPr>
+          <p:spPr>
+            <a:xfrm>
+              <a:off x="762297" y="4655634"/>
+              <a:ext cx="62179" cy="80101"/>
+            </a:xfrm>
+            <a:prstGeom prst="rect">
+              <a:avLst/>
+            </a:prstGeom>
+            <a:noFill/>
+          </p:spPr>
+          <p:txBody>
+            <a:bodyPr lIns="0" rIns="0" tIns="0" bIns="0" anchorCtr="1" anchor="ctr" wrap="none"/>
+            <a:lstStyle/>
+            <a:p>
+              <a:pPr algn="l" marL="0" marR="0" indent="0">
+                <a:lnSpc>
+                  <a:spcPts val="880"/>
+                </a:lnSpc>
+                <a:spcBef>
+                  <a:spcPts val="0"/>
+                </a:spcBef>
+                <a:spcAft>
+                  <a:spcPts val="0"/>
+                </a:spcAft>
+              </a:pPr>
+              <a:r>
+                <a:rPr sz="880">
+                  <a:solidFill>
+                    <a:srgbClr val="4D4D4D">
+                      <a:alpha val="100000"/>
+                    </a:srgbClr>
+                  </a:solidFill>
+                  <a:latin typeface="Helvetica"/>
+                  <a:cs typeface="Helvetica"/>
+                </a:rPr>
+                <a:t>3</a:t>
+              </a:r>
+            </a:p>
+          </p:txBody>
+        </p:sp>
+        <p:sp>
+          <p:nvSpPr>
+            <p:cNvPr id="82" name="tx82"/>
+            <p:cNvSpPr/>
+            <p:nvPr/>
+          </p:nvSpPr>
+          <p:spPr>
+            <a:xfrm>
+              <a:off x="762297" y="4356300"/>
+              <a:ext cx="62179" cy="80101"/>
+            </a:xfrm>
+            <a:prstGeom prst="rect">
+              <a:avLst/>
+            </a:prstGeom>
+            <a:noFill/>
+          </p:spPr>
+          <p:txBody>
+            <a:bodyPr lIns="0" rIns="0" tIns="0" bIns="0" anchorCtr="1" anchor="ctr" wrap="none"/>
+            <a:lstStyle/>
+            <a:p>
+              <a:pPr algn="l" marL="0" marR="0" indent="0">
+                <a:lnSpc>
+                  <a:spcPts val="880"/>
+                </a:lnSpc>
+                <a:spcBef>
+                  <a:spcPts val="0"/>
+                </a:spcBef>
+                <a:spcAft>
+                  <a:spcPts val="0"/>
+                </a:spcAft>
+              </a:pPr>
+              <a:r>
+                <a:rPr sz="880">
+                  <a:solidFill>
+                    <a:srgbClr val="4D4D4D">
+                      <a:alpha val="100000"/>
+                    </a:srgbClr>
+                  </a:solidFill>
+                  <a:latin typeface="Helvetica"/>
+                  <a:cs typeface="Helvetica"/>
+                </a:rPr>
+                <a:t>4</a:t>
+              </a:r>
+            </a:p>
+          </p:txBody>
+        </p:sp>
+        <p:sp>
+          <p:nvSpPr>
+            <p:cNvPr id="83" name="tx83"/>
+            <p:cNvSpPr/>
+            <p:nvPr/>
+          </p:nvSpPr>
+          <p:spPr>
+            <a:xfrm>
+              <a:off x="1164222" y="5716183"/>
+              <a:ext cx="161574" cy="80101"/>
+            </a:xfrm>
+            <a:prstGeom prst="rect">
+              <a:avLst/>
+            </a:prstGeom>
+            <a:noFill/>
+          </p:spPr>
+          <p:txBody>
+            <a:bodyPr lIns="0" rIns="0" tIns="0" bIns="0" anchorCtr="1" anchor="ctr" wrap="none"/>
+            <a:lstStyle/>
+            <a:p>
+              <a:pPr algn="l" marL="0" marR="0" indent="0">
+                <a:lnSpc>
+                  <a:spcPts val="880"/>
+                </a:lnSpc>
+                <a:spcBef>
+                  <a:spcPts val="0"/>
+                </a:spcBef>
+                <a:spcAft>
+                  <a:spcPts val="0"/>
+                </a:spcAft>
+              </a:pPr>
+              <a:r>
+                <a:rPr sz="880">
+                  <a:solidFill>
+                    <a:srgbClr val="4D4D4D">
+                      <a:alpha val="100000"/>
+                    </a:srgbClr>
+                  </a:solidFill>
+                  <a:latin typeface="Helvetica"/>
+                  <a:cs typeface="Helvetica"/>
+                </a:rPr>
+                <a:t>-50</a:t>
+              </a:r>
+            </a:p>
+          </p:txBody>
+        </p:sp>
+        <p:sp>
+          <p:nvSpPr>
+            <p:cNvPr id="84" name="tx84"/>
+            <p:cNvSpPr/>
+            <p:nvPr/>
+          </p:nvSpPr>
+          <p:spPr>
+            <a:xfrm>
+              <a:off x="2024485" y="5716183"/>
+              <a:ext cx="161574" cy="80101"/>
+            </a:xfrm>
+            <a:prstGeom prst="rect">
+              <a:avLst/>
+            </a:prstGeom>
+            <a:noFill/>
+          </p:spPr>
+          <p:txBody>
+            <a:bodyPr lIns="0" rIns="0" tIns="0" bIns="0" anchorCtr="1" anchor="ctr" wrap="none"/>
+            <a:lstStyle/>
+            <a:p>
+              <a:pPr algn="l" marL="0" marR="0" indent="0">
+                <a:lnSpc>
+                  <a:spcPts val="880"/>
+                </a:lnSpc>
+                <a:spcBef>
+                  <a:spcPts val="0"/>
+                </a:spcBef>
+                <a:spcAft>
+                  <a:spcPts val="0"/>
+                </a:spcAft>
+              </a:pPr>
+              <a:r>
+                <a:rPr sz="880">
+                  <a:solidFill>
+                    <a:srgbClr val="4D4D4D">
+                      <a:alpha val="100000"/>
+                    </a:srgbClr>
+                  </a:solidFill>
+                  <a:latin typeface="Helvetica"/>
+                  <a:cs typeface="Helvetica"/>
+                </a:rPr>
+                <a:t>-40</a:t>
+              </a:r>
+            </a:p>
+          </p:txBody>
+        </p:sp>
+        <p:sp>
+          <p:nvSpPr>
+            <p:cNvPr id="85" name="tx85"/>
+            <p:cNvSpPr/>
+            <p:nvPr/>
+          </p:nvSpPr>
+          <p:spPr>
+            <a:xfrm>
+              <a:off x="2884749" y="5716183"/>
+              <a:ext cx="161574" cy="80101"/>
+            </a:xfrm>
+            <a:prstGeom prst="rect">
+              <a:avLst/>
+            </a:prstGeom>
+            <a:noFill/>
+          </p:spPr>
+          <p:txBody>
+            <a:bodyPr lIns="0" rIns="0" tIns="0" bIns="0" anchorCtr="1" anchor="ctr" wrap="none"/>
+            <a:lstStyle/>
+            <a:p>
+              <a:pPr algn="l" marL="0" marR="0" indent="0">
+                <a:lnSpc>
+                  <a:spcPts val="880"/>
+                </a:lnSpc>
+                <a:spcBef>
+                  <a:spcPts val="0"/>
+                </a:spcBef>
+                <a:spcAft>
+                  <a:spcPts val="0"/>
+                </a:spcAft>
+              </a:pPr>
+              <a:r>
+                <a:rPr sz="880">
+                  <a:solidFill>
+                    <a:srgbClr val="4D4D4D">
+                      <a:alpha val="100000"/>
+                    </a:srgbClr>
+                  </a:solidFill>
+                  <a:latin typeface="Helvetica"/>
+                  <a:cs typeface="Helvetica"/>
+                </a:rPr>
+                <a:t>-30</a:t>
+              </a:r>
+            </a:p>
+          </p:txBody>
+        </p:sp>
+        <p:sp>
+          <p:nvSpPr>
+            <p:cNvPr id="86" name="tx86"/>
+            <p:cNvSpPr/>
+            <p:nvPr/>
+          </p:nvSpPr>
+          <p:spPr>
+            <a:xfrm>
+              <a:off x="3745012" y="5716183"/>
+              <a:ext cx="161574" cy="80101"/>
+            </a:xfrm>
+            <a:prstGeom prst="rect">
+              <a:avLst/>
+            </a:prstGeom>
+            <a:noFill/>
+          </p:spPr>
+          <p:txBody>
+            <a:bodyPr lIns="0" rIns="0" tIns="0" bIns="0" anchorCtr="1" anchor="ctr" wrap="none"/>
+            <a:lstStyle/>
+            <a:p>
+              <a:pPr algn="l" marL="0" marR="0" indent="0">
+                <a:lnSpc>
+                  <a:spcPts val="880"/>
+                </a:lnSpc>
+                <a:spcBef>
+                  <a:spcPts val="0"/>
+                </a:spcBef>
+                <a:spcAft>
+                  <a:spcPts val="0"/>
+                </a:spcAft>
+              </a:pPr>
+              <a:r>
+                <a:rPr sz="880">
+                  <a:solidFill>
+                    <a:srgbClr val="4D4D4D">
+                      <a:alpha val="100000"/>
+                    </a:srgbClr>
+                  </a:solidFill>
+                  <a:latin typeface="Helvetica"/>
+                  <a:cs typeface="Helvetica"/>
+                </a:rPr>
+                <a:t>-20</a:t>
+              </a:r>
+            </a:p>
+          </p:txBody>
+        </p:sp>
+        <p:sp>
+          <p:nvSpPr>
+            <p:cNvPr id="87" name="tx87"/>
+            <p:cNvSpPr/>
+            <p:nvPr/>
+          </p:nvSpPr>
+          <p:spPr>
+            <a:xfrm>
+              <a:off x="4605275" y="5716183"/>
+              <a:ext cx="161574" cy="80101"/>
+            </a:xfrm>
+            <a:prstGeom prst="rect">
+              <a:avLst/>
+            </a:prstGeom>
+            <a:noFill/>
+          </p:spPr>
+          <p:txBody>
+            <a:bodyPr lIns="0" rIns="0" tIns="0" bIns="0" anchorCtr="1" anchor="ctr" wrap="none"/>
+            <a:lstStyle/>
+            <a:p>
+              <a:pPr algn="l" marL="0" marR="0" indent="0">
+                <a:lnSpc>
+                  <a:spcPts val="880"/>
+                </a:lnSpc>
+                <a:spcBef>
+                  <a:spcPts val="0"/>
+                </a:spcBef>
+                <a:spcAft>
+                  <a:spcPts val="0"/>
+                </a:spcAft>
+              </a:pPr>
+              <a:r>
+                <a:rPr sz="880">
+                  <a:solidFill>
+                    <a:srgbClr val="4D4D4D">
+                      <a:alpha val="100000"/>
+                    </a:srgbClr>
+                  </a:solidFill>
+                  <a:latin typeface="Helvetica"/>
+                  <a:cs typeface="Helvetica"/>
+                </a:rPr>
+                <a:t>-10</a:t>
+              </a:r>
+            </a:p>
+          </p:txBody>
+        </p:sp>
+        <p:sp>
+          <p:nvSpPr>
+            <p:cNvPr id="88" name="tx88"/>
+            <p:cNvSpPr/>
+            <p:nvPr/>
+          </p:nvSpPr>
+          <p:spPr>
+            <a:xfrm>
+              <a:off x="5515235" y="5716183"/>
+              <a:ext cx="62179" cy="80101"/>
+            </a:xfrm>
+            <a:prstGeom prst="rect">
+              <a:avLst/>
+            </a:prstGeom>
+            <a:noFill/>
+          </p:spPr>
+          <p:txBody>
+            <a:bodyPr lIns="0" rIns="0" tIns="0" bIns="0" anchorCtr="1" anchor="ctr" wrap="none"/>
+            <a:lstStyle/>
+            <a:p>
+              <a:pPr algn="l" marL="0" marR="0" indent="0">
+                <a:lnSpc>
+                  <a:spcPts val="880"/>
+                </a:lnSpc>
+                <a:spcBef>
+                  <a:spcPts val="0"/>
+                </a:spcBef>
+                <a:spcAft>
+                  <a:spcPts val="0"/>
+                </a:spcAft>
+              </a:pPr>
+              <a:r>
+                <a:rPr sz="880">
+                  <a:solidFill>
+                    <a:srgbClr val="4D4D4D">
+                      <a:alpha val="100000"/>
+                    </a:srgbClr>
+                  </a:solidFill>
+                  <a:latin typeface="Helvetica"/>
+                  <a:cs typeface="Helvetica"/>
+                </a:rPr>
+                <a:t>0</a:t>
+              </a:r>
+            </a:p>
+          </p:txBody>
+        </p:sp>
+        <p:sp>
+          <p:nvSpPr>
+            <p:cNvPr id="89" name="tx89"/>
+            <p:cNvSpPr/>
+            <p:nvPr/>
+          </p:nvSpPr>
+          <p:spPr>
+            <a:xfrm>
+              <a:off x="6344409" y="5716183"/>
+              <a:ext cx="124358" cy="80101"/>
+            </a:xfrm>
+            <a:prstGeom prst="rect">
+              <a:avLst/>
+            </a:prstGeom>
+            <a:noFill/>
+          </p:spPr>
+          <p:txBody>
+            <a:bodyPr lIns="0" rIns="0" tIns="0" bIns="0" anchorCtr="1" anchor="ctr" wrap="none"/>
+            <a:lstStyle/>
+            <a:p>
+              <a:pPr algn="l" marL="0" marR="0" indent="0">
+                <a:lnSpc>
+                  <a:spcPts val="880"/>
+                </a:lnSpc>
+                <a:spcBef>
+                  <a:spcPts val="0"/>
+                </a:spcBef>
+                <a:spcAft>
+                  <a:spcPts val="0"/>
+                </a:spcAft>
+              </a:pPr>
+              <a:r>
+                <a:rPr sz="880">
+                  <a:solidFill>
+                    <a:srgbClr val="4D4D4D">
+                      <a:alpha val="100000"/>
+                    </a:srgbClr>
+                  </a:solidFill>
+                  <a:latin typeface="Helvetica"/>
+                  <a:cs typeface="Helvetica"/>
+                </a:rPr>
+                <a:t>10</a:t>
+              </a:r>
+            </a:p>
+          </p:txBody>
+        </p:sp>
+        <p:sp>
+          <p:nvSpPr>
+            <p:cNvPr id="90" name="tx90"/>
+            <p:cNvSpPr/>
+            <p:nvPr/>
+          </p:nvSpPr>
+          <p:spPr>
+            <a:xfrm>
+              <a:off x="7204672" y="5716183"/>
+              <a:ext cx="124358" cy="80101"/>
+            </a:xfrm>
+            <a:prstGeom prst="rect">
+              <a:avLst/>
+            </a:prstGeom>
+            <a:noFill/>
+          </p:spPr>
+          <p:txBody>
+            <a:bodyPr lIns="0" rIns="0" tIns="0" bIns="0" anchorCtr="1" anchor="ctr" wrap="none"/>
+            <a:lstStyle/>
+            <a:p>
+              <a:pPr algn="l" marL="0" marR="0" indent="0">
+                <a:lnSpc>
+                  <a:spcPts val="880"/>
+                </a:lnSpc>
+                <a:spcBef>
+                  <a:spcPts val="0"/>
+                </a:spcBef>
+                <a:spcAft>
+                  <a:spcPts val="0"/>
+                </a:spcAft>
+              </a:pPr>
+              <a:r>
+                <a:rPr sz="880">
+                  <a:solidFill>
+                    <a:srgbClr val="4D4D4D">
+                      <a:alpha val="100000"/>
+                    </a:srgbClr>
+                  </a:solidFill>
+                  <a:latin typeface="Helvetica"/>
+                  <a:cs typeface="Helvetica"/>
+                </a:rPr>
+                <a:t>20</a:t>
+              </a:r>
+            </a:p>
+          </p:txBody>
+        </p:sp>
+        <p:sp>
+          <p:nvSpPr>
+            <p:cNvPr id="91" name="tx91"/>
+            <p:cNvSpPr/>
+            <p:nvPr/>
+          </p:nvSpPr>
+          <p:spPr>
+            <a:xfrm>
+              <a:off x="8064935" y="5716183"/>
+              <a:ext cx="124358" cy="80101"/>
+            </a:xfrm>
+            <a:prstGeom prst="rect">
+              <a:avLst/>
+            </a:prstGeom>
+            <a:noFill/>
+          </p:spPr>
+          <p:txBody>
+            <a:bodyPr lIns="0" rIns="0" tIns="0" bIns="0" anchorCtr="1" anchor="ctr" wrap="none"/>
+            <a:lstStyle/>
+            <a:p>
+              <a:pPr algn="l" marL="0" marR="0" indent="0">
+                <a:lnSpc>
+                  <a:spcPts val="880"/>
+                </a:lnSpc>
+                <a:spcBef>
+                  <a:spcPts val="0"/>
+                </a:spcBef>
+                <a:spcAft>
+                  <a:spcPts val="0"/>
+                </a:spcAft>
+              </a:pPr>
+              <a:r>
+                <a:rPr sz="880">
+                  <a:solidFill>
+                    <a:srgbClr val="4D4D4D">
+                      <a:alpha val="100000"/>
+                    </a:srgbClr>
+                  </a:solidFill>
+                  <a:latin typeface="Helvetica"/>
+                  <a:cs typeface="Helvetica"/>
+                </a:rPr>
+                <a:t>30</a:t>
+              </a:r>
+            </a:p>
+          </p:txBody>
+        </p:sp>
+        <p:sp>
+          <p:nvSpPr>
+            <p:cNvPr id="92" name="tx92"/>
+            <p:cNvSpPr/>
+            <p:nvPr/>
+          </p:nvSpPr>
+          <p:spPr>
+            <a:xfrm>
+              <a:off x="1561815" y="5855859"/>
+              <a:ext cx="6311097" cy="100218"/>
+            </a:xfrm>
+            <a:prstGeom prst="rect">
+              <a:avLst/>
+            </a:prstGeom>
+            <a:noFill/>
+          </p:spPr>
+          <p:txBody>
+            <a:bodyPr lIns="0" rIns="0" tIns="0" bIns="0" anchorCtr="1" anchor="ctr" wrap="none"/>
+            <a:lstStyle/>
+            <a:p>
+              <a:pPr algn="l" marL="0" marR="0" indent="0">
+                <a:lnSpc>
+                  <a:spcPts val="1100"/>
+                </a:lnSpc>
+                <a:spcBef>
+                  <a:spcPts val="0"/>
+                </a:spcBef>
+                <a:spcAft>
+                  <a:spcPts val="0"/>
+                </a:spcAft>
+              </a:pPr>
+              <a:r>
+                <a:rPr sz="1100">
+                  <a:solidFill>
+                    <a:srgbClr val="000000">
+                      <a:alpha val="100000"/>
+                    </a:srgbClr>
+                  </a:solidFill>
+                  <a:latin typeface="Helvetica"/>
+                  <a:cs typeface="Helvetica"/>
+                </a:rPr>
+                <a:t>Sensitivity eGFR Difference (%): 100 × (CKD-EPI 2012 CysC − CKD-EPI 2021 Cr) / CKD-EPI 2021 Cr</a:t>
+              </a:r>
+            </a:p>
+          </p:txBody>
+        </p:sp>
+        <p:sp>
+          <p:nvSpPr>
+            <p:cNvPr id="93" name="tx93"/>
+            <p:cNvSpPr/>
+            <p:nvPr/>
+          </p:nvSpPr>
+          <p:spPr>
+            <a:xfrm rot="-5400000">
+              <a:off x="138035" y="4944909"/>
+              <a:ext cx="1016904" cy="100218"/>
+            </a:xfrm>
+            <a:prstGeom prst="rect">
+              <a:avLst/>
+            </a:prstGeom>
+            <a:noFill/>
+          </p:spPr>
+          <p:txBody>
+            <a:bodyPr lIns="0" rIns="0" tIns="0" bIns="0" anchorCtr="1" anchor="ctr" wrap="none"/>
+            <a:lstStyle/>
+            <a:p>
+              <a:pPr algn="l" marL="0" marR="0" indent="0">
+                <a:lnSpc>
+                  <a:spcPts val="1100"/>
+                </a:lnSpc>
+                <a:spcBef>
+                  <a:spcPts val="0"/>
+                </a:spcBef>
+                <a:spcAft>
+                  <a:spcPts val="0"/>
+                </a:spcAft>
+              </a:pPr>
+              <a:r>
+                <a:rPr sz="1100">
+                  <a:solidFill>
+                    <a:srgbClr val="000000">
+                      <a:alpha val="100000"/>
+                    </a:srgbClr>
+                  </a:solidFill>
+                  <a:latin typeface="Helvetica"/>
+                  <a:cs typeface="Helvetica"/>
+                </a:rPr>
+                <a:t>subHR (95% CI)</a:t>
+              </a:r>
+            </a:p>
+          </p:txBody>
+        </p:sp>
+        <p:sp>
+          <p:nvSpPr>
+            <p:cNvPr id="94" name="tx94"/>
+            <p:cNvSpPr/>
+            <p:nvPr/>
+          </p:nvSpPr>
+          <p:spPr>
+            <a:xfrm>
+              <a:off x="887106" y="4159544"/>
+              <a:ext cx="6959864" cy="82021"/>
+            </a:xfrm>
+            <a:prstGeom prst="rect">
+              <a:avLst/>
+            </a:prstGeom>
+            <a:noFill/>
+          </p:spPr>
+          <p:txBody>
+            <a:bodyPr lIns="0" rIns="0" tIns="0" bIns="0" anchorCtr="1" anchor="ctr" wrap="none"/>
+            <a:lstStyle/>
+            <a:p>
+              <a:pPr algn="l" marL="0" marR="0" indent="0">
+                <a:lnSpc>
+                  <a:spcPts val="900"/>
+                </a:lnSpc>
+                <a:spcBef>
+                  <a:spcPts val="0"/>
+                </a:spcBef>
+                <a:spcAft>
+                  <a:spcPts val="0"/>
+                </a:spcAft>
+              </a:pPr>
+              <a:r>
+                <a:rPr sz="900">
+                  <a:solidFill>
+                    <a:srgbClr val="404040">
+                      <a:alpha val="100000"/>
+                    </a:srgbClr>
+                  </a:solidFill>
+                  <a:latin typeface="Helvetica"/>
+                  <a:cs typeface="Helvetica"/>
+                </a:rPr>
+                <a:t>subHR per 10 % decline: 1.24 (1.09-1.41), p_Bonf = 0.008 (n = 6)  |  per IQR decline (Δ = 27.5 %): 1.80 (1.26-2.58)  |  IQR: [-29.1, -1.6] %</a:t>
+              </a:r>
+            </a:p>
+          </p:txBody>
+        </p:sp>
+        <p:sp>
+          <p:nvSpPr>
+            <p:cNvPr id="95" name="tx95"/>
+            <p:cNvSpPr/>
+            <p:nvPr/>
+          </p:nvSpPr>
+          <p:spPr>
+            <a:xfrm>
+              <a:off x="887106" y="3932770"/>
               <a:ext cx="1834103" cy="120152"/>
             </a:xfrm>
             <a:prstGeom prst="rect">
